--- a/Prezentace/4. ročník/PGM - 03 - lambda funkce.pptx
+++ b/Prezentace/4. ročník/PGM - 03 - lambda funkce.pptx
@@ -1,19 +1,20 @@
 
 <file path=ppt/presentation.xml><?xml version="1.0" encoding="utf-8"?>
-<p:presentation xmlns:a="http://schemas.openxmlformats.org/drawingml/2006/main" xmlns:r="http://schemas.openxmlformats.org/officeDocument/2006/relationships" xmlns:p="http://schemas.openxmlformats.org/presentationml/2006/main" saveSubsetFonts="1">
+<p:presentation xmlns:a="http://schemas.openxmlformats.org/drawingml/2006/main" xmlns:r="http://schemas.openxmlformats.org/officeDocument/2006/relationships" xmlns:p="http://schemas.openxmlformats.org/presentationml/2006/main">
   <p:sldMasterIdLst>
-    <p:sldMasterId id="2147483675" r:id="rId1"/>
+    <p:sldMasterId id="2147483687" r:id="rId4"/>
   </p:sldMasterIdLst>
   <p:sldIdLst>
-    <p:sldId id="256" r:id="rId2"/>
-    <p:sldId id="257" r:id="rId3"/>
-    <p:sldId id="258" r:id="rId4"/>
-    <p:sldId id="259" r:id="rId5"/>
-    <p:sldId id="260" r:id="rId6"/>
-    <p:sldId id="261" r:id="rId7"/>
+    <p:sldId id="262" r:id="rId5"/>
+    <p:sldId id="264" r:id="rId6"/>
+    <p:sldId id="263" r:id="rId7"/>
+    <p:sldId id="265" r:id="rId8"/>
+    <p:sldId id="266" r:id="rId9"/>
+    <p:sldId id="267" r:id="rId10"/>
+    <p:sldId id="268" r:id="rId11"/>
   </p:sldIdLst>
   <p:sldSz cx="12192000" cy="6858000"/>
-  <p:notesSz cx="6858000" cy="9144000"/>
+  <p:notesSz cx="7559675" cy="10691813"/>
   <p:defaultTextStyle>
     <a:defPPr>
       <a:defRPr lang="cs-CZ"/>
@@ -109,17 +110,21 @@
       </a:defRPr>
     </a:lvl9pPr>
   </p:defaultTextStyle>
-  <p:extLst>
-    <p:ext uri="{EFAFB233-063F-42B5-8137-9DF3F51BA10A}">
-      <p15:sldGuideLst xmlns:p15="http://schemas.microsoft.com/office/powerpoint/2012/main"/>
-    </p:ext>
-  </p:extLst>
 </p:presentation>
+</file>
+
+<file path=ppt/revisionInfo.xml><?xml version="1.0" encoding="utf-8"?>
+<p1510:revInfo xmlns:a="http://schemas.openxmlformats.org/drawingml/2006/main" xmlns:r="http://schemas.openxmlformats.org/officeDocument/2006/relationships" xmlns:p1510="http://schemas.microsoft.com/office/powerpoint/2015/10/main">
+  <p1510:revLst>
+    <p1510:client id="{0AC99A78-AA4E-E5B1-E038-3EFADB21DCB2}" v="241" dt="2025-10-08T18:09:16.535"/>
+    <p1510:client id="{52690CBD-F93D-4ACF-9D96-3E21FD6512D0}" v="14" dt="2025-10-08T18:10:19.594"/>
+  </p1510:revLst>
+</p1510:revInfo>
 </file>
 
 <file path=ppt/slideLayouts/slideLayout1.xml><?xml version="1.0" encoding="utf-8"?>
 <p:sldLayout xmlns:a="http://schemas.openxmlformats.org/drawingml/2006/main" xmlns:r="http://schemas.openxmlformats.org/officeDocument/2006/relationships" xmlns:p="http://schemas.openxmlformats.org/presentationml/2006/main" showMasterSp="0" type="title" preserve="1">
-  <p:cSld name="Úvodní snímek">
+  <p:cSld name="Title Slide">
     <p:spTree>
       <p:nvGrpSpPr>
         <p:cNvPr id="1" name=""/>
@@ -243,10 +248,9 @@
           </a:lstStyle>
           <a:p>
             <a:r>
-              <a:rPr lang="cs-CZ"/>
-              <a:t>Kliknutím lze upravit styl.</a:t>
-            </a:r>
-            <a:endParaRPr lang="en-US" dirty="0"/>
+              <a:rPr lang="en-US" dirty="0"/>
+              <a:t>Click to edit Master title style</a:t>
+            </a:r>
           </a:p>
         </p:txBody>
       </p:sp>
@@ -317,21 +321,44 @@
           </a:lstStyle>
           <a:p>
             <a:r>
-              <a:rPr lang="cs-CZ"/>
-              <a:t>Kliknutím můžete upravit styl předlohy.</a:t>
-            </a:r>
+              <a:rPr lang="en-US" dirty="0"/>
+              <a:t>Click to edit Master subtitle style</a:t>
+            </a:r>
+          </a:p>
+        </p:txBody>
+      </p:sp>
+      <p:sp>
+        <p:nvSpPr>
+          <p:cNvPr id="4" name="Date Placeholder 3"/>
+          <p:cNvSpPr>
+            <a:spLocks noGrp="1"/>
+          </p:cNvSpPr>
+          <p:nvPr>
+            <p:ph type="dt" sz="half" idx="10"/>
+          </p:nvPr>
+        </p:nvSpPr>
+        <p:spPr/>
+        <p:txBody>
+          <a:bodyPr/>
+          <a:lstStyle/>
+          <a:p>
+            <a:fld id="{5586B75A-687E-405C-8A0B-8D00578BA2C3}" type="datetimeFigureOut">
+              <a:rPr lang="en-US" dirty="0"/>
+              <a:pPr/>
+              <a:t>10/8/2025</a:t>
+            </a:fld>
             <a:endParaRPr lang="en-US" dirty="0"/>
           </a:p>
         </p:txBody>
       </p:sp>
       <p:sp>
         <p:nvSpPr>
-          <p:cNvPr id="4" name="Date Placeholder 3"/>
-          <p:cNvSpPr>
-            <a:spLocks noGrp="1"/>
-          </p:cNvSpPr>
-          <p:nvPr>
-            <p:ph type="dt" sz="half" idx="10"/>
+          <p:cNvPr id="5" name="Footer Placeholder 4"/>
+          <p:cNvSpPr>
+            <a:spLocks noGrp="1"/>
+          </p:cNvSpPr>
+          <p:nvPr>
+            <p:ph type="ftr" sz="quarter" idx="11"/>
           </p:nvPr>
         </p:nvSpPr>
         <p:spPr/>
@@ -339,22 +366,18 @@
           <a:bodyPr/>
           <a:lstStyle/>
           <a:p>
-            <a:fld id="{C7D5A91B-385C-480B-99E7-187931F39E12}" type="datetimeFigureOut">
-              <a:rPr lang="cs-CZ" smtClean="0"/>
-              <a:t>05.11.2023</a:t>
-            </a:fld>
-            <a:endParaRPr lang="cs-CZ"/>
-          </a:p>
-        </p:txBody>
-      </p:sp>
-      <p:sp>
-        <p:nvSpPr>
-          <p:cNvPr id="5" name="Footer Placeholder 4"/>
-          <p:cNvSpPr>
-            <a:spLocks noGrp="1"/>
-          </p:cNvSpPr>
-          <p:nvPr>
-            <p:ph type="ftr" sz="quarter" idx="11"/>
+            <a:endParaRPr lang="en-US" dirty="0"/>
+          </a:p>
+        </p:txBody>
+      </p:sp>
+      <p:sp>
+        <p:nvSpPr>
+          <p:cNvPr id="6" name="Slide Number Placeholder 5"/>
+          <p:cNvSpPr>
+            <a:spLocks noGrp="1"/>
+          </p:cNvSpPr>
+          <p:nvPr>
+            <p:ph type="sldNum" sz="quarter" idx="12"/>
           </p:nvPr>
         </p:nvSpPr>
         <p:spPr/>
@@ -362,37 +385,19 @@
           <a:bodyPr/>
           <a:lstStyle/>
           <a:p>
-            <a:endParaRPr lang="cs-CZ"/>
-          </a:p>
-        </p:txBody>
-      </p:sp>
-      <p:sp>
-        <p:nvSpPr>
-          <p:cNvPr id="6" name="Slide Number Placeholder 5"/>
-          <p:cNvSpPr>
-            <a:spLocks noGrp="1"/>
-          </p:cNvSpPr>
-          <p:nvPr>
-            <p:ph type="sldNum" sz="quarter" idx="12"/>
-          </p:nvPr>
-        </p:nvSpPr>
-        <p:spPr/>
-        <p:txBody>
-          <a:bodyPr/>
-          <a:lstStyle/>
-          <a:p>
-            <a:fld id="{06B08FAE-D1AE-47B2-9F62-981A44BE47A4}" type="slidenum">
-              <a:rPr lang="cs-CZ" smtClean="0"/>
+            <a:fld id="{4FAB73BC-B049-4115-A692-8D63A059BFB8}" type="slidenum">
+              <a:rPr lang="en-US" dirty="0"/>
+              <a:pPr/>
               <a:t>‹#›</a:t>
             </a:fld>
-            <a:endParaRPr lang="cs-CZ"/>
+            <a:endParaRPr lang="en-US" dirty="0"/>
           </a:p>
         </p:txBody>
       </p:sp>
     </p:spTree>
     <p:extLst>
       <p:ext uri="{BB962C8B-B14F-4D97-AF65-F5344CB8AC3E}">
-        <p14:creationId xmlns:p14="http://schemas.microsoft.com/office/powerpoint/2010/main" val="1425433398"/>
+        <p14:creationId xmlns:p14="http://schemas.microsoft.com/office/powerpoint/2010/main" val="998250483"/>
       </p:ext>
     </p:extLst>
   </p:cSld>
@@ -404,7 +409,7 @@
 
 <file path=ppt/slideLayouts/slideLayout10.xml><?xml version="1.0" encoding="utf-8"?>
 <p:sldLayout xmlns:a="http://schemas.openxmlformats.org/drawingml/2006/main" xmlns:r="http://schemas.openxmlformats.org/officeDocument/2006/relationships" xmlns:p="http://schemas.openxmlformats.org/presentationml/2006/main" type="vertTx" preserve="1">
-  <p:cSld name="Nadpis a svislý text">
+  <p:cSld name="Title and Vertical Text">
     <p:spTree>
       <p:nvGrpSpPr>
         <p:cNvPr id="1" name=""/>
@@ -435,73 +440,114 @@
           <a:lstStyle/>
           <a:p>
             <a:r>
-              <a:rPr lang="cs-CZ"/>
-              <a:t>Kliknutím lze upravit styl.</a:t>
-            </a:r>
+              <a:rPr lang="en-US" dirty="0"/>
+              <a:t>Click to edit Master title style</a:t>
+            </a:r>
+          </a:p>
+        </p:txBody>
+      </p:sp>
+      <p:sp>
+        <p:nvSpPr>
+          <p:cNvPr id="3" name="Vertical Text Placeholder 2"/>
+          <p:cNvSpPr>
+            <a:spLocks noGrp="1"/>
+          </p:cNvSpPr>
+          <p:nvPr>
+            <p:ph type="body" orient="vert" idx="1"/>
+          </p:nvPr>
+        </p:nvSpPr>
+        <p:spPr/>
+        <p:txBody>
+          <a:bodyPr vert="eaVert" anchor="t"/>
+          <a:lstStyle/>
+          <a:p>
+            <a:pPr lvl="0"/>
+            <a:r>
+              <a:rPr lang="en-US" dirty="0"/>
+              <a:t>Click to edit Master text styles</a:t>
+            </a:r>
+          </a:p>
+          <a:p>
+            <a:pPr lvl="1"/>
+            <a:r>
+              <a:rPr lang="en-US" dirty="0"/>
+              <a:t>Second level</a:t>
+            </a:r>
+          </a:p>
+          <a:p>
+            <a:pPr lvl="2"/>
+            <a:r>
+              <a:rPr lang="en-US" dirty="0"/>
+              <a:t>Third level</a:t>
+            </a:r>
+          </a:p>
+          <a:p>
+            <a:pPr lvl="3"/>
+            <a:r>
+              <a:rPr lang="en-US" dirty="0"/>
+              <a:t>Fourth level</a:t>
+            </a:r>
+          </a:p>
+          <a:p>
+            <a:pPr lvl="4"/>
+            <a:r>
+              <a:rPr lang="en-US" dirty="0"/>
+              <a:t>Fifth level</a:t>
+            </a:r>
+          </a:p>
+        </p:txBody>
+      </p:sp>
+      <p:sp>
+        <p:nvSpPr>
+          <p:cNvPr id="7" name="Date Placeholder 6"/>
+          <p:cNvSpPr>
+            <a:spLocks noGrp="1"/>
+          </p:cNvSpPr>
+          <p:nvPr>
+            <p:ph type="dt" sz="half" idx="10"/>
+          </p:nvPr>
+        </p:nvSpPr>
+        <p:spPr/>
+        <p:txBody>
+          <a:bodyPr/>
+          <a:lstStyle/>
+          <a:p>
+            <a:fld id="{5586B75A-687E-405C-8A0B-8D00578BA2C3}" type="datetimeFigureOut">
+              <a:rPr lang="en-US" dirty="0"/>
+              <a:pPr/>
+              <a:t>10/8/2025</a:t>
+            </a:fld>
             <a:endParaRPr lang="en-US" dirty="0"/>
           </a:p>
         </p:txBody>
       </p:sp>
       <p:sp>
         <p:nvSpPr>
-          <p:cNvPr id="3" name="Vertical Text Placeholder 2"/>
-          <p:cNvSpPr>
-            <a:spLocks noGrp="1"/>
-          </p:cNvSpPr>
-          <p:nvPr>
-            <p:ph type="body" orient="vert" idx="1"/>
+          <p:cNvPr id="8" name="Footer Placeholder 7"/>
+          <p:cNvSpPr>
+            <a:spLocks noGrp="1"/>
+          </p:cNvSpPr>
+          <p:nvPr>
+            <p:ph type="ftr" sz="quarter" idx="11"/>
           </p:nvPr>
         </p:nvSpPr>
         <p:spPr/>
         <p:txBody>
-          <a:bodyPr vert="eaVert" anchor="t"/>
-          <a:lstStyle/>
-          <a:p>
-            <a:pPr lvl="0"/>
-            <a:r>
-              <a:rPr lang="cs-CZ"/>
-              <a:t>Upravte styly předlohy textu.</a:t>
-            </a:r>
-          </a:p>
-          <a:p>
-            <a:pPr lvl="1"/>
-            <a:r>
-              <a:rPr lang="cs-CZ"/>
-              <a:t>Druhá úroveň</a:t>
-            </a:r>
-          </a:p>
-          <a:p>
-            <a:pPr lvl="2"/>
-            <a:r>
-              <a:rPr lang="cs-CZ"/>
-              <a:t>Třetí úroveň</a:t>
-            </a:r>
-          </a:p>
-          <a:p>
-            <a:pPr lvl="3"/>
-            <a:r>
-              <a:rPr lang="cs-CZ"/>
-              <a:t>Čtvrtá úroveň</a:t>
-            </a:r>
-          </a:p>
-          <a:p>
-            <a:pPr lvl="4"/>
-            <a:r>
-              <a:rPr lang="cs-CZ"/>
-              <a:t>Pátá úroveň</a:t>
-            </a:r>
+          <a:bodyPr/>
+          <a:lstStyle/>
+          <a:p>
             <a:endParaRPr lang="en-US" dirty="0"/>
           </a:p>
         </p:txBody>
       </p:sp>
       <p:sp>
         <p:nvSpPr>
-          <p:cNvPr id="7" name="Date Placeholder 6"/>
-          <p:cNvSpPr>
-            <a:spLocks noGrp="1"/>
-          </p:cNvSpPr>
-          <p:nvPr>
-            <p:ph type="dt" sz="half" idx="10"/>
+          <p:cNvPr id="9" name="Slide Number Placeholder 8"/>
+          <p:cNvSpPr>
+            <a:spLocks noGrp="1"/>
+          </p:cNvSpPr>
+          <p:nvPr>
+            <p:ph type="sldNum" sz="quarter" idx="12"/>
           </p:nvPr>
         </p:nvSpPr>
         <p:spPr/>
@@ -509,60 +555,19 @@
           <a:bodyPr/>
           <a:lstStyle/>
           <a:p>
-            <a:fld id="{C7D5A91B-385C-480B-99E7-187931F39E12}" type="datetimeFigureOut">
-              <a:rPr lang="cs-CZ" smtClean="0"/>
-              <a:t>05.11.2023</a:t>
-            </a:fld>
-            <a:endParaRPr lang="cs-CZ"/>
-          </a:p>
-        </p:txBody>
-      </p:sp>
-      <p:sp>
-        <p:nvSpPr>
-          <p:cNvPr id="8" name="Footer Placeholder 7"/>
-          <p:cNvSpPr>
-            <a:spLocks noGrp="1"/>
-          </p:cNvSpPr>
-          <p:nvPr>
-            <p:ph type="ftr" sz="quarter" idx="11"/>
-          </p:nvPr>
-        </p:nvSpPr>
-        <p:spPr/>
-        <p:txBody>
-          <a:bodyPr/>
-          <a:lstStyle/>
-          <a:p>
-            <a:endParaRPr lang="cs-CZ"/>
-          </a:p>
-        </p:txBody>
-      </p:sp>
-      <p:sp>
-        <p:nvSpPr>
-          <p:cNvPr id="9" name="Slide Number Placeholder 8"/>
-          <p:cNvSpPr>
-            <a:spLocks noGrp="1"/>
-          </p:cNvSpPr>
-          <p:nvPr>
-            <p:ph type="sldNum" sz="quarter" idx="12"/>
-          </p:nvPr>
-        </p:nvSpPr>
-        <p:spPr/>
-        <p:txBody>
-          <a:bodyPr/>
-          <a:lstStyle/>
-          <a:p>
-            <a:fld id="{06B08FAE-D1AE-47B2-9F62-981A44BE47A4}" type="slidenum">
-              <a:rPr lang="cs-CZ" smtClean="0"/>
+            <a:fld id="{4FAB73BC-B049-4115-A692-8D63A059BFB8}" type="slidenum">
+              <a:rPr lang="en-US" dirty="0"/>
+              <a:pPr/>
               <a:t>‹#›</a:t>
             </a:fld>
-            <a:endParaRPr lang="cs-CZ"/>
+            <a:endParaRPr lang="en-US" dirty="0"/>
           </a:p>
         </p:txBody>
       </p:sp>
     </p:spTree>
     <p:extLst>
       <p:ext uri="{BB962C8B-B14F-4D97-AF65-F5344CB8AC3E}">
-        <p14:creationId xmlns:p14="http://schemas.microsoft.com/office/powerpoint/2010/main" val="2522190843"/>
+        <p14:creationId xmlns:p14="http://schemas.microsoft.com/office/powerpoint/2010/main" val="2048588315"/>
       </p:ext>
     </p:extLst>
   </p:cSld>
@@ -574,7 +579,7 @@
 
 <file path=ppt/slideLayouts/slideLayout11.xml><?xml version="1.0" encoding="utf-8"?>
 <p:sldLayout xmlns:a="http://schemas.openxmlformats.org/drawingml/2006/main" xmlns:r="http://schemas.openxmlformats.org/officeDocument/2006/relationships" xmlns:p="http://schemas.openxmlformats.org/presentationml/2006/main" type="vertTitleAndTx" preserve="1">
-  <p:cSld name="Svislý nadpis a text">
+  <p:cSld name="Vertical Title and Text">
     <p:spTree>
       <p:nvGrpSpPr>
         <p:cNvPr id="1" name=""/>
@@ -610,10 +615,9 @@
           <a:lstStyle/>
           <a:p>
             <a:r>
-              <a:rPr lang="cs-CZ"/>
-              <a:t>Kliknutím lze upravit styl.</a:t>
-            </a:r>
-            <a:endParaRPr lang="en-US" dirty="0"/>
+              <a:rPr lang="en-US" dirty="0"/>
+              <a:t>Click to edit Master title style</a:t>
+            </a:r>
           </a:p>
         </p:txBody>
       </p:sp>
@@ -639,49 +643,72 @@
           <a:p>
             <a:pPr lvl="0"/>
             <a:r>
-              <a:rPr lang="cs-CZ"/>
-              <a:t>Upravte styly předlohy textu.</a:t>
+              <a:rPr lang="en-US" dirty="0"/>
+              <a:t>Click to edit Master text styles</a:t>
             </a:r>
           </a:p>
           <a:p>
             <a:pPr lvl="1"/>
             <a:r>
-              <a:rPr lang="cs-CZ"/>
-              <a:t>Druhá úroveň</a:t>
+              <a:rPr lang="en-US" dirty="0"/>
+              <a:t>Second level</a:t>
             </a:r>
           </a:p>
           <a:p>
             <a:pPr lvl="2"/>
             <a:r>
-              <a:rPr lang="cs-CZ"/>
-              <a:t>Třetí úroveň</a:t>
+              <a:rPr lang="en-US" dirty="0"/>
+              <a:t>Third level</a:t>
             </a:r>
           </a:p>
           <a:p>
             <a:pPr lvl="3"/>
             <a:r>
-              <a:rPr lang="cs-CZ"/>
-              <a:t>Čtvrtá úroveň</a:t>
+              <a:rPr lang="en-US" dirty="0"/>
+              <a:t>Fourth level</a:t>
             </a:r>
           </a:p>
           <a:p>
             <a:pPr lvl="4"/>
             <a:r>
-              <a:rPr lang="cs-CZ"/>
-              <a:t>Pátá úroveň</a:t>
-            </a:r>
+              <a:rPr lang="en-US" dirty="0"/>
+              <a:t>Fifth level</a:t>
+            </a:r>
+          </a:p>
+        </p:txBody>
+      </p:sp>
+      <p:sp>
+        <p:nvSpPr>
+          <p:cNvPr id="7" name="Date Placeholder 6"/>
+          <p:cNvSpPr>
+            <a:spLocks noGrp="1"/>
+          </p:cNvSpPr>
+          <p:nvPr>
+            <p:ph type="dt" sz="half" idx="10"/>
+          </p:nvPr>
+        </p:nvSpPr>
+        <p:spPr/>
+        <p:txBody>
+          <a:bodyPr/>
+          <a:lstStyle/>
+          <a:p>
+            <a:fld id="{5586B75A-687E-405C-8A0B-8D00578BA2C3}" type="datetimeFigureOut">
+              <a:rPr lang="en-US" dirty="0"/>
+              <a:pPr/>
+              <a:t>10/8/2025</a:t>
+            </a:fld>
             <a:endParaRPr lang="en-US" dirty="0"/>
           </a:p>
         </p:txBody>
       </p:sp>
       <p:sp>
         <p:nvSpPr>
-          <p:cNvPr id="7" name="Date Placeholder 6"/>
-          <p:cNvSpPr>
-            <a:spLocks noGrp="1"/>
-          </p:cNvSpPr>
-          <p:nvPr>
-            <p:ph type="dt" sz="half" idx="10"/>
+          <p:cNvPr id="8" name="Footer Placeholder 7"/>
+          <p:cNvSpPr>
+            <a:spLocks noGrp="1"/>
+          </p:cNvSpPr>
+          <p:nvPr>
+            <p:ph type="ftr" sz="quarter" idx="11"/>
           </p:nvPr>
         </p:nvSpPr>
         <p:spPr/>
@@ -689,22 +716,18 @@
           <a:bodyPr/>
           <a:lstStyle/>
           <a:p>
-            <a:fld id="{C7D5A91B-385C-480B-99E7-187931F39E12}" type="datetimeFigureOut">
-              <a:rPr lang="cs-CZ" smtClean="0"/>
-              <a:t>05.11.2023</a:t>
-            </a:fld>
-            <a:endParaRPr lang="cs-CZ"/>
-          </a:p>
-        </p:txBody>
-      </p:sp>
-      <p:sp>
-        <p:nvSpPr>
-          <p:cNvPr id="8" name="Footer Placeholder 7"/>
-          <p:cNvSpPr>
-            <a:spLocks noGrp="1"/>
-          </p:cNvSpPr>
-          <p:nvPr>
-            <p:ph type="ftr" sz="quarter" idx="11"/>
+            <a:endParaRPr lang="en-US" dirty="0"/>
+          </a:p>
+        </p:txBody>
+      </p:sp>
+      <p:sp>
+        <p:nvSpPr>
+          <p:cNvPr id="9" name="Slide Number Placeholder 8"/>
+          <p:cNvSpPr>
+            <a:spLocks noGrp="1"/>
+          </p:cNvSpPr>
+          <p:nvPr>
+            <p:ph type="sldNum" sz="quarter" idx="12"/>
           </p:nvPr>
         </p:nvSpPr>
         <p:spPr/>
@@ -712,37 +735,19 @@
           <a:bodyPr/>
           <a:lstStyle/>
           <a:p>
-            <a:endParaRPr lang="cs-CZ"/>
-          </a:p>
-        </p:txBody>
-      </p:sp>
-      <p:sp>
-        <p:nvSpPr>
-          <p:cNvPr id="9" name="Slide Number Placeholder 8"/>
-          <p:cNvSpPr>
-            <a:spLocks noGrp="1"/>
-          </p:cNvSpPr>
-          <p:nvPr>
-            <p:ph type="sldNum" sz="quarter" idx="12"/>
-          </p:nvPr>
-        </p:nvSpPr>
-        <p:spPr/>
-        <p:txBody>
-          <a:bodyPr/>
-          <a:lstStyle/>
-          <a:p>
-            <a:fld id="{06B08FAE-D1AE-47B2-9F62-981A44BE47A4}" type="slidenum">
-              <a:rPr lang="cs-CZ" smtClean="0"/>
+            <a:fld id="{4FAB73BC-B049-4115-A692-8D63A059BFB8}" type="slidenum">
+              <a:rPr lang="en-US" dirty="0"/>
+              <a:pPr/>
               <a:t>‹#›</a:t>
             </a:fld>
-            <a:endParaRPr lang="cs-CZ"/>
+            <a:endParaRPr lang="en-US" dirty="0"/>
           </a:p>
         </p:txBody>
       </p:sp>
     </p:spTree>
     <p:extLst>
       <p:ext uri="{BB962C8B-B14F-4D97-AF65-F5344CB8AC3E}">
-        <p14:creationId xmlns:p14="http://schemas.microsoft.com/office/powerpoint/2010/main" val="321280995"/>
+        <p14:creationId xmlns:p14="http://schemas.microsoft.com/office/powerpoint/2010/main" val="3769581478"/>
       </p:ext>
     </p:extLst>
   </p:cSld>
@@ -785,21 +790,95 @@
           <a:lstStyle/>
           <a:p>
             <a:r>
-              <a:rPr lang="cs-CZ"/>
-              <a:t>Kliknutím lze upravit styl.</a:t>
-            </a:r>
+              <a:rPr lang="en-US" dirty="0"/>
+              <a:t>Click to edit Master title style</a:t>
+            </a:r>
+          </a:p>
+        </p:txBody>
+      </p:sp>
+      <p:sp>
+        <p:nvSpPr>
+          <p:cNvPr id="3" name="Content Placeholder 2"/>
+          <p:cNvSpPr>
+            <a:spLocks noGrp="1"/>
+          </p:cNvSpPr>
+          <p:nvPr>
+            <p:ph idx="1"/>
+          </p:nvPr>
+        </p:nvSpPr>
+        <p:spPr/>
+        <p:txBody>
+          <a:bodyPr/>
+          <a:lstStyle/>
+          <a:p>
+            <a:pPr lvl="0"/>
+            <a:r>
+              <a:rPr lang="en-US" dirty="0"/>
+              <a:t>Click to edit Master text styles</a:t>
+            </a:r>
+          </a:p>
+          <a:p>
+            <a:pPr lvl="1"/>
+            <a:r>
+              <a:rPr lang="en-US" dirty="0"/>
+              <a:t>Second level</a:t>
+            </a:r>
+          </a:p>
+          <a:p>
+            <a:pPr lvl="2"/>
+            <a:r>
+              <a:rPr lang="en-US" dirty="0"/>
+              <a:t>Third level</a:t>
+            </a:r>
+          </a:p>
+          <a:p>
+            <a:pPr lvl="3"/>
+            <a:r>
+              <a:rPr lang="en-US" dirty="0"/>
+              <a:t>Fourth level</a:t>
+            </a:r>
+          </a:p>
+          <a:p>
+            <a:pPr lvl="4"/>
+            <a:r>
+              <a:rPr lang="en-US" dirty="0"/>
+              <a:t>Fifth level</a:t>
+            </a:r>
+          </a:p>
+        </p:txBody>
+      </p:sp>
+      <p:sp>
+        <p:nvSpPr>
+          <p:cNvPr id="4" name="Date Placeholder 3"/>
+          <p:cNvSpPr>
+            <a:spLocks noGrp="1"/>
+          </p:cNvSpPr>
+          <p:nvPr>
+            <p:ph type="dt" sz="half" idx="10"/>
+          </p:nvPr>
+        </p:nvSpPr>
+        <p:spPr/>
+        <p:txBody>
+          <a:bodyPr/>
+          <a:lstStyle/>
+          <a:p>
+            <a:fld id="{5586B75A-687E-405C-8A0B-8D00578BA2C3}" type="datetimeFigureOut">
+              <a:rPr lang="en-US" dirty="0"/>
+              <a:pPr/>
+              <a:t>10/8/2025</a:t>
+            </a:fld>
             <a:endParaRPr lang="en-US" dirty="0"/>
           </a:p>
         </p:txBody>
       </p:sp>
       <p:sp>
         <p:nvSpPr>
-          <p:cNvPr id="3" name="Content Placeholder 2"/>
-          <p:cNvSpPr>
-            <a:spLocks noGrp="1"/>
-          </p:cNvSpPr>
-          <p:nvPr>
-            <p:ph idx="1"/>
+          <p:cNvPr id="5" name="Footer Placeholder 4"/>
+          <p:cNvSpPr>
+            <a:spLocks noGrp="1"/>
+          </p:cNvSpPr>
+          <p:nvPr>
+            <p:ph type="ftr" sz="quarter" idx="11"/>
           </p:nvPr>
         </p:nvSpPr>
         <p:spPr/>
@@ -807,51 +886,18 @@
           <a:bodyPr/>
           <a:lstStyle/>
           <a:p>
-            <a:pPr lvl="0"/>
-            <a:r>
-              <a:rPr lang="cs-CZ"/>
-              <a:t>Upravte styly předlohy textu.</a:t>
-            </a:r>
-          </a:p>
-          <a:p>
-            <a:pPr lvl="1"/>
-            <a:r>
-              <a:rPr lang="cs-CZ"/>
-              <a:t>Druhá úroveň</a:t>
-            </a:r>
-          </a:p>
-          <a:p>
-            <a:pPr lvl="2"/>
-            <a:r>
-              <a:rPr lang="cs-CZ"/>
-              <a:t>Třetí úroveň</a:t>
-            </a:r>
-          </a:p>
-          <a:p>
-            <a:pPr lvl="3"/>
-            <a:r>
-              <a:rPr lang="cs-CZ"/>
-              <a:t>Čtvrtá úroveň</a:t>
-            </a:r>
-          </a:p>
-          <a:p>
-            <a:pPr lvl="4"/>
-            <a:r>
-              <a:rPr lang="cs-CZ"/>
-              <a:t>Pátá úroveň</a:t>
-            </a:r>
             <a:endParaRPr lang="en-US" dirty="0"/>
           </a:p>
         </p:txBody>
       </p:sp>
       <p:sp>
         <p:nvSpPr>
-          <p:cNvPr id="4" name="Date Placeholder 3"/>
-          <p:cNvSpPr>
-            <a:spLocks noGrp="1"/>
-          </p:cNvSpPr>
-          <p:nvPr>
-            <p:ph type="dt" sz="half" idx="10"/>
+          <p:cNvPr id="6" name="Slide Number Placeholder 5"/>
+          <p:cNvSpPr>
+            <a:spLocks noGrp="1"/>
+          </p:cNvSpPr>
+          <p:nvPr>
+            <p:ph type="sldNum" sz="quarter" idx="12"/>
           </p:nvPr>
         </p:nvSpPr>
         <p:spPr/>
@@ -859,60 +905,19 @@
           <a:bodyPr/>
           <a:lstStyle/>
           <a:p>
-            <a:fld id="{C7D5A91B-385C-480B-99E7-187931F39E12}" type="datetimeFigureOut">
-              <a:rPr lang="cs-CZ" smtClean="0"/>
-              <a:t>05.11.2023</a:t>
-            </a:fld>
-            <a:endParaRPr lang="cs-CZ"/>
-          </a:p>
-        </p:txBody>
-      </p:sp>
-      <p:sp>
-        <p:nvSpPr>
-          <p:cNvPr id="5" name="Footer Placeholder 4"/>
-          <p:cNvSpPr>
-            <a:spLocks noGrp="1"/>
-          </p:cNvSpPr>
-          <p:nvPr>
-            <p:ph type="ftr" sz="quarter" idx="11"/>
-          </p:nvPr>
-        </p:nvSpPr>
-        <p:spPr/>
-        <p:txBody>
-          <a:bodyPr/>
-          <a:lstStyle/>
-          <a:p>
-            <a:endParaRPr lang="cs-CZ"/>
-          </a:p>
-        </p:txBody>
-      </p:sp>
-      <p:sp>
-        <p:nvSpPr>
-          <p:cNvPr id="6" name="Slide Number Placeholder 5"/>
-          <p:cNvSpPr>
-            <a:spLocks noGrp="1"/>
-          </p:cNvSpPr>
-          <p:nvPr>
-            <p:ph type="sldNum" sz="quarter" idx="12"/>
-          </p:nvPr>
-        </p:nvSpPr>
-        <p:spPr/>
-        <p:txBody>
-          <a:bodyPr/>
-          <a:lstStyle/>
-          <a:p>
-            <a:fld id="{06B08FAE-D1AE-47B2-9F62-981A44BE47A4}" type="slidenum">
-              <a:rPr lang="cs-CZ" smtClean="0"/>
+            <a:fld id="{4FAB73BC-B049-4115-A692-8D63A059BFB8}" type="slidenum">
+              <a:rPr lang="en-US" dirty="0"/>
+              <a:pPr/>
               <a:t>‹#›</a:t>
             </a:fld>
-            <a:endParaRPr lang="cs-CZ"/>
+            <a:endParaRPr lang="en-US" dirty="0"/>
           </a:p>
         </p:txBody>
       </p:sp>
     </p:spTree>
     <p:extLst>
       <p:ext uri="{BB962C8B-B14F-4D97-AF65-F5344CB8AC3E}">
-        <p14:creationId xmlns:p14="http://schemas.microsoft.com/office/powerpoint/2010/main" val="498827890"/>
+        <p14:creationId xmlns:p14="http://schemas.microsoft.com/office/powerpoint/2010/main" val="516161178"/>
       </p:ext>
     </p:extLst>
   </p:cSld>
@@ -924,7 +929,7 @@
 
 <file path=ppt/slideLayouts/slideLayout3.xml><?xml version="1.0" encoding="utf-8"?>
 <p:sldLayout xmlns:a="http://schemas.openxmlformats.org/drawingml/2006/main" xmlns:r="http://schemas.openxmlformats.org/officeDocument/2006/relationships" xmlns:p="http://schemas.openxmlformats.org/presentationml/2006/main" type="secHead" preserve="1">
-  <p:cSld name="Záhlaví části">
+  <p:cSld name="Section Header">
     <p:spTree>
       <p:nvGrpSpPr>
         <p:cNvPr id="1" name=""/>
@@ -973,10 +978,9 @@
           </a:lstStyle>
           <a:p>
             <a:r>
-              <a:rPr lang="cs-CZ"/>
-              <a:t>Kliknutím lze upravit styl.</a:t>
-            </a:r>
-            <a:endParaRPr lang="en-US" dirty="0"/>
+              <a:rPr lang="en-US" dirty="0"/>
+              <a:t>Click to edit Master title style</a:t>
+            </a:r>
           </a:p>
         </p:txBody>
       </p:sp>
@@ -1096,8 +1100,8 @@
           <a:p>
             <a:pPr lvl="0"/>
             <a:r>
-              <a:rPr lang="cs-CZ"/>
-              <a:t>Upravte styly předlohy textu.</a:t>
+              <a:rPr lang="en-US" dirty="0"/>
+              <a:t>Click to edit Master text styles</a:t>
             </a:r>
           </a:p>
         </p:txBody>
@@ -1117,11 +1121,12 @@
           <a:bodyPr/>
           <a:lstStyle/>
           <a:p>
-            <a:fld id="{C7D5A91B-385C-480B-99E7-187931F39E12}" type="datetimeFigureOut">
-              <a:rPr lang="cs-CZ" smtClean="0"/>
-              <a:t>05.11.2023</a:t>
+            <a:fld id="{5586B75A-687E-405C-8A0B-8D00578BA2C3}" type="datetimeFigureOut">
+              <a:rPr lang="en-US" dirty="0"/>
+              <a:pPr/>
+              <a:t>10/8/2025</a:t>
             </a:fld>
-            <a:endParaRPr lang="cs-CZ"/>
+            <a:endParaRPr lang="en-US" dirty="0"/>
           </a:p>
         </p:txBody>
       </p:sp>
@@ -1140,7 +1145,7 @@
           <a:bodyPr/>
           <a:lstStyle/>
           <a:p>
-            <a:endParaRPr lang="cs-CZ"/>
+            <a:endParaRPr lang="en-US" dirty="0"/>
           </a:p>
         </p:txBody>
       </p:sp>
@@ -1159,18 +1164,19 @@
           <a:bodyPr/>
           <a:lstStyle/>
           <a:p>
-            <a:fld id="{06B08FAE-D1AE-47B2-9F62-981A44BE47A4}" type="slidenum">
-              <a:rPr lang="cs-CZ" smtClean="0"/>
+            <a:fld id="{4FAB73BC-B049-4115-A692-8D63A059BFB8}" type="slidenum">
+              <a:rPr lang="en-US" dirty="0"/>
+              <a:pPr/>
               <a:t>‹#›</a:t>
             </a:fld>
-            <a:endParaRPr lang="cs-CZ"/>
+            <a:endParaRPr lang="en-US" dirty="0"/>
           </a:p>
         </p:txBody>
       </p:sp>
     </p:spTree>
     <p:extLst>
       <p:ext uri="{BB962C8B-B14F-4D97-AF65-F5344CB8AC3E}">
-        <p14:creationId xmlns:p14="http://schemas.microsoft.com/office/powerpoint/2010/main" val="3058416132"/>
+        <p14:creationId xmlns:p14="http://schemas.microsoft.com/office/powerpoint/2010/main" val="2888882726"/>
       </p:ext>
     </p:extLst>
   </p:cSld>
@@ -1182,7 +1188,7 @@
 
 <file path=ppt/slideLayouts/slideLayout4.xml><?xml version="1.0" encoding="utf-8"?>
 <p:sldLayout xmlns:a="http://schemas.openxmlformats.org/drawingml/2006/main" xmlns:r="http://schemas.openxmlformats.org/officeDocument/2006/relationships" xmlns:p="http://schemas.openxmlformats.org/presentationml/2006/main" type="twoObj" preserve="1">
-  <p:cSld name="Dva obsahy">
+  <p:cSld name="Two Content">
     <p:spTree>
       <p:nvGrpSpPr>
         <p:cNvPr id="1" name=""/>
@@ -1213,10 +1219,9 @@
           <a:lstStyle/>
           <a:p>
             <a:r>
-              <a:rPr lang="cs-CZ"/>
-              <a:t>Kliknutím lze upravit styl.</a:t>
-            </a:r>
-            <a:endParaRPr lang="en-US" dirty="0"/>
+              <a:rPr lang="en-US" dirty="0"/>
+              <a:t>Click to edit Master title style</a:t>
+            </a:r>
           </a:p>
         </p:txBody>
       </p:sp>
@@ -1270,38 +1275,37 @@
           <a:p>
             <a:pPr lvl="0"/>
             <a:r>
-              <a:rPr lang="cs-CZ"/>
-              <a:t>Upravte styly předlohy textu.</a:t>
+              <a:rPr lang="en-US" dirty="0"/>
+              <a:t>Click to edit Master text styles</a:t>
             </a:r>
           </a:p>
           <a:p>
             <a:pPr lvl="1"/>
             <a:r>
-              <a:rPr lang="cs-CZ"/>
-              <a:t>Druhá úroveň</a:t>
+              <a:rPr lang="en-US" dirty="0"/>
+              <a:t>Second level</a:t>
             </a:r>
           </a:p>
           <a:p>
             <a:pPr lvl="2"/>
             <a:r>
-              <a:rPr lang="cs-CZ"/>
-              <a:t>Třetí úroveň</a:t>
+              <a:rPr lang="en-US" dirty="0"/>
+              <a:t>Third level</a:t>
             </a:r>
           </a:p>
           <a:p>
             <a:pPr lvl="3"/>
             <a:r>
-              <a:rPr lang="cs-CZ"/>
-              <a:t>Čtvrtá úroveň</a:t>
+              <a:rPr lang="en-US" dirty="0"/>
+              <a:t>Fourth level</a:t>
             </a:r>
           </a:p>
           <a:p>
             <a:pPr lvl="4"/>
             <a:r>
-              <a:rPr lang="cs-CZ"/>
-              <a:t>Pátá úroveň</a:t>
-            </a:r>
-            <a:endParaRPr lang="en-US" dirty="0"/>
+              <a:rPr lang="en-US" dirty="0"/>
+              <a:t>Fifth level</a:t>
+            </a:r>
           </a:p>
         </p:txBody>
       </p:sp>
@@ -1355,49 +1359,72 @@
           <a:p>
             <a:pPr lvl="0"/>
             <a:r>
-              <a:rPr lang="cs-CZ"/>
-              <a:t>Upravte styly předlohy textu.</a:t>
+              <a:rPr lang="en-US" dirty="0"/>
+              <a:t>Click to edit Master text styles</a:t>
             </a:r>
           </a:p>
           <a:p>
             <a:pPr lvl="1"/>
             <a:r>
-              <a:rPr lang="cs-CZ"/>
-              <a:t>Druhá úroveň</a:t>
+              <a:rPr lang="en-US" dirty="0"/>
+              <a:t>Second level</a:t>
             </a:r>
           </a:p>
           <a:p>
             <a:pPr lvl="2"/>
             <a:r>
-              <a:rPr lang="cs-CZ"/>
-              <a:t>Třetí úroveň</a:t>
+              <a:rPr lang="en-US" dirty="0"/>
+              <a:t>Third level</a:t>
             </a:r>
           </a:p>
           <a:p>
             <a:pPr lvl="3"/>
             <a:r>
-              <a:rPr lang="cs-CZ"/>
-              <a:t>Čtvrtá úroveň</a:t>
+              <a:rPr lang="en-US" dirty="0"/>
+              <a:t>Fourth level</a:t>
             </a:r>
           </a:p>
           <a:p>
             <a:pPr lvl="4"/>
             <a:r>
-              <a:rPr lang="cs-CZ"/>
-              <a:t>Pátá úroveň</a:t>
-            </a:r>
+              <a:rPr lang="en-US" dirty="0"/>
+              <a:t>Fifth level</a:t>
+            </a:r>
+          </a:p>
+        </p:txBody>
+      </p:sp>
+      <p:sp>
+        <p:nvSpPr>
+          <p:cNvPr id="8" name="Date Placeholder 7"/>
+          <p:cNvSpPr>
+            <a:spLocks noGrp="1"/>
+          </p:cNvSpPr>
+          <p:nvPr>
+            <p:ph type="dt" sz="half" idx="10"/>
+          </p:nvPr>
+        </p:nvSpPr>
+        <p:spPr/>
+        <p:txBody>
+          <a:bodyPr/>
+          <a:lstStyle/>
+          <a:p>
+            <a:fld id="{5586B75A-687E-405C-8A0B-8D00578BA2C3}" type="datetimeFigureOut">
+              <a:rPr lang="en-US" dirty="0"/>
+              <a:pPr/>
+              <a:t>10/8/2025</a:t>
+            </a:fld>
             <a:endParaRPr lang="en-US" dirty="0"/>
           </a:p>
         </p:txBody>
       </p:sp>
       <p:sp>
         <p:nvSpPr>
-          <p:cNvPr id="8" name="Date Placeholder 7"/>
-          <p:cNvSpPr>
-            <a:spLocks noGrp="1"/>
-          </p:cNvSpPr>
-          <p:nvPr>
-            <p:ph type="dt" sz="half" idx="10"/>
+          <p:cNvPr id="9" name="Footer Placeholder 8"/>
+          <p:cNvSpPr>
+            <a:spLocks noGrp="1"/>
+          </p:cNvSpPr>
+          <p:nvPr>
+            <p:ph type="ftr" sz="quarter" idx="11"/>
           </p:nvPr>
         </p:nvSpPr>
         <p:spPr/>
@@ -1405,22 +1432,18 @@
           <a:bodyPr/>
           <a:lstStyle/>
           <a:p>
-            <a:fld id="{C7D5A91B-385C-480B-99E7-187931F39E12}" type="datetimeFigureOut">
-              <a:rPr lang="cs-CZ" smtClean="0"/>
-              <a:t>05.11.2023</a:t>
-            </a:fld>
-            <a:endParaRPr lang="cs-CZ"/>
-          </a:p>
-        </p:txBody>
-      </p:sp>
-      <p:sp>
-        <p:nvSpPr>
-          <p:cNvPr id="9" name="Footer Placeholder 8"/>
-          <p:cNvSpPr>
-            <a:spLocks noGrp="1"/>
-          </p:cNvSpPr>
-          <p:nvPr>
-            <p:ph type="ftr" sz="quarter" idx="11"/>
+            <a:endParaRPr lang="en-US" dirty="0"/>
+          </a:p>
+        </p:txBody>
+      </p:sp>
+      <p:sp>
+        <p:nvSpPr>
+          <p:cNvPr id="10" name="Slide Number Placeholder 9"/>
+          <p:cNvSpPr>
+            <a:spLocks noGrp="1"/>
+          </p:cNvSpPr>
+          <p:nvPr>
+            <p:ph type="sldNum" sz="quarter" idx="12"/>
           </p:nvPr>
         </p:nvSpPr>
         <p:spPr/>
@@ -1428,37 +1451,19 @@
           <a:bodyPr/>
           <a:lstStyle/>
           <a:p>
-            <a:endParaRPr lang="cs-CZ"/>
-          </a:p>
-        </p:txBody>
-      </p:sp>
-      <p:sp>
-        <p:nvSpPr>
-          <p:cNvPr id="10" name="Slide Number Placeholder 9"/>
-          <p:cNvSpPr>
-            <a:spLocks noGrp="1"/>
-          </p:cNvSpPr>
-          <p:nvPr>
-            <p:ph type="sldNum" sz="quarter" idx="12"/>
-          </p:nvPr>
-        </p:nvSpPr>
-        <p:spPr/>
-        <p:txBody>
-          <a:bodyPr/>
-          <a:lstStyle/>
-          <a:p>
-            <a:fld id="{06B08FAE-D1AE-47B2-9F62-981A44BE47A4}" type="slidenum">
-              <a:rPr lang="cs-CZ" smtClean="0"/>
+            <a:fld id="{4FAB73BC-B049-4115-A692-8D63A059BFB8}" type="slidenum">
+              <a:rPr lang="en-US" dirty="0"/>
+              <a:pPr/>
               <a:t>‹#›</a:t>
             </a:fld>
-            <a:endParaRPr lang="cs-CZ"/>
+            <a:endParaRPr lang="en-US" dirty="0"/>
           </a:p>
         </p:txBody>
       </p:sp>
     </p:spTree>
     <p:extLst>
       <p:ext uri="{BB962C8B-B14F-4D97-AF65-F5344CB8AC3E}">
-        <p14:creationId xmlns:p14="http://schemas.microsoft.com/office/powerpoint/2010/main" val="513700538"/>
+        <p14:creationId xmlns:p14="http://schemas.microsoft.com/office/powerpoint/2010/main" val="850922887"/>
       </p:ext>
     </p:extLst>
   </p:cSld>
@@ -1470,7 +1475,7 @@
 
 <file path=ppt/slideLayouts/slideLayout5.xml><?xml version="1.0" encoding="utf-8"?>
 <p:sldLayout xmlns:a="http://schemas.openxmlformats.org/drawingml/2006/main" xmlns:r="http://schemas.openxmlformats.org/officeDocument/2006/relationships" xmlns:p="http://schemas.openxmlformats.org/presentationml/2006/main" type="twoTxTwoObj" preserve="1">
-  <p:cSld name="Porovnání">
+  <p:cSld name="Comparison">
     <p:spTree>
       <p:nvGrpSpPr>
         <p:cNvPr id="1" name=""/>
@@ -1501,10 +1506,9 @@
           <a:lstStyle/>
           <a:p>
             <a:r>
-              <a:rPr lang="cs-CZ"/>
-              <a:t>Kliknutím lze upravit styl.</a:t>
-            </a:r>
-            <a:endParaRPr lang="en-US" dirty="0"/>
+              <a:rPr lang="en-US" dirty="0"/>
+              <a:t>Click to edit Master title style</a:t>
+            </a:r>
           </a:p>
         </p:txBody>
       </p:sp>
@@ -1579,8 +1583,8 @@
           <a:p>
             <a:pPr lvl="0"/>
             <a:r>
-              <a:rPr lang="cs-CZ"/>
-              <a:t>Upravte styly předlohy textu.</a:t>
+              <a:rPr lang="en-US" dirty="0"/>
+              <a:t>Click to edit Master text styles</a:t>
             </a:r>
           </a:p>
         </p:txBody>
@@ -1635,38 +1639,37 @@
           <a:p>
             <a:pPr lvl="0"/>
             <a:r>
-              <a:rPr lang="cs-CZ"/>
-              <a:t>Upravte styly předlohy textu.</a:t>
+              <a:rPr lang="en-US" dirty="0"/>
+              <a:t>Click to edit Master text styles</a:t>
             </a:r>
           </a:p>
           <a:p>
             <a:pPr lvl="1"/>
             <a:r>
-              <a:rPr lang="cs-CZ"/>
-              <a:t>Druhá úroveň</a:t>
+              <a:rPr lang="en-US" dirty="0"/>
+              <a:t>Second level</a:t>
             </a:r>
           </a:p>
           <a:p>
             <a:pPr lvl="2"/>
             <a:r>
-              <a:rPr lang="cs-CZ"/>
-              <a:t>Třetí úroveň</a:t>
+              <a:rPr lang="en-US" dirty="0"/>
+              <a:t>Third level</a:t>
             </a:r>
           </a:p>
           <a:p>
             <a:pPr lvl="3"/>
             <a:r>
-              <a:rPr lang="cs-CZ"/>
-              <a:t>Čtvrtá úroveň</a:t>
+              <a:rPr lang="en-US" dirty="0"/>
+              <a:t>Fourth level</a:t>
             </a:r>
           </a:p>
           <a:p>
             <a:pPr lvl="4"/>
             <a:r>
-              <a:rPr lang="cs-CZ"/>
-              <a:t>Pátá úroveň</a:t>
-            </a:r>
-            <a:endParaRPr lang="en-US" dirty="0"/>
+              <a:rPr lang="en-US" dirty="0"/>
+              <a:t>Fifth level</a:t>
+            </a:r>
           </a:p>
         </p:txBody>
       </p:sp>
@@ -1741,8 +1744,8 @@
           <a:p>
             <a:pPr lvl="0"/>
             <a:r>
-              <a:rPr lang="cs-CZ"/>
-              <a:t>Upravte styly předlohy textu.</a:t>
+              <a:rPr lang="en-US" dirty="0"/>
+              <a:t>Click to edit Master text styles</a:t>
             </a:r>
           </a:p>
         </p:txBody>
@@ -1797,49 +1800,72 @@
           <a:p>
             <a:pPr lvl="0"/>
             <a:r>
-              <a:rPr lang="cs-CZ"/>
-              <a:t>Upravte styly předlohy textu.</a:t>
+              <a:rPr lang="en-US" dirty="0"/>
+              <a:t>Click to edit Master text styles</a:t>
             </a:r>
           </a:p>
           <a:p>
             <a:pPr lvl="1"/>
             <a:r>
-              <a:rPr lang="cs-CZ"/>
-              <a:t>Druhá úroveň</a:t>
+              <a:rPr lang="en-US" dirty="0"/>
+              <a:t>Second level</a:t>
             </a:r>
           </a:p>
           <a:p>
             <a:pPr lvl="2"/>
             <a:r>
-              <a:rPr lang="cs-CZ"/>
-              <a:t>Třetí úroveň</a:t>
+              <a:rPr lang="en-US" dirty="0"/>
+              <a:t>Third level</a:t>
             </a:r>
           </a:p>
           <a:p>
             <a:pPr lvl="3"/>
             <a:r>
-              <a:rPr lang="cs-CZ"/>
-              <a:t>Čtvrtá úroveň</a:t>
+              <a:rPr lang="en-US" dirty="0"/>
+              <a:t>Fourth level</a:t>
             </a:r>
           </a:p>
           <a:p>
             <a:pPr lvl="4"/>
             <a:r>
-              <a:rPr lang="cs-CZ"/>
-              <a:t>Pátá úroveň</a:t>
-            </a:r>
+              <a:rPr lang="en-US" dirty="0"/>
+              <a:t>Fifth level</a:t>
+            </a:r>
+          </a:p>
+        </p:txBody>
+      </p:sp>
+      <p:sp>
+        <p:nvSpPr>
+          <p:cNvPr id="2" name="Date Placeholder 1"/>
+          <p:cNvSpPr>
+            <a:spLocks noGrp="1"/>
+          </p:cNvSpPr>
+          <p:nvPr>
+            <p:ph type="dt" sz="half" idx="10"/>
+          </p:nvPr>
+        </p:nvSpPr>
+        <p:spPr/>
+        <p:txBody>
+          <a:bodyPr/>
+          <a:lstStyle/>
+          <a:p>
+            <a:fld id="{5586B75A-687E-405C-8A0B-8D00578BA2C3}" type="datetimeFigureOut">
+              <a:rPr lang="en-US" dirty="0"/>
+              <a:pPr/>
+              <a:t>10/8/2025</a:t>
+            </a:fld>
             <a:endParaRPr lang="en-US" dirty="0"/>
           </a:p>
         </p:txBody>
       </p:sp>
       <p:sp>
         <p:nvSpPr>
-          <p:cNvPr id="2" name="Date Placeholder 1"/>
-          <p:cNvSpPr>
-            <a:spLocks noGrp="1"/>
-          </p:cNvSpPr>
-          <p:nvPr>
-            <p:ph type="dt" sz="half" idx="10"/>
+          <p:cNvPr id="11" name="Footer Placeholder 10"/>
+          <p:cNvSpPr>
+            <a:spLocks noGrp="1"/>
+          </p:cNvSpPr>
+          <p:nvPr>
+            <p:ph type="ftr" sz="quarter" idx="11"/>
           </p:nvPr>
         </p:nvSpPr>
         <p:spPr/>
@@ -1847,22 +1873,18 @@
           <a:bodyPr/>
           <a:lstStyle/>
           <a:p>
-            <a:fld id="{C7D5A91B-385C-480B-99E7-187931F39E12}" type="datetimeFigureOut">
-              <a:rPr lang="cs-CZ" smtClean="0"/>
-              <a:t>05.11.2023</a:t>
-            </a:fld>
-            <a:endParaRPr lang="cs-CZ"/>
-          </a:p>
-        </p:txBody>
-      </p:sp>
-      <p:sp>
-        <p:nvSpPr>
-          <p:cNvPr id="11" name="Footer Placeholder 10"/>
-          <p:cNvSpPr>
-            <a:spLocks noGrp="1"/>
-          </p:cNvSpPr>
-          <p:nvPr>
-            <p:ph type="ftr" sz="quarter" idx="11"/>
+            <a:endParaRPr lang="en-US" dirty="0"/>
+          </a:p>
+        </p:txBody>
+      </p:sp>
+      <p:sp>
+        <p:nvSpPr>
+          <p:cNvPr id="12" name="Slide Number Placeholder 11"/>
+          <p:cNvSpPr>
+            <a:spLocks noGrp="1"/>
+          </p:cNvSpPr>
+          <p:nvPr>
+            <p:ph type="sldNum" sz="quarter" idx="12"/>
           </p:nvPr>
         </p:nvSpPr>
         <p:spPr/>
@@ -1870,37 +1892,19 @@
           <a:bodyPr/>
           <a:lstStyle/>
           <a:p>
-            <a:endParaRPr lang="cs-CZ"/>
-          </a:p>
-        </p:txBody>
-      </p:sp>
-      <p:sp>
-        <p:nvSpPr>
-          <p:cNvPr id="12" name="Slide Number Placeholder 11"/>
-          <p:cNvSpPr>
-            <a:spLocks noGrp="1"/>
-          </p:cNvSpPr>
-          <p:nvPr>
-            <p:ph type="sldNum" sz="quarter" idx="12"/>
-          </p:nvPr>
-        </p:nvSpPr>
-        <p:spPr/>
-        <p:txBody>
-          <a:bodyPr/>
-          <a:lstStyle/>
-          <a:p>
-            <a:fld id="{06B08FAE-D1AE-47B2-9F62-981A44BE47A4}" type="slidenum">
-              <a:rPr lang="cs-CZ" smtClean="0"/>
+            <a:fld id="{4FAB73BC-B049-4115-A692-8D63A059BFB8}" type="slidenum">
+              <a:rPr lang="en-US" dirty="0"/>
+              <a:pPr/>
               <a:t>‹#›</a:t>
             </a:fld>
-            <a:endParaRPr lang="cs-CZ"/>
+            <a:endParaRPr lang="en-US" dirty="0"/>
           </a:p>
         </p:txBody>
       </p:sp>
     </p:spTree>
     <p:extLst>
       <p:ext uri="{BB962C8B-B14F-4D97-AF65-F5344CB8AC3E}">
-        <p14:creationId xmlns:p14="http://schemas.microsoft.com/office/powerpoint/2010/main" val="895717023"/>
+        <p14:creationId xmlns:p14="http://schemas.microsoft.com/office/powerpoint/2010/main" val="4178572531"/>
       </p:ext>
     </p:extLst>
   </p:cSld>
@@ -1912,7 +1916,7 @@
 
 <file path=ppt/slideLayouts/slideLayout6.xml><?xml version="1.0" encoding="utf-8"?>
 <p:sldLayout xmlns:a="http://schemas.openxmlformats.org/drawingml/2006/main" xmlns:r="http://schemas.openxmlformats.org/officeDocument/2006/relationships" xmlns:p="http://schemas.openxmlformats.org/presentationml/2006/main" type="titleOnly" preserve="1">
-  <p:cSld name="Jenom nadpis">
+  <p:cSld name="Title Only">
     <p:spTree>
       <p:nvGrpSpPr>
         <p:cNvPr id="1" name=""/>
@@ -1943,21 +1947,44 @@
           <a:lstStyle/>
           <a:p>
             <a:r>
-              <a:rPr lang="cs-CZ"/>
-              <a:t>Kliknutím lze upravit styl.</a:t>
-            </a:r>
+              <a:rPr lang="en-US" dirty="0"/>
+              <a:t>Click to edit Master title style</a:t>
+            </a:r>
+          </a:p>
+        </p:txBody>
+      </p:sp>
+      <p:sp>
+        <p:nvSpPr>
+          <p:cNvPr id="2" name="Date Placeholder 1"/>
+          <p:cNvSpPr>
+            <a:spLocks noGrp="1"/>
+          </p:cNvSpPr>
+          <p:nvPr>
+            <p:ph type="dt" sz="half" idx="10"/>
+          </p:nvPr>
+        </p:nvSpPr>
+        <p:spPr/>
+        <p:txBody>
+          <a:bodyPr/>
+          <a:lstStyle/>
+          <a:p>
+            <a:fld id="{5586B75A-687E-405C-8A0B-8D00578BA2C3}" type="datetimeFigureOut">
+              <a:rPr lang="en-US" dirty="0"/>
+              <a:pPr/>
+              <a:t>10/8/2025</a:t>
+            </a:fld>
             <a:endParaRPr lang="en-US" dirty="0"/>
           </a:p>
         </p:txBody>
       </p:sp>
       <p:sp>
         <p:nvSpPr>
-          <p:cNvPr id="2" name="Date Placeholder 1"/>
-          <p:cNvSpPr>
-            <a:spLocks noGrp="1"/>
-          </p:cNvSpPr>
-          <p:nvPr>
-            <p:ph type="dt" sz="half" idx="10"/>
+          <p:cNvPr id="7" name="Footer Placeholder 6"/>
+          <p:cNvSpPr>
+            <a:spLocks noGrp="1"/>
+          </p:cNvSpPr>
+          <p:nvPr>
+            <p:ph type="ftr" sz="quarter" idx="11"/>
           </p:nvPr>
         </p:nvSpPr>
         <p:spPr/>
@@ -1965,22 +1992,18 @@
           <a:bodyPr/>
           <a:lstStyle/>
           <a:p>
-            <a:fld id="{C7D5A91B-385C-480B-99E7-187931F39E12}" type="datetimeFigureOut">
-              <a:rPr lang="cs-CZ" smtClean="0"/>
-              <a:t>05.11.2023</a:t>
-            </a:fld>
-            <a:endParaRPr lang="cs-CZ"/>
-          </a:p>
-        </p:txBody>
-      </p:sp>
-      <p:sp>
-        <p:nvSpPr>
-          <p:cNvPr id="7" name="Footer Placeholder 6"/>
-          <p:cNvSpPr>
-            <a:spLocks noGrp="1"/>
-          </p:cNvSpPr>
-          <p:nvPr>
-            <p:ph type="ftr" sz="quarter" idx="11"/>
+            <a:endParaRPr lang="en-US" dirty="0"/>
+          </a:p>
+        </p:txBody>
+      </p:sp>
+      <p:sp>
+        <p:nvSpPr>
+          <p:cNvPr id="8" name="Slide Number Placeholder 7"/>
+          <p:cNvSpPr>
+            <a:spLocks noGrp="1"/>
+          </p:cNvSpPr>
+          <p:nvPr>
+            <p:ph type="sldNum" sz="quarter" idx="12"/>
           </p:nvPr>
         </p:nvSpPr>
         <p:spPr/>
@@ -1988,37 +2011,19 @@
           <a:bodyPr/>
           <a:lstStyle/>
           <a:p>
-            <a:endParaRPr lang="cs-CZ"/>
-          </a:p>
-        </p:txBody>
-      </p:sp>
-      <p:sp>
-        <p:nvSpPr>
-          <p:cNvPr id="8" name="Slide Number Placeholder 7"/>
-          <p:cNvSpPr>
-            <a:spLocks noGrp="1"/>
-          </p:cNvSpPr>
-          <p:nvPr>
-            <p:ph type="sldNum" sz="quarter" idx="12"/>
-          </p:nvPr>
-        </p:nvSpPr>
-        <p:spPr/>
-        <p:txBody>
-          <a:bodyPr/>
-          <a:lstStyle/>
-          <a:p>
-            <a:fld id="{06B08FAE-D1AE-47B2-9F62-981A44BE47A4}" type="slidenum">
-              <a:rPr lang="cs-CZ" smtClean="0"/>
+            <a:fld id="{4FAB73BC-B049-4115-A692-8D63A059BFB8}" type="slidenum">
+              <a:rPr lang="en-US" dirty="0"/>
+              <a:pPr/>
               <a:t>‹#›</a:t>
             </a:fld>
-            <a:endParaRPr lang="cs-CZ"/>
+            <a:endParaRPr lang="en-US" dirty="0"/>
           </a:p>
         </p:txBody>
       </p:sp>
     </p:spTree>
     <p:extLst>
       <p:ext uri="{BB962C8B-B14F-4D97-AF65-F5344CB8AC3E}">
-        <p14:creationId xmlns:p14="http://schemas.microsoft.com/office/powerpoint/2010/main" val="887710825"/>
+        <p14:creationId xmlns:p14="http://schemas.microsoft.com/office/powerpoint/2010/main" val="561873153"/>
       </p:ext>
     </p:extLst>
   </p:cSld>
@@ -2030,7 +2035,7 @@
 
 <file path=ppt/slideLayouts/slideLayout7.xml><?xml version="1.0" encoding="utf-8"?>
 <p:sldLayout xmlns:a="http://schemas.openxmlformats.org/drawingml/2006/main" xmlns:r="http://schemas.openxmlformats.org/officeDocument/2006/relationships" xmlns:p="http://schemas.openxmlformats.org/presentationml/2006/main" showMasterSp="0" type="blank" preserve="1">
-  <p:cSld name="Prázdný">
+  <p:cSld name="Blank">
     <p:spTree>
       <p:nvGrpSpPr>
         <p:cNvPr id="1" name=""/>
@@ -2060,11 +2065,12 @@
           <a:bodyPr/>
           <a:lstStyle/>
           <a:p>
-            <a:fld id="{C7D5A91B-385C-480B-99E7-187931F39E12}" type="datetimeFigureOut">
-              <a:rPr lang="cs-CZ" smtClean="0"/>
-              <a:t>05.11.2023</a:t>
+            <a:fld id="{5586B75A-687E-405C-8A0B-8D00578BA2C3}" type="datetimeFigureOut">
+              <a:rPr lang="en-US" dirty="0"/>
+              <a:pPr/>
+              <a:t>10/8/2025</a:t>
             </a:fld>
-            <a:endParaRPr lang="cs-CZ"/>
+            <a:endParaRPr lang="en-US" dirty="0"/>
           </a:p>
         </p:txBody>
       </p:sp>
@@ -2083,7 +2089,7 @@
           <a:bodyPr/>
           <a:lstStyle/>
           <a:p>
-            <a:endParaRPr lang="cs-CZ"/>
+            <a:endParaRPr lang="en-US" dirty="0"/>
           </a:p>
         </p:txBody>
       </p:sp>
@@ -2102,18 +2108,19 @@
           <a:bodyPr/>
           <a:lstStyle/>
           <a:p>
-            <a:fld id="{06B08FAE-D1AE-47B2-9F62-981A44BE47A4}" type="slidenum">
-              <a:rPr lang="cs-CZ" smtClean="0"/>
+            <a:fld id="{4FAB73BC-B049-4115-A692-8D63A059BFB8}" type="slidenum">
+              <a:rPr lang="en-US" dirty="0"/>
+              <a:pPr/>
               <a:t>‹#›</a:t>
             </a:fld>
-            <a:endParaRPr lang="cs-CZ"/>
+            <a:endParaRPr lang="en-US" dirty="0"/>
           </a:p>
         </p:txBody>
       </p:sp>
     </p:spTree>
     <p:extLst>
       <p:ext uri="{BB962C8B-B14F-4D97-AF65-F5344CB8AC3E}">
-        <p14:creationId xmlns:p14="http://schemas.microsoft.com/office/powerpoint/2010/main" val="4115464425"/>
+        <p14:creationId xmlns:p14="http://schemas.microsoft.com/office/powerpoint/2010/main" val="4186423702"/>
       </p:ext>
     </p:extLst>
   </p:cSld>
@@ -2125,7 +2132,7 @@
 
 <file path=ppt/slideLayouts/slideLayout8.xml><?xml version="1.0" encoding="utf-8"?>
 <p:sldLayout xmlns:a="http://schemas.openxmlformats.org/drawingml/2006/main" xmlns:r="http://schemas.openxmlformats.org/officeDocument/2006/relationships" xmlns:p="http://schemas.openxmlformats.org/presentationml/2006/main" type="objTx" preserve="1">
-  <p:cSld name="Obsah s titulkem">
+  <p:cSld name="Content with Caption">
     <p:spTree>
       <p:nvGrpSpPr>
         <p:cNvPr id="1" name=""/>
@@ -2167,10 +2174,9 @@
           </a:lstStyle>
           <a:p>
             <a:r>
-              <a:rPr lang="cs-CZ"/>
-              <a:t>Kliknutím lze upravit styl.</a:t>
-            </a:r>
-            <a:endParaRPr lang="en-US" dirty="0"/>
+              <a:rPr lang="en-US" dirty="0"/>
+              <a:t>Click to edit Master title style</a:t>
+            </a:r>
           </a:p>
         </p:txBody>
       </p:sp>
@@ -2224,38 +2230,37 @@
           <a:p>
             <a:pPr lvl="0"/>
             <a:r>
-              <a:rPr lang="cs-CZ"/>
-              <a:t>Upravte styly předlohy textu.</a:t>
+              <a:rPr lang="en-US" dirty="0"/>
+              <a:t>Click to edit Master text styles</a:t>
             </a:r>
           </a:p>
           <a:p>
             <a:pPr lvl="1"/>
             <a:r>
-              <a:rPr lang="cs-CZ"/>
-              <a:t>Druhá úroveň</a:t>
+              <a:rPr lang="en-US" dirty="0"/>
+              <a:t>Second level</a:t>
             </a:r>
           </a:p>
           <a:p>
             <a:pPr lvl="2"/>
             <a:r>
-              <a:rPr lang="cs-CZ"/>
-              <a:t>Třetí úroveň</a:t>
+              <a:rPr lang="en-US" dirty="0"/>
+              <a:t>Third level</a:t>
             </a:r>
           </a:p>
           <a:p>
             <a:pPr lvl="3"/>
             <a:r>
-              <a:rPr lang="cs-CZ"/>
-              <a:t>Čtvrtá úroveň</a:t>
+              <a:rPr lang="en-US" dirty="0"/>
+              <a:t>Fourth level</a:t>
             </a:r>
           </a:p>
           <a:p>
             <a:pPr lvl="4"/>
             <a:r>
-              <a:rPr lang="cs-CZ"/>
-              <a:t>Pátá úroveň</a:t>
-            </a:r>
-            <a:endParaRPr lang="en-US" dirty="0"/>
+              <a:rPr lang="en-US" dirty="0"/>
+              <a:t>Fifth level</a:t>
+            </a:r>
           </a:p>
         </p:txBody>
       </p:sp>
@@ -2327,8 +2332,8 @@
           <a:p>
             <a:pPr lvl="0"/>
             <a:r>
-              <a:rPr lang="cs-CZ"/>
-              <a:t>Upravte styly předlohy textu.</a:t>
+              <a:rPr lang="en-US" dirty="0"/>
+              <a:t>Click to edit Master text styles</a:t>
             </a:r>
           </a:p>
         </p:txBody>
@@ -2348,11 +2353,12 @@
           <a:bodyPr/>
           <a:lstStyle/>
           <a:p>
-            <a:fld id="{C7D5A91B-385C-480B-99E7-187931F39E12}" type="datetimeFigureOut">
-              <a:rPr lang="cs-CZ" smtClean="0"/>
-              <a:t>05.11.2023</a:t>
+            <a:fld id="{5586B75A-687E-405C-8A0B-8D00578BA2C3}" type="datetimeFigureOut">
+              <a:rPr lang="en-US" dirty="0"/>
+              <a:pPr/>
+              <a:t>10/8/2025</a:t>
             </a:fld>
-            <a:endParaRPr lang="cs-CZ"/>
+            <a:endParaRPr lang="en-US" dirty="0"/>
           </a:p>
         </p:txBody>
       </p:sp>
@@ -2371,7 +2377,7 @@
           <a:bodyPr/>
           <a:lstStyle/>
           <a:p>
-            <a:endParaRPr lang="cs-CZ"/>
+            <a:endParaRPr lang="en-US" dirty="0"/>
           </a:p>
         </p:txBody>
       </p:sp>
@@ -2390,18 +2396,19 @@
           <a:bodyPr/>
           <a:lstStyle/>
           <a:p>
-            <a:fld id="{06B08FAE-D1AE-47B2-9F62-981A44BE47A4}" type="slidenum">
-              <a:rPr lang="cs-CZ" smtClean="0"/>
+            <a:fld id="{4FAB73BC-B049-4115-A692-8D63A059BFB8}" type="slidenum">
+              <a:rPr lang="en-US" dirty="0"/>
+              <a:pPr/>
               <a:t>‹#›</a:t>
             </a:fld>
-            <a:endParaRPr lang="cs-CZ"/>
+            <a:endParaRPr lang="en-US" dirty="0"/>
           </a:p>
         </p:txBody>
       </p:sp>
     </p:spTree>
     <p:extLst>
       <p:ext uri="{BB962C8B-B14F-4D97-AF65-F5344CB8AC3E}">
-        <p14:creationId xmlns:p14="http://schemas.microsoft.com/office/powerpoint/2010/main" val="486624459"/>
+        <p14:creationId xmlns:p14="http://schemas.microsoft.com/office/powerpoint/2010/main" val="2758096183"/>
       </p:ext>
     </p:extLst>
   </p:cSld>
@@ -2413,7 +2420,7 @@
 
 <file path=ppt/slideLayouts/slideLayout9.xml><?xml version="1.0" encoding="utf-8"?>
 <p:sldLayout xmlns:a="http://schemas.openxmlformats.org/drawingml/2006/main" xmlns:r="http://schemas.openxmlformats.org/officeDocument/2006/relationships" xmlns:p="http://schemas.openxmlformats.org/presentationml/2006/main" type="picTx" preserve="1">
-  <p:cSld name="Obrázek s titulkem">
+  <p:cSld name="Picture with Caption">
     <p:spTree>
       <p:nvGrpSpPr>
         <p:cNvPr id="1" name=""/>
@@ -2455,10 +2462,9 @@
           </a:lstStyle>
           <a:p>
             <a:r>
-              <a:rPr lang="cs-CZ"/>
-              <a:t>Kliknutím lze upravit styl.</a:t>
-            </a:r>
-            <a:endParaRPr lang="en-US" dirty="0"/>
+              <a:rPr lang="en-US" dirty="0"/>
+              <a:t>Click to edit Master title style</a:t>
+            </a:r>
           </a:p>
         </p:txBody>
       </p:sp>
@@ -2524,10 +2530,6 @@
             </a:lvl9pPr>
           </a:lstStyle>
           <a:p>
-            <a:r>
-              <a:rPr lang="cs-CZ"/>
-              <a:t>Kliknutím na ikonu přidáte obrázek.</a:t>
-            </a:r>
             <a:endParaRPr lang="en-US" dirty="0"/>
           </a:p>
         </p:txBody>
@@ -2600,8 +2602,8 @@
           <a:p>
             <a:pPr lvl="0"/>
             <a:r>
-              <a:rPr lang="cs-CZ"/>
-              <a:t>Upravte styly předlohy textu.</a:t>
+              <a:rPr lang="en-US" dirty="0"/>
+              <a:t>Click to edit Master text styles</a:t>
             </a:r>
           </a:p>
         </p:txBody>
@@ -2621,11 +2623,12 @@
           <a:bodyPr/>
           <a:lstStyle/>
           <a:p>
-            <a:fld id="{C7D5A91B-385C-480B-99E7-187931F39E12}" type="datetimeFigureOut">
-              <a:rPr lang="cs-CZ" smtClean="0"/>
-              <a:t>05.11.2023</a:t>
+            <a:fld id="{5586B75A-687E-405C-8A0B-8D00578BA2C3}" type="datetimeFigureOut">
+              <a:rPr lang="en-US" dirty="0"/>
+              <a:pPr/>
+              <a:t>10/8/2025</a:t>
             </a:fld>
-            <a:endParaRPr lang="cs-CZ"/>
+            <a:endParaRPr lang="en-US" dirty="0"/>
           </a:p>
         </p:txBody>
       </p:sp>
@@ -2649,7 +2652,7 @@
           <a:bodyPr/>
           <a:lstStyle/>
           <a:p>
-            <a:endParaRPr lang="cs-CZ"/>
+            <a:endParaRPr lang="en-US" dirty="0"/>
           </a:p>
         </p:txBody>
       </p:sp>
@@ -2668,18 +2671,19 @@
           <a:bodyPr/>
           <a:lstStyle/>
           <a:p>
-            <a:fld id="{06B08FAE-D1AE-47B2-9F62-981A44BE47A4}" type="slidenum">
-              <a:rPr lang="cs-CZ" smtClean="0"/>
+            <a:fld id="{4FAB73BC-B049-4115-A692-8D63A059BFB8}" type="slidenum">
+              <a:rPr lang="en-US" dirty="0"/>
+              <a:pPr/>
               <a:t>‹#›</a:t>
             </a:fld>
-            <a:endParaRPr lang="cs-CZ"/>
+            <a:endParaRPr lang="en-US" dirty="0"/>
           </a:p>
         </p:txBody>
       </p:sp>
     </p:spTree>
     <p:extLst>
       <p:ext uri="{BB962C8B-B14F-4D97-AF65-F5344CB8AC3E}">
-        <p14:creationId xmlns:p14="http://schemas.microsoft.com/office/powerpoint/2010/main" val="3938971695"/>
+        <p14:creationId xmlns:p14="http://schemas.microsoft.com/office/powerpoint/2010/main" val="2218320973"/>
       </p:ext>
     </p:extLst>
   </p:cSld>
@@ -2775,10 +2779,9 @@
           <a:lstStyle/>
           <a:p>
             <a:r>
-              <a:rPr lang="cs-CZ"/>
-              <a:t>Kliknutím lze upravit styl.</a:t>
-            </a:r>
-            <a:endParaRPr lang="en-US" dirty="0"/>
+              <a:rPr lang="en-US" dirty="0"/>
+              <a:t>Click to edit Master title style</a:t>
+            </a:r>
           </a:p>
         </p:txBody>
       </p:sp>
@@ -2849,38 +2852,37 @@
           <a:p>
             <a:pPr lvl="0"/>
             <a:r>
-              <a:rPr lang="cs-CZ"/>
-              <a:t>Upravte styly předlohy textu.</a:t>
+              <a:rPr lang="en-US" dirty="0"/>
+              <a:t>Click to edit Master text styles</a:t>
             </a:r>
           </a:p>
           <a:p>
             <a:pPr lvl="1"/>
             <a:r>
-              <a:rPr lang="cs-CZ"/>
-              <a:t>Druhá úroveň</a:t>
+              <a:rPr lang="en-US" dirty="0"/>
+              <a:t>Second level</a:t>
             </a:r>
           </a:p>
           <a:p>
             <a:pPr lvl="2"/>
             <a:r>
-              <a:rPr lang="cs-CZ"/>
-              <a:t>Třetí úroveň</a:t>
+              <a:rPr lang="en-US" dirty="0"/>
+              <a:t>Third level</a:t>
             </a:r>
           </a:p>
           <a:p>
             <a:pPr lvl="3"/>
             <a:r>
-              <a:rPr lang="cs-CZ"/>
-              <a:t>Čtvrtá úroveň</a:t>
+              <a:rPr lang="en-US" dirty="0"/>
+              <a:t>Fourth level</a:t>
             </a:r>
           </a:p>
           <a:p>
             <a:pPr lvl="4"/>
             <a:r>
-              <a:rPr lang="cs-CZ"/>
-              <a:t>Pátá úroveň</a:t>
-            </a:r>
-            <a:endParaRPr lang="en-US" dirty="0"/>
+              <a:rPr lang="en-US" dirty="0"/>
+              <a:t>Fifth level</a:t>
+            </a:r>
           </a:p>
         </p:txBody>
       </p:sp>
@@ -2918,11 +2920,12 @@
             </a:lvl1pPr>
           </a:lstStyle>
           <a:p>
-            <a:fld id="{C7D5A91B-385C-480B-99E7-187931F39E12}" type="datetimeFigureOut">
-              <a:rPr lang="cs-CZ" smtClean="0"/>
-              <a:t>05.11.2023</a:t>
+            <a:fld id="{5586B75A-687E-405C-8A0B-8D00578BA2C3}" type="datetimeFigureOut">
+              <a:rPr lang="en-US" dirty="0"/>
+              <a:pPr/>
+              <a:t>10/8/2025</a:t>
             </a:fld>
-            <a:endParaRPr lang="cs-CZ"/>
+            <a:endParaRPr lang="en-US" dirty="0"/>
           </a:p>
         </p:txBody>
       </p:sp>
@@ -2960,7 +2963,7 @@
             </a:lvl1pPr>
           </a:lstStyle>
           <a:p>
-            <a:endParaRPr lang="cs-CZ"/>
+            <a:endParaRPr lang="en-US" dirty="0"/>
           </a:p>
         </p:txBody>
       </p:sp>
@@ -2995,35 +2998,37 @@
             </a:lvl1pPr>
           </a:lstStyle>
           <a:p>
-            <a:fld id="{06B08FAE-D1AE-47B2-9F62-981A44BE47A4}" type="slidenum">
-              <a:rPr lang="cs-CZ" smtClean="0"/>
+            <a:fld id="{4FAB73BC-B049-4115-A692-8D63A059BFB8}" type="slidenum">
+              <a:rPr lang="en-US" dirty="0"/>
+              <a:pPr/>
               <a:t>‹#›</a:t>
             </a:fld>
-            <a:endParaRPr lang="cs-CZ"/>
+            <a:endParaRPr lang="en-US" dirty="0"/>
           </a:p>
         </p:txBody>
       </p:sp>
     </p:spTree>
     <p:extLst>
       <p:ext uri="{BB962C8B-B14F-4D97-AF65-F5344CB8AC3E}">
-        <p14:creationId xmlns:p14="http://schemas.microsoft.com/office/powerpoint/2010/main" val="347469659"/>
+        <p14:creationId xmlns:p14="http://schemas.microsoft.com/office/powerpoint/2010/main" val="2500444289"/>
       </p:ext>
     </p:extLst>
   </p:cSld>
   <p:clrMap bg1="lt1" tx1="dk1" bg2="lt2" tx2="dk2" accent1="accent1" accent2="accent2" accent3="accent3" accent4="accent4" accent5="accent5" accent6="accent6" hlink="hlink" folHlink="folHlink"/>
   <p:sldLayoutIdLst>
-    <p:sldLayoutId id="2147483676" r:id="rId1"/>
-    <p:sldLayoutId id="2147483677" r:id="rId2"/>
-    <p:sldLayoutId id="2147483678" r:id="rId3"/>
-    <p:sldLayoutId id="2147483679" r:id="rId4"/>
-    <p:sldLayoutId id="2147483680" r:id="rId5"/>
-    <p:sldLayoutId id="2147483681" r:id="rId6"/>
-    <p:sldLayoutId id="2147483682" r:id="rId7"/>
-    <p:sldLayoutId id="2147483683" r:id="rId8"/>
-    <p:sldLayoutId id="2147483684" r:id="rId9"/>
-    <p:sldLayoutId id="2147483685" r:id="rId10"/>
-    <p:sldLayoutId id="2147483686" r:id="rId11"/>
+    <p:sldLayoutId id="2147483688" r:id="rId1"/>
+    <p:sldLayoutId id="2147483689" r:id="rId2"/>
+    <p:sldLayoutId id="2147483690" r:id="rId3"/>
+    <p:sldLayoutId id="2147483691" r:id="rId4"/>
+    <p:sldLayoutId id="2147483692" r:id="rId5"/>
+    <p:sldLayoutId id="2147483693" r:id="rId6"/>
+    <p:sldLayoutId id="2147483694" r:id="rId7"/>
+    <p:sldLayoutId id="2147483695" r:id="rId8"/>
+    <p:sldLayoutId id="2147483696" r:id="rId9"/>
+    <p:sldLayoutId id="2147483697" r:id="rId10"/>
+    <p:sldLayoutId id="2147483698" r:id="rId11"/>
   </p:sldLayoutIdLst>
+  <p:hf sldNum="0" hdr="0" ftr="0" dt="0"/>
   <p:txStyles>
     <p:titleStyle>
       <a:lvl1pPr algn="l" defTabSz="914400" rtl="0" eaLnBrk="1" latinLnBrk="0" hangingPunct="1">
@@ -3412,7 +3417,7 @@
       </p:grpSpPr>
       <p:sp useBgFill="1">
         <p:nvSpPr>
-          <p:cNvPr id="9" name="Rectangle 8">
+          <p:cNvPr id="12" name="Rectangle 11">
             <a:extLst>
               <a:ext uri="{FF2B5EF4-FFF2-40B4-BE49-F238E27FC236}">
                 <a16:creationId xmlns:a16="http://schemas.microsoft.com/office/drawing/2014/main" id="{25D5C296-F4B1-4AE5-8EEB-9FEB7ED17780}"/>
@@ -3472,10 +3477,10 @@
       </p:sp>
       <p:pic>
         <p:nvPicPr>
-          <p:cNvPr id="5" name="Picture 4" descr="101010 datové řádky do nekonečna">
+          <p:cNvPr id="8" name="Picture 7" descr="101010 datové řádky do nekonečna">
             <a:extLst>
               <a:ext uri="{FF2B5EF4-FFF2-40B4-BE49-F238E27FC236}">
-                <a16:creationId xmlns:a16="http://schemas.microsoft.com/office/drawing/2014/main" id="{8CBE573B-F5D4-982C-B9C4-829183D34258}"/>
+                <a16:creationId xmlns:a16="http://schemas.microsoft.com/office/drawing/2014/main" id="{1BB65B34-9E3F-9201-511D-01C09717B44E}"/>
               </a:ext>
             </a:extLst>
           </p:cNvPr>
@@ -3484,7 +3489,7 @@
           </p:cNvPicPr>
           <p:nvPr/>
         </p:nvPicPr>
-        <p:blipFill rotWithShape="1">
+        <p:blipFill>
           <a:blip r:embed="rId2">
             <a:duotone>
               <a:schemeClr val="accent1">
@@ -3494,8 +3499,10 @@
               <a:prstClr val="white"/>
             </a:duotone>
           </a:blip>
-          <a:srcRect t="13106" r="-1" b="-1"/>
-          <a:stretch/>
+          <a:srcRect t="20746" r="9094" b="197"/>
+          <a:stretch>
+            <a:fillRect/>
+          </a:stretch>
         </p:blipFill>
         <p:spPr>
           <a:xfrm>
@@ -3509,7 +3516,7 @@
       </p:pic>
       <p:sp>
         <p:nvSpPr>
-          <p:cNvPr id="11" name="Rectangle 10">
+          <p:cNvPr id="14" name="Rectangle 13">
             <a:extLst>
               <a:ext uri="{FF2B5EF4-FFF2-40B4-BE49-F238E27FC236}">
                 <a16:creationId xmlns:a16="http://schemas.microsoft.com/office/drawing/2014/main" id="{9C1ACE66-194D-48C4-A14A-6933B35283F6}"/>
@@ -3564,17 +3571,16 @@
             <a:schemeClr val="lt1"/>
           </a:fontRef>
         </p:style>
-        <p:txBody>
-          <a:bodyPr/>
-          <a:lstStyle/>
-          <a:p>
-            <a:endParaRPr lang="cs-CZ"/>
-          </a:p>
-        </p:txBody>
-      </p:sp>
-      <p:sp>
-        <p:nvSpPr>
-          <p:cNvPr id="2" name="Nadpis 1"/>
+      </p:sp>
+      <p:sp>
+        <p:nvSpPr>
+          <p:cNvPr id="2" name="Nadpis 1">
+            <a:extLst>
+              <a:ext uri="{FF2B5EF4-FFF2-40B4-BE49-F238E27FC236}">
+                <a16:creationId xmlns:a16="http://schemas.microsoft.com/office/drawing/2014/main" id="{7A567F48-5112-B3BA-4275-92116BD5282B}"/>
+              </a:ext>
+            </a:extLst>
+          </p:cNvPr>
           <p:cNvSpPr>
             <a:spLocks noGrp="1"/>
           </p:cNvSpPr>
@@ -3585,7 +3591,7 @@
         <p:spPr>
           <a:xfrm>
             <a:off x="643467" y="1298448"/>
-            <a:ext cx="3685070" cy="3255264"/>
+            <a:ext cx="3765280" cy="3255264"/>
           </a:xfrm>
         </p:spPr>
         <p:txBody>
@@ -3595,15 +3601,29 @@
           <a:lstStyle/>
           <a:p>
             <a:r>
-              <a:rPr lang="cs-CZ" sz="4600"/>
-              <a:t>Programování</a:t>
-            </a:r>
-          </a:p>
-        </p:txBody>
-      </p:sp>
-      <p:sp>
-        <p:nvSpPr>
-          <p:cNvPr id="3" name="Podnadpis 2"/>
+              <a:rPr lang="cs-CZ" sz="4600" dirty="0"/>
+              <a:t>Lambda funkce</a:t>
+            </a:r>
+            <a:br>
+              <a:rPr lang="cs-CZ" sz="4600" dirty="0"/>
+            </a:br>
+            <a:r>
+              <a:rPr lang="cs-CZ" sz="4600" dirty="0"/>
+              <a:t>LINQ</a:t>
+            </a:r>
+            <a:endParaRPr lang="cs-CZ" dirty="0"/>
+          </a:p>
+        </p:txBody>
+      </p:sp>
+      <p:sp>
+        <p:nvSpPr>
+          <p:cNvPr id="3" name="Podnadpis 2">
+            <a:extLst>
+              <a:ext uri="{FF2B5EF4-FFF2-40B4-BE49-F238E27FC236}">
+                <a16:creationId xmlns:a16="http://schemas.microsoft.com/office/drawing/2014/main" id="{DEBDC762-5A73-D41C-44AE-DF00CD9EA6AB}"/>
+              </a:ext>
+            </a:extLst>
+          </p:cNvPr>
           <p:cNvSpPr>
             <a:spLocks noGrp="1"/>
           </p:cNvSpPr>
@@ -3625,14 +3645,14 @@
           <a:p>
             <a:r>
               <a:rPr lang="cs-CZ" dirty="0"/>
-              <a:t>Lambda funkce</a:t>
-            </a:r>
-          </a:p>
-        </p:txBody>
-      </p:sp>
-      <p:sp>
-        <p:nvSpPr>
-          <p:cNvPr id="13" name="Rectangle 12">
+              <a:t>Programování</a:t>
+            </a:r>
+          </a:p>
+        </p:txBody>
+      </p:sp>
+      <p:sp>
+        <p:nvSpPr>
+          <p:cNvPr id="16" name="Rectangle 15">
             <a:extLst>
               <a:ext uri="{FF2B5EF4-FFF2-40B4-BE49-F238E27FC236}">
                 <a16:creationId xmlns:a16="http://schemas.microsoft.com/office/drawing/2014/main" id="{025B886A-7ED1-4B77-819B-76ACBEFB07D0}"/>
@@ -3686,163 +3706,173 @@
             <a:schemeClr val="lt1"/>
           </a:fontRef>
         </p:style>
-        <p:txBody>
-          <a:bodyPr/>
-          <a:lstStyle/>
-          <a:p>
-            <a:endParaRPr lang="cs-CZ"/>
+      </p:sp>
+      <p:sp>
+        <p:nvSpPr>
+          <p:cNvPr id="4" name="Zástupný symbol pro datum 3">
+            <a:extLst>
+              <a:ext uri="{FF2B5EF4-FFF2-40B4-BE49-F238E27FC236}">
+                <a16:creationId xmlns:a16="http://schemas.microsoft.com/office/drawing/2014/main" id="{E0A03681-4C7E-7902-9201-D73B695631AB}"/>
+              </a:ext>
+            </a:extLst>
+          </p:cNvPr>
+          <p:cNvSpPr>
+            <a:spLocks noGrp="1"/>
+          </p:cNvSpPr>
+          <p:nvPr>
+            <p:ph type="dt" sz="half" idx="10"/>
+          </p:nvPr>
+        </p:nvSpPr>
+        <p:spPr>
+          <a:xfrm>
+            <a:off x="262465" y="6356350"/>
+            <a:ext cx="2743200" cy="365125"/>
+          </a:xfrm>
+        </p:spPr>
+        <p:txBody>
+          <a:bodyPr>
+            <a:normAutofit/>
+          </a:bodyPr>
+          <a:lstStyle/>
+          <a:p>
+            <a:pPr>
+              <a:spcAft>
+                <a:spcPts val="600"/>
+              </a:spcAft>
+            </a:pPr>
+            <a:fld id="{5FCB3348-DD7F-43CE-81EF-37688976BC99}" type="datetime1">
+              <a:rPr lang="en-US">
+                <a:solidFill>
+                  <a:srgbClr val="FFFFFF"/>
+                </a:solidFill>
+              </a:rPr>
+              <a:pPr>
+                <a:spcAft>
+                  <a:spcPts val="600"/>
+                </a:spcAft>
+              </a:pPr>
+              <a:t>10/8/2025</a:t>
+            </a:fld>
+            <a:endParaRPr lang="en-US">
+              <a:solidFill>
+                <a:srgbClr val="FFFFFF"/>
+              </a:solidFill>
+            </a:endParaRPr>
+          </a:p>
+        </p:txBody>
+      </p:sp>
+      <p:sp>
+        <p:nvSpPr>
+          <p:cNvPr id="5" name="Zástupný symbol pro zápatí 4">
+            <a:extLst>
+              <a:ext uri="{FF2B5EF4-FFF2-40B4-BE49-F238E27FC236}">
+                <a16:creationId xmlns:a16="http://schemas.microsoft.com/office/drawing/2014/main" id="{F06906D5-1B44-132B-28FE-ECC8857FFEFC}"/>
+              </a:ext>
+            </a:extLst>
+          </p:cNvPr>
+          <p:cNvSpPr>
+            <a:spLocks noGrp="1"/>
+          </p:cNvSpPr>
+          <p:nvPr>
+            <p:ph type="ftr" sz="quarter" idx="11"/>
+          </p:nvPr>
+        </p:nvSpPr>
+        <p:spPr>
+          <a:xfrm>
+            <a:off x="3869268" y="6356350"/>
+            <a:ext cx="5911517" cy="365125"/>
+          </a:xfrm>
+        </p:spPr>
+        <p:txBody>
+          <a:bodyPr>
+            <a:normAutofit/>
+          </a:bodyPr>
+          <a:lstStyle/>
+          <a:p>
+            <a:pPr>
+              <a:lnSpc>
+                <a:spcPct val="90000"/>
+              </a:lnSpc>
+              <a:spcAft>
+                <a:spcPts val="600"/>
+              </a:spcAft>
+            </a:pPr>
+            <a:r>
+              <a:rPr lang="en-US" sz="700">
+                <a:solidFill>
+                  <a:srgbClr val="FFFFFF"/>
+                </a:solidFill>
+              </a:rPr>
+              <a:t>
+              </a:t>
+            </a:r>
+          </a:p>
+        </p:txBody>
+      </p:sp>
+      <p:sp>
+        <p:nvSpPr>
+          <p:cNvPr id="6" name="Zástupný symbol pro číslo snímku 5">
+            <a:extLst>
+              <a:ext uri="{FF2B5EF4-FFF2-40B4-BE49-F238E27FC236}">
+                <a16:creationId xmlns:a16="http://schemas.microsoft.com/office/drawing/2014/main" id="{797A42C4-2CA9-C626-0C23-EAE1DB5D698F}"/>
+              </a:ext>
+            </a:extLst>
+          </p:cNvPr>
+          <p:cNvSpPr>
+            <a:spLocks noGrp="1"/>
+          </p:cNvSpPr>
+          <p:nvPr>
+            <p:ph type="sldNum" sz="quarter" idx="12"/>
+          </p:nvPr>
+        </p:nvSpPr>
+        <p:spPr>
+          <a:xfrm>
+            <a:off x="10634135" y="6356350"/>
+            <a:ext cx="1530927" cy="365125"/>
+          </a:xfrm>
+        </p:spPr>
+        <p:txBody>
+          <a:bodyPr>
+            <a:normAutofit/>
+          </a:bodyPr>
+          <a:lstStyle/>
+          <a:p>
+            <a:pPr>
+              <a:spcAft>
+                <a:spcPts val="600"/>
+              </a:spcAft>
+            </a:pPr>
+            <a:fld id="{70C12960-6E85-460F-B6E3-5B82CB31AF3D}" type="slidenum">
+              <a:rPr lang="en-US">
+                <a:solidFill>
+                  <a:srgbClr val="FFFFFF"/>
+                </a:solidFill>
+              </a:rPr>
+              <a:pPr>
+                <a:spcAft>
+                  <a:spcPts val="600"/>
+                </a:spcAft>
+              </a:pPr>
+              <a:t>1</a:t>
+            </a:fld>
+            <a:endParaRPr lang="en-US">
+              <a:solidFill>
+                <a:srgbClr val="FFFFFF"/>
+              </a:solidFill>
+            </a:endParaRPr>
           </a:p>
         </p:txBody>
       </p:sp>
     </p:spTree>
     <p:extLst>
       <p:ext uri="{BB962C8B-B14F-4D97-AF65-F5344CB8AC3E}">
-        <p14:creationId xmlns:p14="http://schemas.microsoft.com/office/powerpoint/2010/main" val="1045668709"/>
+        <p14:creationId xmlns:p14="http://schemas.microsoft.com/office/powerpoint/2010/main" val="1785421788"/>
       </p:ext>
     </p:extLst>
   </p:cSld>
   <p:clrMapOvr>
     <a:masterClrMapping/>
   </p:clrMapOvr>
-  <p:timing>
-    <p:tnLst>
-      <p:par>
-        <p:cTn id="1" dur="indefinite" restart="never" nodeType="tmRoot">
-          <p:childTnLst>
-            <p:seq concurrent="1" nextAc="seek">
-              <p:cTn id="2" dur="indefinite" nodeType="mainSeq">
-                <p:childTnLst>
-                  <p:par>
-                    <p:cTn id="3" fill="hold">
-                      <p:stCondLst>
-                        <p:cond delay="indefinite"/>
-                        <p:cond evt="onBegin" delay="0">
-                          <p:tn val="2"/>
-                        </p:cond>
-                      </p:stCondLst>
-                      <p:childTnLst>
-                        <p:par>
-                          <p:cTn id="4" fill="hold">
-                            <p:stCondLst>
-                              <p:cond delay="0"/>
-                            </p:stCondLst>
-                            <p:childTnLst>
-                              <p:par>
-                                <p:cTn id="5" presetID="10" presetClass="entr" presetSubtype="0" fill="hold" grpId="0" nodeType="withEffect">
-                                  <p:stCondLst>
-                                    <p:cond delay="1000"/>
-                                  </p:stCondLst>
-                                  <p:iterate type="lt">
-                                    <p:tmPct val="10000"/>
-                                  </p:iterate>
-                                  <p:childTnLst>
-                                    <p:set>
-                                      <p:cBhvr>
-                                        <p:cTn id="6" dur="1" fill="hold">
-                                          <p:stCondLst>
-                                            <p:cond delay="0"/>
-                                          </p:stCondLst>
-                                        </p:cTn>
-                                        <p:tgtEl>
-                                          <p:spTgt spid="2"/>
-                                        </p:tgtEl>
-                                        <p:attrNameLst>
-                                          <p:attrName>style.visibility</p:attrName>
-                                        </p:attrNameLst>
-                                      </p:cBhvr>
-                                      <p:to>
-                                        <p:strVal val="visible"/>
-                                      </p:to>
-                                    </p:set>
-                                    <p:animEffect transition="in" filter="fade">
-                                      <p:cBhvr>
-                                        <p:cTn id="7" dur="400"/>
-                                        <p:tgtEl>
-                                          <p:spTgt spid="2"/>
-                                        </p:tgtEl>
-                                      </p:cBhvr>
-                                    </p:animEffect>
-                                  </p:childTnLst>
-                                </p:cTn>
-                              </p:par>
-                              <p:par>
-                                <p:cTn id="8" presetID="10" presetClass="entr" presetSubtype="0" fill="hold" grpId="0" nodeType="withEffect">
-                                  <p:stCondLst>
-                                    <p:cond delay="2000"/>
-                                  </p:stCondLst>
-                                  <p:iterate type="lt">
-                                    <p:tmPct val="10000"/>
-                                  </p:iterate>
-                                  <p:childTnLst>
-                                    <p:set>
-                                      <p:cBhvr>
-                                        <p:cTn id="9" dur="1" fill="hold">
-                                          <p:stCondLst>
-                                            <p:cond delay="0"/>
-                                          </p:stCondLst>
-                                        </p:cTn>
-                                        <p:tgtEl>
-                                          <p:spTgt spid="3">
-                                            <p:txEl>
-                                              <p:pRg st="0" end="0"/>
-                                            </p:txEl>
-                                          </p:spTgt>
-                                        </p:tgtEl>
-                                        <p:attrNameLst>
-                                          <p:attrName>style.visibility</p:attrName>
-                                        </p:attrNameLst>
-                                      </p:cBhvr>
-                                      <p:to>
-                                        <p:strVal val="visible"/>
-                                      </p:to>
-                                    </p:set>
-                                    <p:animEffect transition="in" filter="fade">
-                                      <p:cBhvr>
-                                        <p:cTn id="10" dur="400"/>
-                                        <p:tgtEl>
-                                          <p:spTgt spid="3">
-                                            <p:txEl>
-                                              <p:pRg st="0" end="0"/>
-                                            </p:txEl>
-                                          </p:spTgt>
-                                        </p:tgtEl>
-                                      </p:cBhvr>
-                                    </p:animEffect>
-                                  </p:childTnLst>
-                                </p:cTn>
-                              </p:par>
-                            </p:childTnLst>
-                          </p:cTn>
-                        </p:par>
-                      </p:childTnLst>
-                    </p:cTn>
-                  </p:par>
-                </p:childTnLst>
-              </p:cTn>
-              <p:prevCondLst>
-                <p:cond evt="onPrev" delay="0">
-                  <p:tgtEl>
-                    <p:sldTgt/>
-                  </p:tgtEl>
-                </p:cond>
-              </p:prevCondLst>
-              <p:nextCondLst>
-                <p:cond evt="onNext" delay="0">
-                  <p:tgtEl>
-                    <p:sldTgt/>
-                  </p:tgtEl>
-                </p:cond>
-              </p:nextCondLst>
-            </p:seq>
-          </p:childTnLst>
-        </p:cTn>
-      </p:par>
-    </p:tnLst>
-    <p:bldLst>
-      <p:bldP spid="2" grpId="0"/>
-      <p:bldP spid="3" grpId="0" build="p"/>
-    </p:bldLst>
-  </p:timing>
 </p:sld>
 </file>
 
@@ -3873,7 +3903,7 @@
       </p:grpSpPr>
       <p:sp useBgFill="1">
         <p:nvSpPr>
-          <p:cNvPr id="8" name="Rectangle 7">
+          <p:cNvPr id="11" name="Rectangle 10">
             <a:extLst>
               <a:ext uri="{FF2B5EF4-FFF2-40B4-BE49-F238E27FC236}">
                 <a16:creationId xmlns:a16="http://schemas.microsoft.com/office/drawing/2014/main" id="{80516254-1D9F-4F3A-9870-3A3280BE2BFE}"/>
@@ -3922,20 +3952,13 @@
             <a:schemeClr val="lt1"/>
           </a:fontRef>
         </p:style>
-        <p:txBody>
-          <a:bodyPr/>
-          <a:lstStyle/>
-          <a:p>
-            <a:endParaRPr lang="cs-CZ"/>
-          </a:p>
-        </p:txBody>
       </p:sp>
       <p:sp>
         <p:nvSpPr>
           <p:cNvPr id="2" name="Nadpis 1">
             <a:extLst>
               <a:ext uri="{FF2B5EF4-FFF2-40B4-BE49-F238E27FC236}">
-                <a16:creationId xmlns:a16="http://schemas.microsoft.com/office/drawing/2014/main" id="{2774F22A-A4B1-3D37-F485-EBD36466FC26}"/>
+                <a16:creationId xmlns:a16="http://schemas.microsoft.com/office/drawing/2014/main" id="{A59C4D4B-E0F4-4F1C-BA68-1E99FCEADD24}"/>
               </a:ext>
             </a:extLst>
           </p:cNvPr>
@@ -3960,7 +3983,7 @@
           <a:p>
             <a:pPr algn="r"/>
             <a:r>
-              <a:rPr lang="cs-CZ" dirty="0">
+              <a:rPr lang="cs-CZ">
                 <a:solidFill>
                   <a:schemeClr val="tx1">
                     <a:lumMod val="85000"/>
@@ -3968,14 +3991,14 @@
                   </a:schemeClr>
                 </a:solidFill>
               </a:rPr>
-              <a:t>K čemu je používáme?</a:t>
-            </a:r>
-          </a:p>
-        </p:txBody>
-      </p:sp>
-      <p:sp>
-        <p:nvSpPr>
-          <p:cNvPr id="10" name="Rectangle 9">
+              <a:t>Původ lambda funkcí</a:t>
+            </a:r>
+          </a:p>
+        </p:txBody>
+      </p:sp>
+      <p:sp>
+        <p:nvSpPr>
+          <p:cNvPr id="13" name="Rectangle 12">
             <a:extLst>
               <a:ext uri="{FF2B5EF4-FFF2-40B4-BE49-F238E27FC236}">
                 <a16:creationId xmlns:a16="http://schemas.microsoft.com/office/drawing/2014/main" id="{FC14672B-27A5-4CDA-ABAF-5E4CF4B41C23}"/>
@@ -4027,17 +4050,10 @@
             <a:schemeClr val="lt1"/>
           </a:fontRef>
         </p:style>
-        <p:txBody>
-          <a:bodyPr/>
-          <a:lstStyle/>
-          <a:p>
-            <a:endParaRPr lang="cs-CZ"/>
-          </a:p>
-        </p:txBody>
       </p:sp>
       <p:cxnSp>
         <p:nvCxnSpPr>
-          <p:cNvPr id="12" name="Straight Connector 11">
+          <p:cNvPr id="15" name="Straight Connector 14">
             <a:extLst>
               <a:ext uri="{FF2B5EF4-FFF2-40B4-BE49-F238E27FC236}">
                 <a16:creationId xmlns:a16="http://schemas.microsoft.com/office/drawing/2014/main" id="{8D89589C-2C90-4407-A995-05EC3DD7AB14}"/>
@@ -4095,7 +4111,7 @@
           <p:cNvPr id="3" name="Zástupný obsah 2">
             <a:extLst>
               <a:ext uri="{FF2B5EF4-FFF2-40B4-BE49-F238E27FC236}">
-                <a16:creationId xmlns:a16="http://schemas.microsoft.com/office/drawing/2014/main" id="{EB4CF9B9-3A85-A5FF-8459-3111E240860E}"/>
+                <a16:creationId xmlns:a16="http://schemas.microsoft.com/office/drawing/2014/main" id="{BFE4D03E-FE03-08D5-69F7-3BB71E474557}"/>
               </a:ext>
             </a:extLst>
           </p:cNvPr>
@@ -4113,39 +4129,59 @@
           </a:xfrm>
         </p:spPr>
         <p:txBody>
-          <a:bodyPr>
+          <a:bodyPr vert="horz" lIns="91440" tIns="45720" rIns="91440" bIns="45720" rtlCol="0">
             <a:normAutofit/>
           </a:bodyPr>
           <a:lstStyle/>
           <a:p>
             <a:r>
+              <a:rPr lang="cs-CZ" dirty="0">
+                <a:ea typeface="+mn-lt"/>
+                <a:cs typeface="+mn-lt"/>
+              </a:rPr>
+              <a:t>Lambda kalkul = matematický model pro popis funkcí a výpočtů</a:t>
+            </a:r>
+          </a:p>
+          <a:p>
+            <a:r>
+              <a:rPr lang="cs-CZ" dirty="0">
+                <a:ea typeface="+mn-lt"/>
+                <a:cs typeface="+mn-lt"/>
+              </a:rPr>
+              <a:t>Lambda kalkul se stal teoretickým základem </a:t>
+            </a:r>
+            <a:r>
+              <a:rPr lang="cs-CZ" b="1" dirty="0">
+                <a:ea typeface="+mn-lt"/>
+                <a:cs typeface="+mn-lt"/>
+              </a:rPr>
+              <a:t>funkcionálního programování</a:t>
+            </a:r>
+          </a:p>
+          <a:p>
+            <a:r>
+              <a:rPr lang="cs-CZ" b="1" dirty="0" err="1"/>
+              <a:t>Haskell</a:t>
+            </a:r>
+            <a:endParaRPr lang="cs-CZ" b="1"/>
+          </a:p>
+          <a:p>
+            <a:r>
               <a:rPr lang="cs-CZ" dirty="0"/>
-              <a:t>Malé anonymní funkce, které se chovají jako běžné funkce</a:t>
+              <a:t>Velmi časté využívání rekurzivních funkcí </a:t>
             </a:r>
           </a:p>
           <a:p>
             <a:r>
               <a:rPr lang="cs-CZ" dirty="0"/>
-              <a:t>Nejčastěji se využívají pro krátké funkce</a:t>
-            </a:r>
-          </a:p>
-          <a:p>
-            <a:r>
-              <a:rPr lang="cs-CZ" dirty="0"/>
-              <a:t>Vyjadřují v čistší podobě použití dané funkce</a:t>
-            </a:r>
-          </a:p>
-          <a:p>
-            <a:r>
-              <a:rPr lang="cs-CZ" dirty="0"/>
-              <a:t>Lambda funkcím můžeme přiřadit jméno</a:t>
-            </a:r>
-          </a:p>
-        </p:txBody>
-      </p:sp>
-      <p:sp>
-        <p:nvSpPr>
-          <p:cNvPr id="14" name="Rectangle 13">
+              <a:t>V C# součástí od roku 2007</a:t>
+            </a:r>
+          </a:p>
+        </p:txBody>
+      </p:sp>
+      <p:sp>
+        <p:nvSpPr>
+          <p:cNvPr id="17" name="Rectangle 16">
             <a:extLst>
               <a:ext uri="{FF2B5EF4-FFF2-40B4-BE49-F238E27FC236}">
                 <a16:creationId xmlns:a16="http://schemas.microsoft.com/office/drawing/2014/main" id="{9A206779-5C74-4555-94BC-5845C92EC3A8}"/>
@@ -4208,10 +4244,145 @@
           </a:p>
         </p:txBody>
       </p:sp>
+      <p:sp>
+        <p:nvSpPr>
+          <p:cNvPr id="4" name="Zástupný symbol pro datum 3">
+            <a:extLst>
+              <a:ext uri="{FF2B5EF4-FFF2-40B4-BE49-F238E27FC236}">
+                <a16:creationId xmlns:a16="http://schemas.microsoft.com/office/drawing/2014/main" id="{130F2192-B92C-D10A-AC90-4BBB80CEB4E4}"/>
+              </a:ext>
+            </a:extLst>
+          </p:cNvPr>
+          <p:cNvSpPr>
+            <a:spLocks noGrp="1"/>
+          </p:cNvSpPr>
+          <p:nvPr>
+            <p:ph type="dt" sz="half" idx="10"/>
+          </p:nvPr>
+        </p:nvSpPr>
+        <p:spPr>
+          <a:xfrm>
+            <a:off x="262465" y="6356350"/>
+            <a:ext cx="2743200" cy="365125"/>
+          </a:xfrm>
+        </p:spPr>
+        <p:txBody>
+          <a:bodyPr>
+            <a:normAutofit/>
+          </a:bodyPr>
+          <a:lstStyle/>
+          <a:p>
+            <a:pPr>
+              <a:spcAft>
+                <a:spcPts val="600"/>
+              </a:spcAft>
+            </a:pPr>
+            <a:fld id="{90D66A54-EA52-4112-88D8-5210ABC9533D}" type="datetime1">
+              <a:pPr>
+                <a:spcAft>
+                  <a:spcPts val="600"/>
+                </a:spcAft>
+              </a:pPr>
+              <a:t>08.10.2025</a:t>
+            </a:fld>
+            <a:endParaRPr lang="en-US"/>
+          </a:p>
+        </p:txBody>
+      </p:sp>
+      <p:sp>
+        <p:nvSpPr>
+          <p:cNvPr id="5" name="Zástupný symbol pro zápatí 4">
+            <a:extLst>
+              <a:ext uri="{FF2B5EF4-FFF2-40B4-BE49-F238E27FC236}">
+                <a16:creationId xmlns:a16="http://schemas.microsoft.com/office/drawing/2014/main" id="{C2798F1A-17EE-AB6C-9480-16BE146B2D2B}"/>
+              </a:ext>
+            </a:extLst>
+          </p:cNvPr>
+          <p:cNvSpPr>
+            <a:spLocks noGrp="1"/>
+          </p:cNvSpPr>
+          <p:nvPr>
+            <p:ph type="ftr" sz="quarter" idx="11"/>
+          </p:nvPr>
+        </p:nvSpPr>
+        <p:spPr>
+          <a:xfrm>
+            <a:off x="3869268" y="6356350"/>
+            <a:ext cx="5911517" cy="365125"/>
+          </a:xfrm>
+        </p:spPr>
+        <p:txBody>
+          <a:bodyPr>
+            <a:normAutofit/>
+          </a:bodyPr>
+          <a:lstStyle/>
+          <a:p>
+            <a:pPr>
+              <a:lnSpc>
+                <a:spcPct val="90000"/>
+              </a:lnSpc>
+              <a:spcAft>
+                <a:spcPts val="600"/>
+              </a:spcAft>
+            </a:pPr>
+            <a:r>
+              <a:rPr lang="en-US" sz="700"/>
+              <a:t>
+              </a:t>
+            </a:r>
+          </a:p>
+        </p:txBody>
+      </p:sp>
+      <p:sp>
+        <p:nvSpPr>
+          <p:cNvPr id="6" name="Zástupný symbol pro číslo snímku 5">
+            <a:extLst>
+              <a:ext uri="{FF2B5EF4-FFF2-40B4-BE49-F238E27FC236}">
+                <a16:creationId xmlns:a16="http://schemas.microsoft.com/office/drawing/2014/main" id="{05D0A825-9C87-A7A7-5018-E81CDE497B42}"/>
+              </a:ext>
+            </a:extLst>
+          </p:cNvPr>
+          <p:cNvSpPr>
+            <a:spLocks noGrp="1"/>
+          </p:cNvSpPr>
+          <p:nvPr>
+            <p:ph type="sldNum" sz="quarter" idx="12"/>
+          </p:nvPr>
+        </p:nvSpPr>
+        <p:spPr>
+          <a:xfrm>
+            <a:off x="10634135" y="6356350"/>
+            <a:ext cx="1530927" cy="365125"/>
+          </a:xfrm>
+        </p:spPr>
+        <p:txBody>
+          <a:bodyPr>
+            <a:normAutofit/>
+          </a:bodyPr>
+          <a:lstStyle/>
+          <a:p>
+            <a:pPr>
+              <a:spcAft>
+                <a:spcPts val="600"/>
+              </a:spcAft>
+            </a:pPr>
+            <a:fld id="{70C12960-6E85-460F-B6E3-5B82CB31AF3D}" type="slidenum">
+              <a:rPr lang="en-US" dirty="0"/>
+              <a:pPr>
+                <a:spcAft>
+                  <a:spcPts val="600"/>
+                </a:spcAft>
+              </a:pPr>
+              <a:t>2</a:t>
+            </a:fld>
+            <a:endParaRPr lang="en-US"/>
+          </a:p>
+        </p:txBody>
+      </p:sp>
     </p:spTree>
     <p:extLst>
       <p:ext uri="{BB962C8B-B14F-4D97-AF65-F5344CB8AC3E}">
-        <p14:creationId xmlns:p14="http://schemas.microsoft.com/office/powerpoint/2010/main" val="12922512"/>
+        <p14:creationId xmlns:p14="http://schemas.microsoft.com/office/powerpoint/2010/main" val="1241169903"/>
       </p:ext>
     </p:extLst>
   </p:cSld>
@@ -4248,7 +4419,7 @@
       </p:grpSpPr>
       <p:sp useBgFill="1">
         <p:nvSpPr>
-          <p:cNvPr id="8" name="Rectangle 7">
+          <p:cNvPr id="11" name="Rectangle 10">
             <a:extLst>
               <a:ext uri="{FF2B5EF4-FFF2-40B4-BE49-F238E27FC236}">
                 <a16:creationId xmlns:a16="http://schemas.microsoft.com/office/drawing/2014/main" id="{80516254-1D9F-4F3A-9870-3A3280BE2BFE}"/>
@@ -4297,20 +4468,13 @@
             <a:schemeClr val="lt1"/>
           </a:fontRef>
         </p:style>
-        <p:txBody>
-          <a:bodyPr/>
-          <a:lstStyle/>
-          <a:p>
-            <a:endParaRPr lang="cs-CZ"/>
-          </a:p>
-        </p:txBody>
       </p:sp>
       <p:sp>
         <p:nvSpPr>
           <p:cNvPr id="2" name="Nadpis 1">
             <a:extLst>
               <a:ext uri="{FF2B5EF4-FFF2-40B4-BE49-F238E27FC236}">
-                <a16:creationId xmlns:a16="http://schemas.microsoft.com/office/drawing/2014/main" id="{6C96F0EA-F402-FB2F-F282-C1E911690EAA}"/>
+                <a16:creationId xmlns:a16="http://schemas.microsoft.com/office/drawing/2014/main" id="{CC6140BF-37E5-608F-7C51-23E38F831F28}"/>
               </a:ext>
             </a:extLst>
           </p:cNvPr>
@@ -4335,22 +4499,34 @@
           <a:p>
             <a:pPr algn="r"/>
             <a:r>
-              <a:rPr lang="cs-CZ">
+              <a:rPr lang="cs-CZ" sz="2800" b="1" dirty="0">
                 <a:solidFill>
                   <a:schemeClr val="tx1">
                     <a:lumMod val="85000"/>
                     <a:lumOff val="15000"/>
                   </a:schemeClr>
                 </a:solidFill>
+                <a:latin typeface="Grandview Display"/>
               </a:rPr>
-              <a:t>Syntax</a:t>
-            </a:r>
-          </a:p>
-        </p:txBody>
-      </p:sp>
-      <p:sp>
-        <p:nvSpPr>
-          <p:cNvPr id="10" name="Rectangle 9">
+              <a:t>Přínos lambda funkcí v C#</a:t>
+            </a:r>
+          </a:p>
+          <a:p>
+            <a:pPr algn="r"/>
+            <a:endParaRPr lang="cs-CZ" sz="2800">
+              <a:solidFill>
+                <a:schemeClr val="tx1">
+                  <a:lumMod val="85000"/>
+                  <a:lumOff val="15000"/>
+                </a:schemeClr>
+              </a:solidFill>
+            </a:endParaRPr>
+          </a:p>
+        </p:txBody>
+      </p:sp>
+      <p:sp>
+        <p:nvSpPr>
+          <p:cNvPr id="13" name="Rectangle 12">
             <a:extLst>
               <a:ext uri="{FF2B5EF4-FFF2-40B4-BE49-F238E27FC236}">
                 <a16:creationId xmlns:a16="http://schemas.microsoft.com/office/drawing/2014/main" id="{FC14672B-27A5-4CDA-ABAF-5E4CF4B41C23}"/>
@@ -4402,17 +4578,10 @@
             <a:schemeClr val="lt1"/>
           </a:fontRef>
         </p:style>
-        <p:txBody>
-          <a:bodyPr/>
-          <a:lstStyle/>
-          <a:p>
-            <a:endParaRPr lang="cs-CZ"/>
-          </a:p>
-        </p:txBody>
       </p:sp>
       <p:cxnSp>
         <p:nvCxnSpPr>
-          <p:cNvPr id="12" name="Straight Connector 11">
+          <p:cNvPr id="15" name="Straight Connector 14">
             <a:extLst>
               <a:ext uri="{FF2B5EF4-FFF2-40B4-BE49-F238E27FC236}">
                 <a16:creationId xmlns:a16="http://schemas.microsoft.com/office/drawing/2014/main" id="{8D89589C-2C90-4407-A995-05EC3DD7AB14}"/>
@@ -4467,10 +4636,10 @@
       </p:cxnSp>
       <p:sp>
         <p:nvSpPr>
-          <p:cNvPr id="7" name="Zástupný obsah 2">
+          <p:cNvPr id="3" name="Zástupný obsah 2">
             <a:extLst>
               <a:ext uri="{FF2B5EF4-FFF2-40B4-BE49-F238E27FC236}">
-                <a16:creationId xmlns:a16="http://schemas.microsoft.com/office/drawing/2014/main" id="{3B5CC75C-0BBE-B42C-0FE2-8118015FA222}"/>
+                <a16:creationId xmlns:a16="http://schemas.microsoft.com/office/drawing/2014/main" id="{0AB85E51-6534-4308-D43B-76C4578B0D65}"/>
               </a:ext>
             </a:extLst>
           </p:cNvPr>
@@ -4488,58 +4657,48 @@
           </a:xfrm>
         </p:spPr>
         <p:txBody>
-          <a:bodyPr>
+          <a:bodyPr vert="horz" lIns="91440" tIns="45720" rIns="91440" bIns="45720" rtlCol="0">
             <a:normAutofit/>
           </a:bodyPr>
           <a:lstStyle/>
           <a:p>
             <a:r>
-              <a:rPr lang="cs-CZ" dirty="0"/>
-              <a:t>Datový typ vstupních parametrů je odvozen na základě</a:t>
-            </a:r>
-          </a:p>
-          <a:p>
-            <a:pPr lvl="1"/>
-            <a:r>
-              <a:rPr lang="cs-CZ" dirty="0"/>
-              <a:t>Vložené hodnoty</a:t>
-            </a:r>
-          </a:p>
-          <a:p>
-            <a:pPr lvl="1"/>
-            <a:r>
-              <a:rPr lang="cs-CZ" dirty="0"/>
-              <a:t>Použitých operátorů</a:t>
-            </a:r>
-          </a:p>
-          <a:p>
+              <a:rPr lang="cs-CZ">
+                <a:latin typeface="Grandview Display"/>
+              </a:rPr>
+              <a:t>Malé anonymní funkce, které se chovají jako běžné funkce</a:t>
+            </a:r>
+          </a:p>
+          <a:p>
+            <a:r>
+              <a:rPr lang="cs-CZ">
+                <a:latin typeface="Grandview Display"/>
+              </a:rPr>
+              <a:t>Nejčastěji se využívají pro krátké funkce</a:t>
+            </a:r>
+          </a:p>
+          <a:p>
+            <a:r>
+              <a:rPr lang="cs-CZ">
+                <a:latin typeface="Grandview Display"/>
+              </a:rPr>
+              <a:t>Vyjadřují v čistší podobě použití dané funkce</a:t>
+            </a:r>
+          </a:p>
+          <a:p>
+            <a:r>
+              <a:rPr lang="cs-CZ">
+                <a:latin typeface="Grandview Display"/>
+              </a:rPr>
+              <a:t>Lambda funkcím můžeme přiřadit jméno</a:t>
+            </a:r>
             <a:endParaRPr lang="cs-CZ" dirty="0"/>
           </a:p>
-          <a:p>
-            <a:r>
-              <a:rPr lang="cs-CZ" sz="3200" b="1" dirty="0"/>
-              <a:t>(parametry) =&gt; výraz</a:t>
-            </a:r>
-          </a:p>
-          <a:p>
-            <a:pPr lvl="1"/>
-            <a:r>
-              <a:rPr lang="cs-CZ" dirty="0"/>
-              <a:t>Parametry jsou vstupními argumenty</a:t>
-            </a:r>
-          </a:p>
-          <a:p>
-            <a:pPr lvl="1"/>
-            <a:r>
-              <a:rPr lang="cs-CZ" dirty="0"/>
-              <a:t>Výraz je krátký kód pracující s parametry</a:t>
-            </a:r>
-          </a:p>
-        </p:txBody>
-      </p:sp>
-      <p:sp>
-        <p:nvSpPr>
-          <p:cNvPr id="14" name="Rectangle 13">
+        </p:txBody>
+      </p:sp>
+      <p:sp>
+        <p:nvSpPr>
+          <p:cNvPr id="17" name="Rectangle 16">
             <a:extLst>
               <a:ext uri="{FF2B5EF4-FFF2-40B4-BE49-F238E27FC236}">
                 <a16:creationId xmlns:a16="http://schemas.microsoft.com/office/drawing/2014/main" id="{9A206779-5C74-4555-94BC-5845C92EC3A8}"/>
@@ -4602,10 +4761,145 @@
           </a:p>
         </p:txBody>
       </p:sp>
+      <p:sp>
+        <p:nvSpPr>
+          <p:cNvPr id="4" name="Zástupný symbol pro datum 3">
+            <a:extLst>
+              <a:ext uri="{FF2B5EF4-FFF2-40B4-BE49-F238E27FC236}">
+                <a16:creationId xmlns:a16="http://schemas.microsoft.com/office/drawing/2014/main" id="{626FC607-D1C8-C07B-461C-184A15BE82FE}"/>
+              </a:ext>
+            </a:extLst>
+          </p:cNvPr>
+          <p:cNvSpPr>
+            <a:spLocks noGrp="1"/>
+          </p:cNvSpPr>
+          <p:nvPr>
+            <p:ph type="dt" sz="half" idx="10"/>
+          </p:nvPr>
+        </p:nvSpPr>
+        <p:spPr>
+          <a:xfrm>
+            <a:off x="262465" y="6356350"/>
+            <a:ext cx="2743200" cy="365125"/>
+          </a:xfrm>
+        </p:spPr>
+        <p:txBody>
+          <a:bodyPr>
+            <a:normAutofit/>
+          </a:bodyPr>
+          <a:lstStyle/>
+          <a:p>
+            <a:pPr>
+              <a:spcAft>
+                <a:spcPts val="600"/>
+              </a:spcAft>
+            </a:pPr>
+            <a:fld id="{1EADA429-8AAD-4E09-ADF7-22AA09CAE344}" type="datetime1">
+              <a:pPr>
+                <a:spcAft>
+                  <a:spcPts val="600"/>
+                </a:spcAft>
+              </a:pPr>
+              <a:t>08.10.2025</a:t>
+            </a:fld>
+            <a:endParaRPr lang="en-US"/>
+          </a:p>
+        </p:txBody>
+      </p:sp>
+      <p:sp>
+        <p:nvSpPr>
+          <p:cNvPr id="5" name="Zástupný symbol pro zápatí 4">
+            <a:extLst>
+              <a:ext uri="{FF2B5EF4-FFF2-40B4-BE49-F238E27FC236}">
+                <a16:creationId xmlns:a16="http://schemas.microsoft.com/office/drawing/2014/main" id="{753ECA97-3A78-ACC0-4F1F-6FC19691BACF}"/>
+              </a:ext>
+            </a:extLst>
+          </p:cNvPr>
+          <p:cNvSpPr>
+            <a:spLocks noGrp="1"/>
+          </p:cNvSpPr>
+          <p:nvPr>
+            <p:ph type="ftr" sz="quarter" idx="11"/>
+          </p:nvPr>
+        </p:nvSpPr>
+        <p:spPr>
+          <a:xfrm>
+            <a:off x="3869268" y="6356350"/>
+            <a:ext cx="5911517" cy="365125"/>
+          </a:xfrm>
+        </p:spPr>
+        <p:txBody>
+          <a:bodyPr>
+            <a:normAutofit/>
+          </a:bodyPr>
+          <a:lstStyle/>
+          <a:p>
+            <a:pPr>
+              <a:lnSpc>
+                <a:spcPct val="90000"/>
+              </a:lnSpc>
+              <a:spcAft>
+                <a:spcPts val="600"/>
+              </a:spcAft>
+            </a:pPr>
+            <a:r>
+              <a:rPr lang="en-US" sz="700"/>
+              <a:t>
+              </a:t>
+            </a:r>
+          </a:p>
+        </p:txBody>
+      </p:sp>
+      <p:sp>
+        <p:nvSpPr>
+          <p:cNvPr id="6" name="Zástupný symbol pro číslo snímku 5">
+            <a:extLst>
+              <a:ext uri="{FF2B5EF4-FFF2-40B4-BE49-F238E27FC236}">
+                <a16:creationId xmlns:a16="http://schemas.microsoft.com/office/drawing/2014/main" id="{4B6A36FA-C53A-9620-DF45-3B0C1D7967DB}"/>
+              </a:ext>
+            </a:extLst>
+          </p:cNvPr>
+          <p:cNvSpPr>
+            <a:spLocks noGrp="1"/>
+          </p:cNvSpPr>
+          <p:nvPr>
+            <p:ph type="sldNum" sz="quarter" idx="12"/>
+          </p:nvPr>
+        </p:nvSpPr>
+        <p:spPr>
+          <a:xfrm>
+            <a:off x="10634135" y="6356350"/>
+            <a:ext cx="1530927" cy="365125"/>
+          </a:xfrm>
+        </p:spPr>
+        <p:txBody>
+          <a:bodyPr>
+            <a:normAutofit/>
+          </a:bodyPr>
+          <a:lstStyle/>
+          <a:p>
+            <a:pPr>
+              <a:spcAft>
+                <a:spcPts val="600"/>
+              </a:spcAft>
+            </a:pPr>
+            <a:fld id="{70C12960-6E85-460F-B6E3-5B82CB31AF3D}" type="slidenum">
+              <a:rPr lang="en-US" dirty="0"/>
+              <a:pPr>
+                <a:spcAft>
+                  <a:spcPts val="600"/>
+                </a:spcAft>
+              </a:pPr>
+              <a:t>3</a:t>
+            </a:fld>
+            <a:endParaRPr lang="en-US"/>
+          </a:p>
+        </p:txBody>
+      </p:sp>
     </p:spTree>
     <p:extLst>
       <p:ext uri="{BB962C8B-B14F-4D97-AF65-F5344CB8AC3E}">
-        <p14:creationId xmlns:p14="http://schemas.microsoft.com/office/powerpoint/2010/main" val="1835517279"/>
+        <p14:creationId xmlns:p14="http://schemas.microsoft.com/office/powerpoint/2010/main" val="2713343441"/>
       </p:ext>
     </p:extLst>
   </p:cSld>
@@ -4642,7 +4936,7 @@
       </p:grpSpPr>
       <p:sp useBgFill="1">
         <p:nvSpPr>
-          <p:cNvPr id="18" name="Rectangle 7">
+          <p:cNvPr id="11" name="Rectangle 10">
             <a:extLst>
               <a:ext uri="{FF2B5EF4-FFF2-40B4-BE49-F238E27FC236}">
                 <a16:creationId xmlns:a16="http://schemas.microsoft.com/office/drawing/2014/main" id="{80516254-1D9F-4F3A-9870-3A3280BE2BFE}"/>
@@ -4691,20 +4985,13 @@
             <a:schemeClr val="lt1"/>
           </a:fontRef>
         </p:style>
-        <p:txBody>
-          <a:bodyPr/>
-          <a:lstStyle/>
-          <a:p>
-            <a:endParaRPr lang="cs-CZ"/>
-          </a:p>
-        </p:txBody>
       </p:sp>
       <p:sp>
         <p:nvSpPr>
           <p:cNvPr id="2" name="Nadpis 1">
             <a:extLst>
               <a:ext uri="{FF2B5EF4-FFF2-40B4-BE49-F238E27FC236}">
-                <a16:creationId xmlns:a16="http://schemas.microsoft.com/office/drawing/2014/main" id="{C186FD83-E766-AB4E-7306-0AD00B41D74E}"/>
+                <a16:creationId xmlns:a16="http://schemas.microsoft.com/office/drawing/2014/main" id="{75A33F52-A009-3B05-B973-387026E092D6}"/>
               </a:ext>
             </a:extLst>
           </p:cNvPr>
@@ -4737,14 +5024,14 @@
                   </a:schemeClr>
                 </a:solidFill>
               </a:rPr>
-              <a:t>Příklady</a:t>
-            </a:r>
-          </a:p>
-        </p:txBody>
-      </p:sp>
-      <p:sp>
-        <p:nvSpPr>
-          <p:cNvPr id="19" name="Rectangle 9">
+              <a:t>Syntaxe lambda funkcí</a:t>
+            </a:r>
+          </a:p>
+        </p:txBody>
+      </p:sp>
+      <p:sp>
+        <p:nvSpPr>
+          <p:cNvPr id="13" name="Rectangle 12">
             <a:extLst>
               <a:ext uri="{FF2B5EF4-FFF2-40B4-BE49-F238E27FC236}">
                 <a16:creationId xmlns:a16="http://schemas.microsoft.com/office/drawing/2014/main" id="{FC14672B-27A5-4CDA-ABAF-5E4CF4B41C23}"/>
@@ -4796,17 +5083,10 @@
             <a:schemeClr val="lt1"/>
           </a:fontRef>
         </p:style>
-        <p:txBody>
-          <a:bodyPr/>
-          <a:lstStyle/>
-          <a:p>
-            <a:endParaRPr lang="cs-CZ"/>
-          </a:p>
-        </p:txBody>
       </p:sp>
       <p:cxnSp>
         <p:nvCxnSpPr>
-          <p:cNvPr id="20" name="Straight Connector 11">
+          <p:cNvPr id="15" name="Straight Connector 14">
             <a:extLst>
               <a:ext uri="{FF2B5EF4-FFF2-40B4-BE49-F238E27FC236}">
                 <a16:creationId xmlns:a16="http://schemas.microsoft.com/office/drawing/2014/main" id="{8D89589C-2C90-4407-A995-05EC3DD7AB14}"/>
@@ -4864,7 +5144,7 @@
           <p:cNvPr id="3" name="Zástupný obsah 2">
             <a:extLst>
               <a:ext uri="{FF2B5EF4-FFF2-40B4-BE49-F238E27FC236}">
-                <a16:creationId xmlns:a16="http://schemas.microsoft.com/office/drawing/2014/main" id="{A4804208-4AAB-99B6-CA23-104DF9610824}"/>
+                <a16:creationId xmlns:a16="http://schemas.microsoft.com/office/drawing/2014/main" id="{6190C726-B252-80C6-B134-5F75290F6CFB}"/>
               </a:ext>
             </a:extLst>
           </p:cNvPr>
@@ -4882,86 +5162,71 @@
           </a:xfrm>
         </p:spPr>
         <p:txBody>
-          <a:bodyPr>
+          <a:bodyPr vert="horz" lIns="91440" tIns="45720" rIns="91440" bIns="45720" rtlCol="0">
             <a:normAutofit/>
           </a:bodyPr>
           <a:lstStyle/>
           <a:p>
             <a:r>
-              <a:rPr lang="cs-CZ" b="1"/>
-              <a:t>X =&gt; X * X</a:t>
-            </a:r>
-          </a:p>
-          <a:p>
-            <a:pPr lvl="1"/>
-            <a:r>
-              <a:rPr lang="cs-CZ"/>
-              <a:t>Funkce vrací mocninu vložené hodnoty</a:t>
-            </a:r>
-          </a:p>
-          <a:p>
-            <a:r>
-              <a:rPr lang="cs-CZ" b="1"/>
-              <a:t>(X, Y) =&gt; X + Y</a:t>
-            </a:r>
-          </a:p>
-          <a:p>
-            <a:pPr lvl="1"/>
-            <a:r>
-              <a:rPr lang="cs-CZ"/>
-              <a:t>Funkce vrací součet dvou hodnot</a:t>
-            </a:r>
-          </a:p>
-          <a:p>
-            <a:r>
-              <a:rPr lang="cs-CZ" b="1" err="1"/>
-              <a:t>Func</a:t>
-            </a:r>
-            <a:r>
-              <a:rPr lang="cs-CZ" b="1"/>
-              <a:t>&lt;</a:t>
-            </a:r>
-            <a:r>
-              <a:rPr lang="cs-CZ" b="1" err="1"/>
-              <a:t>int</a:t>
-            </a:r>
-            <a:r>
-              <a:rPr lang="cs-CZ" b="1"/>
-              <a:t>, </a:t>
-            </a:r>
-            <a:r>
-              <a:rPr lang="cs-CZ" b="1" err="1"/>
-              <a:t>int</a:t>
-            </a:r>
-            <a:r>
-              <a:rPr lang="cs-CZ" b="1"/>
-              <a:t>, </a:t>
-            </a:r>
-            <a:r>
-              <a:rPr lang="cs-CZ" b="1" err="1"/>
-              <a:t>bool</a:t>
-            </a:r>
-            <a:r>
-              <a:rPr lang="cs-CZ" b="1"/>
-              <a:t>&gt; shodne = (x, y) =&gt; x == y;</a:t>
-            </a:r>
-          </a:p>
-          <a:p>
-            <a:pPr lvl="1"/>
-            <a:r>
-              <a:rPr lang="cs-CZ"/>
-              <a:t>Přiřazení jména lambda funkci</a:t>
-            </a:r>
-          </a:p>
-          <a:p>
-            <a:pPr lvl="1"/>
+              <a:rPr lang="cs-CZ">
+                <a:latin typeface="Grandview Display"/>
+              </a:rPr>
+              <a:t>Datový typ vstupních parametrů je odvozen na základě</a:t>
+            </a:r>
+          </a:p>
+          <a:p>
+            <a:r>
+              <a:rPr lang="cs-CZ">
+                <a:latin typeface="Grandview Display"/>
+              </a:rPr>
+              <a:t>Vložené hodnoty</a:t>
+            </a:r>
+          </a:p>
+          <a:p>
+            <a:r>
+              <a:rPr lang="cs-CZ">
+                <a:latin typeface="Grandview Display"/>
+              </a:rPr>
+              <a:t>Použitých operátorů</a:t>
+            </a:r>
+          </a:p>
+          <a:p>
+            <a:endParaRPr lang="cs-CZ" dirty="0">
+              <a:latin typeface="Grandview Display"/>
+            </a:endParaRPr>
+          </a:p>
+          <a:p>
+            <a:r>
+              <a:rPr lang="cs-CZ" b="1">
+                <a:latin typeface="Grandview Display"/>
+              </a:rPr>
+              <a:t>(parametry) =&gt; výraz</a:t>
+            </a:r>
+          </a:p>
+          <a:p>
+            <a:r>
+              <a:rPr lang="cs-CZ">
+                <a:latin typeface="Grandview Display"/>
+              </a:rPr>
+              <a:t>Parametry jsou vstupními argumenty</a:t>
+            </a:r>
+          </a:p>
+          <a:p>
+            <a:r>
+              <a:rPr lang="cs-CZ">
+                <a:latin typeface="Grandview Display"/>
+              </a:rPr>
+              <a:t>Výraz je krátký kód pracující s parametry</a:t>
+            </a:r>
+          </a:p>
+          <a:p>
             <a:endParaRPr lang="cs-CZ" dirty="0"/>
           </a:p>
         </p:txBody>
       </p:sp>
       <p:sp>
         <p:nvSpPr>
-          <p:cNvPr id="21" name="Rectangle 13">
+          <p:cNvPr id="17" name="Rectangle 16">
             <a:extLst>
               <a:ext uri="{FF2B5EF4-FFF2-40B4-BE49-F238E27FC236}">
                 <a16:creationId xmlns:a16="http://schemas.microsoft.com/office/drawing/2014/main" id="{9A206779-5C74-4555-94BC-5845C92EC3A8}"/>
@@ -5024,10 +5289,145 @@
           </a:p>
         </p:txBody>
       </p:sp>
+      <p:sp>
+        <p:nvSpPr>
+          <p:cNvPr id="4" name="Zástupný symbol pro datum 3">
+            <a:extLst>
+              <a:ext uri="{FF2B5EF4-FFF2-40B4-BE49-F238E27FC236}">
+                <a16:creationId xmlns:a16="http://schemas.microsoft.com/office/drawing/2014/main" id="{FDDE1980-4C03-AE9C-7FFC-6C38B4B9B399}"/>
+              </a:ext>
+            </a:extLst>
+          </p:cNvPr>
+          <p:cNvSpPr>
+            <a:spLocks noGrp="1"/>
+          </p:cNvSpPr>
+          <p:nvPr>
+            <p:ph type="dt" sz="half" idx="10"/>
+          </p:nvPr>
+        </p:nvSpPr>
+        <p:spPr>
+          <a:xfrm>
+            <a:off x="262465" y="6356350"/>
+            <a:ext cx="2743200" cy="365125"/>
+          </a:xfrm>
+        </p:spPr>
+        <p:txBody>
+          <a:bodyPr>
+            <a:normAutofit/>
+          </a:bodyPr>
+          <a:lstStyle/>
+          <a:p>
+            <a:pPr>
+              <a:spcAft>
+                <a:spcPts val="600"/>
+              </a:spcAft>
+            </a:pPr>
+            <a:fld id="{F7682C15-5040-453D-951B-0F3D9B73CADD}" type="datetime1">
+              <a:pPr>
+                <a:spcAft>
+                  <a:spcPts val="600"/>
+                </a:spcAft>
+              </a:pPr>
+              <a:t>08.10.2025</a:t>
+            </a:fld>
+            <a:endParaRPr lang="en-US"/>
+          </a:p>
+        </p:txBody>
+      </p:sp>
+      <p:sp>
+        <p:nvSpPr>
+          <p:cNvPr id="5" name="Zástupný symbol pro zápatí 4">
+            <a:extLst>
+              <a:ext uri="{FF2B5EF4-FFF2-40B4-BE49-F238E27FC236}">
+                <a16:creationId xmlns:a16="http://schemas.microsoft.com/office/drawing/2014/main" id="{00DCE088-D12C-7E85-AA00-A5C0A9876ED1}"/>
+              </a:ext>
+            </a:extLst>
+          </p:cNvPr>
+          <p:cNvSpPr>
+            <a:spLocks noGrp="1"/>
+          </p:cNvSpPr>
+          <p:nvPr>
+            <p:ph type="ftr" sz="quarter" idx="11"/>
+          </p:nvPr>
+        </p:nvSpPr>
+        <p:spPr>
+          <a:xfrm>
+            <a:off x="3869268" y="6356350"/>
+            <a:ext cx="5911517" cy="365125"/>
+          </a:xfrm>
+        </p:spPr>
+        <p:txBody>
+          <a:bodyPr>
+            <a:normAutofit/>
+          </a:bodyPr>
+          <a:lstStyle/>
+          <a:p>
+            <a:pPr>
+              <a:lnSpc>
+                <a:spcPct val="90000"/>
+              </a:lnSpc>
+              <a:spcAft>
+                <a:spcPts val="600"/>
+              </a:spcAft>
+            </a:pPr>
+            <a:r>
+              <a:rPr lang="en-US" sz="700"/>
+              <a:t>
+              </a:t>
+            </a:r>
+          </a:p>
+        </p:txBody>
+      </p:sp>
+      <p:sp>
+        <p:nvSpPr>
+          <p:cNvPr id="6" name="Zástupný symbol pro číslo snímku 5">
+            <a:extLst>
+              <a:ext uri="{FF2B5EF4-FFF2-40B4-BE49-F238E27FC236}">
+                <a16:creationId xmlns:a16="http://schemas.microsoft.com/office/drawing/2014/main" id="{388AA30A-448F-9913-060B-5B0879246828}"/>
+              </a:ext>
+            </a:extLst>
+          </p:cNvPr>
+          <p:cNvSpPr>
+            <a:spLocks noGrp="1"/>
+          </p:cNvSpPr>
+          <p:nvPr>
+            <p:ph type="sldNum" sz="quarter" idx="12"/>
+          </p:nvPr>
+        </p:nvSpPr>
+        <p:spPr>
+          <a:xfrm>
+            <a:off x="10634135" y="6356350"/>
+            <a:ext cx="1530927" cy="365125"/>
+          </a:xfrm>
+        </p:spPr>
+        <p:txBody>
+          <a:bodyPr>
+            <a:normAutofit/>
+          </a:bodyPr>
+          <a:lstStyle/>
+          <a:p>
+            <a:pPr>
+              <a:spcAft>
+                <a:spcPts val="600"/>
+              </a:spcAft>
+            </a:pPr>
+            <a:fld id="{70C12960-6E85-460F-B6E3-5B82CB31AF3D}" type="slidenum">
+              <a:rPr lang="en-US" dirty="0"/>
+              <a:pPr>
+                <a:spcAft>
+                  <a:spcPts val="600"/>
+                </a:spcAft>
+              </a:pPr>
+              <a:t>4</a:t>
+            </a:fld>
+            <a:endParaRPr lang="en-US"/>
+          </a:p>
+        </p:txBody>
+      </p:sp>
     </p:spTree>
     <p:extLst>
       <p:ext uri="{BB962C8B-B14F-4D97-AF65-F5344CB8AC3E}">
-        <p14:creationId xmlns:p14="http://schemas.microsoft.com/office/powerpoint/2010/main" val="1972653585"/>
+        <p14:creationId xmlns:p14="http://schemas.microsoft.com/office/powerpoint/2010/main" val="3019876639"/>
       </p:ext>
     </p:extLst>
   </p:cSld>
@@ -5064,7 +5464,7 @@
       </p:grpSpPr>
       <p:sp useBgFill="1">
         <p:nvSpPr>
-          <p:cNvPr id="8" name="Rectangle 7">
+          <p:cNvPr id="11" name="Rectangle 10">
             <a:extLst>
               <a:ext uri="{FF2B5EF4-FFF2-40B4-BE49-F238E27FC236}">
                 <a16:creationId xmlns:a16="http://schemas.microsoft.com/office/drawing/2014/main" id="{80516254-1D9F-4F3A-9870-3A3280BE2BFE}"/>
@@ -5113,20 +5513,13 @@
             <a:schemeClr val="lt1"/>
           </a:fontRef>
         </p:style>
-        <p:txBody>
-          <a:bodyPr/>
-          <a:lstStyle/>
-          <a:p>
-            <a:endParaRPr lang="cs-CZ"/>
-          </a:p>
-        </p:txBody>
       </p:sp>
       <p:sp>
         <p:nvSpPr>
           <p:cNvPr id="2" name="Nadpis 1">
             <a:extLst>
               <a:ext uri="{FF2B5EF4-FFF2-40B4-BE49-F238E27FC236}">
-                <a16:creationId xmlns:a16="http://schemas.microsoft.com/office/drawing/2014/main" id="{26CA7932-A3F1-3D6C-71D6-4538A9A2F337}"/>
+                <a16:creationId xmlns:a16="http://schemas.microsoft.com/office/drawing/2014/main" id="{06A9C2DA-C712-AC78-9FF6-F250CEBB7A94}"/>
               </a:ext>
             </a:extLst>
           </p:cNvPr>
@@ -5159,14 +5552,14 @@
                   </a:schemeClr>
                 </a:solidFill>
               </a:rPr>
-              <a:t>LINQ</a:t>
-            </a:r>
-          </a:p>
-        </p:txBody>
-      </p:sp>
-      <p:sp>
-        <p:nvSpPr>
-          <p:cNvPr id="10" name="Rectangle 9">
+              <a:t>Příklad</a:t>
+            </a:r>
+          </a:p>
+        </p:txBody>
+      </p:sp>
+      <p:sp>
+        <p:nvSpPr>
+          <p:cNvPr id="13" name="Rectangle 12">
             <a:extLst>
               <a:ext uri="{FF2B5EF4-FFF2-40B4-BE49-F238E27FC236}">
                 <a16:creationId xmlns:a16="http://schemas.microsoft.com/office/drawing/2014/main" id="{FC14672B-27A5-4CDA-ABAF-5E4CF4B41C23}"/>
@@ -5218,17 +5611,10 @@
             <a:schemeClr val="lt1"/>
           </a:fontRef>
         </p:style>
-        <p:txBody>
-          <a:bodyPr/>
-          <a:lstStyle/>
-          <a:p>
-            <a:endParaRPr lang="cs-CZ"/>
-          </a:p>
-        </p:txBody>
       </p:sp>
       <p:cxnSp>
         <p:nvCxnSpPr>
-          <p:cNvPr id="12" name="Straight Connector 11">
+          <p:cNvPr id="15" name="Straight Connector 14">
             <a:extLst>
               <a:ext uri="{FF2B5EF4-FFF2-40B4-BE49-F238E27FC236}">
                 <a16:creationId xmlns:a16="http://schemas.microsoft.com/office/drawing/2014/main" id="{8D89589C-2C90-4407-A995-05EC3DD7AB14}"/>
@@ -5286,7 +5672,7 @@
           <p:cNvPr id="3" name="Zástupný obsah 2">
             <a:extLst>
               <a:ext uri="{FF2B5EF4-FFF2-40B4-BE49-F238E27FC236}">
-                <a16:creationId xmlns:a16="http://schemas.microsoft.com/office/drawing/2014/main" id="{0A2BCDF1-AF28-488B-71C1-703EED7688CC}"/>
+                <a16:creationId xmlns:a16="http://schemas.microsoft.com/office/drawing/2014/main" id="{6288CD2B-EE7A-7511-6D80-19908079ECCF}"/>
               </a:ext>
             </a:extLst>
           </p:cNvPr>
@@ -5304,85 +5690,97 @@
           </a:xfrm>
         </p:spPr>
         <p:txBody>
-          <a:bodyPr>
+          <a:bodyPr vert="horz" lIns="91440" tIns="45720" rIns="91440" bIns="45720" rtlCol="0">
             <a:normAutofit/>
           </a:bodyPr>
           <a:lstStyle/>
           <a:p>
             <a:r>
+              <a:rPr lang="cs-CZ" b="1" dirty="0"/>
+              <a:t>X =&gt; X * X</a:t>
+            </a:r>
+          </a:p>
+          <a:p>
+            <a:pPr marL="493395" lvl="1">
+              <a:buFont typeface="Wingdings 2,Sans-Serif" panose="020B0604020202020204" pitchFamily="34" charset="0"/>
+              <a:buChar char=""/>
+            </a:pPr>
+            <a:r>
+              <a:rPr lang="cs-CZ" dirty="0"/>
+              <a:t>Funkce vrací mocninu vložené hodnoty</a:t>
+            </a:r>
+          </a:p>
+          <a:p>
+            <a:r>
+              <a:rPr lang="cs-CZ" b="1" dirty="0"/>
+              <a:t>(X, Y) =&gt; X + Y</a:t>
+            </a:r>
+          </a:p>
+          <a:p>
+            <a:pPr marL="493395" lvl="1">
+              <a:buFont typeface="Wingdings 2,Sans-Serif" panose="020B0604020202020204" pitchFamily="34" charset="0"/>
+              <a:buChar char=""/>
+            </a:pPr>
+            <a:r>
+              <a:rPr lang="cs-CZ" dirty="0"/>
+              <a:t>Funkce vrací součet dvou hodnot</a:t>
+            </a:r>
+          </a:p>
+          <a:p>
+            <a:r>
               <a:rPr lang="cs-CZ" b="1" dirty="0" err="1"/>
-              <a:t>Language-Integrated</a:t>
+              <a:t>Func</a:t>
             </a:r>
             <a:r>
               <a:rPr lang="cs-CZ" b="1" dirty="0"/>
-              <a:t> </a:t>
+              <a:t>&lt;</a:t>
             </a:r>
             <a:r>
               <a:rPr lang="cs-CZ" b="1" dirty="0" err="1"/>
-              <a:t>Query</a:t>
-            </a:r>
-            <a:endParaRPr lang="cs-CZ" b="1" dirty="0"/>
-          </a:p>
-          <a:p>
+              <a:t>int</a:t>
+            </a:r>
+            <a:r>
+              <a:rPr lang="cs-CZ" b="1" dirty="0"/>
+              <a:t>, </a:t>
+            </a:r>
+            <a:r>
+              <a:rPr lang="cs-CZ" b="1" dirty="0" err="1"/>
+              <a:t>int</a:t>
+            </a:r>
+            <a:r>
+              <a:rPr lang="cs-CZ" b="1" dirty="0"/>
+              <a:t>, </a:t>
+            </a:r>
+            <a:r>
+              <a:rPr lang="cs-CZ" b="1" dirty="0" err="1"/>
+              <a:t>bool</a:t>
+            </a:r>
+            <a:r>
+              <a:rPr lang="cs-CZ" b="1" dirty="0"/>
+              <a:t>&gt; shodne = (x, y) =&gt; x == y;</a:t>
+            </a:r>
+          </a:p>
+          <a:p>
+            <a:pPr marL="493395" lvl="1">
+              <a:buFont typeface="Wingdings 2,Sans-Serif" panose="020B0604020202020204" pitchFamily="34" charset="0"/>
+              <a:buChar char=""/>
+            </a:pPr>
             <a:r>
               <a:rPr lang="cs-CZ" dirty="0"/>
-              <a:t>Tvorba dotazovacích </a:t>
-            </a:r>
-            <a:r>
-              <a:rPr lang="cs-CZ"/>
-              <a:t>výrazů podobných </a:t>
-            </a:r>
-            <a:r>
-              <a:rPr lang="cs-CZ" dirty="0"/>
-              <a:t>SQL</a:t>
-            </a:r>
-          </a:p>
-          <a:p>
-            <a:r>
-              <a:rPr lang="cs-CZ" dirty="0"/>
-              <a:t>Vhodné pro práci s kolekcemi</a:t>
-            </a:r>
-          </a:p>
-          <a:p>
-            <a:pPr lvl="1"/>
-            <a:r>
-              <a:rPr lang="cs-CZ" dirty="0"/>
-              <a:t>Vyhledávání</a:t>
-            </a:r>
-          </a:p>
-          <a:p>
-            <a:pPr lvl="1"/>
-            <a:r>
-              <a:rPr lang="cs-CZ" dirty="0"/>
-              <a:t>Seřazení dle parametru</a:t>
-            </a:r>
-          </a:p>
-          <a:p>
-            <a:pPr lvl="1"/>
-            <a:r>
-              <a:rPr lang="cs-CZ" dirty="0"/>
-              <a:t>Výběr počtu prvků</a:t>
-            </a:r>
-          </a:p>
-          <a:p>
-            <a:pPr lvl="1"/>
-            <a:r>
-              <a:rPr lang="cs-CZ" dirty="0"/>
-              <a:t>Filtrování</a:t>
-            </a:r>
-          </a:p>
-          <a:p>
-            <a:pPr lvl="1"/>
-            <a:r>
-              <a:rPr lang="cs-CZ" dirty="0"/>
-              <a:t>Hromadná úprava nad prvky</a:t>
-            </a:r>
-          </a:p>
-        </p:txBody>
-      </p:sp>
-      <p:sp>
-        <p:nvSpPr>
-          <p:cNvPr id="14" name="Rectangle 13">
+              <a:t>Přiřazení jména lambda funkci</a:t>
+            </a:r>
+          </a:p>
+          <a:p>
+            <a:endParaRPr lang="cs-CZ" dirty="0"/>
+          </a:p>
+          <a:p>
+            <a:endParaRPr lang="cs-CZ" dirty="0"/>
+          </a:p>
+        </p:txBody>
+      </p:sp>
+      <p:sp>
+        <p:nvSpPr>
+          <p:cNvPr id="17" name="Rectangle 16">
             <a:extLst>
               <a:ext uri="{FF2B5EF4-FFF2-40B4-BE49-F238E27FC236}">
                 <a16:creationId xmlns:a16="http://schemas.microsoft.com/office/drawing/2014/main" id="{9A206779-5C74-4555-94BC-5845C92EC3A8}"/>
@@ -5445,10 +5843,145 @@
           </a:p>
         </p:txBody>
       </p:sp>
+      <p:sp>
+        <p:nvSpPr>
+          <p:cNvPr id="4" name="Zástupný symbol pro datum 3">
+            <a:extLst>
+              <a:ext uri="{FF2B5EF4-FFF2-40B4-BE49-F238E27FC236}">
+                <a16:creationId xmlns:a16="http://schemas.microsoft.com/office/drawing/2014/main" id="{3907D5D6-8BC4-BE16-D984-E3885FAECE80}"/>
+              </a:ext>
+            </a:extLst>
+          </p:cNvPr>
+          <p:cNvSpPr>
+            <a:spLocks noGrp="1"/>
+          </p:cNvSpPr>
+          <p:nvPr>
+            <p:ph type="dt" sz="half" idx="10"/>
+          </p:nvPr>
+        </p:nvSpPr>
+        <p:spPr>
+          <a:xfrm>
+            <a:off x="262465" y="6356350"/>
+            <a:ext cx="2743200" cy="365125"/>
+          </a:xfrm>
+        </p:spPr>
+        <p:txBody>
+          <a:bodyPr>
+            <a:normAutofit/>
+          </a:bodyPr>
+          <a:lstStyle/>
+          <a:p>
+            <a:pPr>
+              <a:spcAft>
+                <a:spcPts val="600"/>
+              </a:spcAft>
+            </a:pPr>
+            <a:fld id="{F360CD2E-677A-433F-9237-521AE69A0964}" type="datetime1">
+              <a:pPr>
+                <a:spcAft>
+                  <a:spcPts val="600"/>
+                </a:spcAft>
+              </a:pPr>
+              <a:t>08.10.2025</a:t>
+            </a:fld>
+            <a:endParaRPr lang="en-US"/>
+          </a:p>
+        </p:txBody>
+      </p:sp>
+      <p:sp>
+        <p:nvSpPr>
+          <p:cNvPr id="5" name="Zástupný symbol pro zápatí 4">
+            <a:extLst>
+              <a:ext uri="{FF2B5EF4-FFF2-40B4-BE49-F238E27FC236}">
+                <a16:creationId xmlns:a16="http://schemas.microsoft.com/office/drawing/2014/main" id="{E360CDE6-A75A-741C-6920-85E15CF3213A}"/>
+              </a:ext>
+            </a:extLst>
+          </p:cNvPr>
+          <p:cNvSpPr>
+            <a:spLocks noGrp="1"/>
+          </p:cNvSpPr>
+          <p:nvPr>
+            <p:ph type="ftr" sz="quarter" idx="11"/>
+          </p:nvPr>
+        </p:nvSpPr>
+        <p:spPr>
+          <a:xfrm>
+            <a:off x="3869268" y="6356350"/>
+            <a:ext cx="5911517" cy="365125"/>
+          </a:xfrm>
+        </p:spPr>
+        <p:txBody>
+          <a:bodyPr>
+            <a:normAutofit/>
+          </a:bodyPr>
+          <a:lstStyle/>
+          <a:p>
+            <a:pPr>
+              <a:lnSpc>
+                <a:spcPct val="90000"/>
+              </a:lnSpc>
+              <a:spcAft>
+                <a:spcPts val="600"/>
+              </a:spcAft>
+            </a:pPr>
+            <a:r>
+              <a:rPr lang="en-US" sz="700"/>
+              <a:t>
+              </a:t>
+            </a:r>
+          </a:p>
+        </p:txBody>
+      </p:sp>
+      <p:sp>
+        <p:nvSpPr>
+          <p:cNvPr id="6" name="Zástupný symbol pro číslo snímku 5">
+            <a:extLst>
+              <a:ext uri="{FF2B5EF4-FFF2-40B4-BE49-F238E27FC236}">
+                <a16:creationId xmlns:a16="http://schemas.microsoft.com/office/drawing/2014/main" id="{EDD5729F-C14C-9DB2-E225-56A11C58D31C}"/>
+              </a:ext>
+            </a:extLst>
+          </p:cNvPr>
+          <p:cNvSpPr>
+            <a:spLocks noGrp="1"/>
+          </p:cNvSpPr>
+          <p:nvPr>
+            <p:ph type="sldNum" sz="quarter" idx="12"/>
+          </p:nvPr>
+        </p:nvSpPr>
+        <p:spPr>
+          <a:xfrm>
+            <a:off x="10634135" y="6356350"/>
+            <a:ext cx="1530927" cy="365125"/>
+          </a:xfrm>
+        </p:spPr>
+        <p:txBody>
+          <a:bodyPr>
+            <a:normAutofit/>
+          </a:bodyPr>
+          <a:lstStyle/>
+          <a:p>
+            <a:pPr>
+              <a:spcAft>
+                <a:spcPts val="600"/>
+              </a:spcAft>
+            </a:pPr>
+            <a:fld id="{70C12960-6E85-460F-B6E3-5B82CB31AF3D}" type="slidenum">
+              <a:rPr lang="en-US" dirty="0"/>
+              <a:pPr>
+                <a:spcAft>
+                  <a:spcPts val="600"/>
+                </a:spcAft>
+              </a:pPr>
+              <a:t>5</a:t>
+            </a:fld>
+            <a:endParaRPr lang="en-US"/>
+          </a:p>
+        </p:txBody>
+      </p:sp>
     </p:spTree>
     <p:extLst>
       <p:ext uri="{BB962C8B-B14F-4D97-AF65-F5344CB8AC3E}">
-        <p14:creationId xmlns:p14="http://schemas.microsoft.com/office/powerpoint/2010/main" val="1261143728"/>
+        <p14:creationId xmlns:p14="http://schemas.microsoft.com/office/powerpoint/2010/main" val="3277000307"/>
       </p:ext>
     </p:extLst>
   </p:cSld>
@@ -5485,7 +6018,7 @@
       </p:grpSpPr>
       <p:sp useBgFill="1">
         <p:nvSpPr>
-          <p:cNvPr id="8" name="Rectangle 7">
+          <p:cNvPr id="11" name="Rectangle 10">
             <a:extLst>
               <a:ext uri="{FF2B5EF4-FFF2-40B4-BE49-F238E27FC236}">
                 <a16:creationId xmlns:a16="http://schemas.microsoft.com/office/drawing/2014/main" id="{80516254-1D9F-4F3A-9870-3A3280BE2BFE}"/>
@@ -5534,20 +6067,13 @@
             <a:schemeClr val="lt1"/>
           </a:fontRef>
         </p:style>
-        <p:txBody>
-          <a:bodyPr/>
-          <a:lstStyle/>
-          <a:p>
-            <a:endParaRPr lang="cs-CZ"/>
-          </a:p>
-        </p:txBody>
       </p:sp>
       <p:sp>
         <p:nvSpPr>
           <p:cNvPr id="2" name="Nadpis 1">
             <a:extLst>
               <a:ext uri="{FF2B5EF4-FFF2-40B4-BE49-F238E27FC236}">
-                <a16:creationId xmlns:a16="http://schemas.microsoft.com/office/drawing/2014/main" id="{65476C62-F5FB-EA33-7545-886A5C32DB1A}"/>
+                <a16:creationId xmlns:a16="http://schemas.microsoft.com/office/drawing/2014/main" id="{D40CE6CD-79C3-158B-F77B-B3AD10095806}"/>
               </a:ext>
             </a:extLst>
           </p:cNvPr>
@@ -5572,7 +6098,7 @@
           <a:p>
             <a:pPr algn="r"/>
             <a:r>
-              <a:rPr lang="cs-CZ">
+              <a:rPr lang="cs-CZ" dirty="0">
                 <a:solidFill>
                   <a:schemeClr val="tx1">
                     <a:lumMod val="85000"/>
@@ -5580,14 +6106,14 @@
                   </a:schemeClr>
                 </a:solidFill>
               </a:rPr>
-              <a:t>Lambda funkce s LINQ</a:t>
-            </a:r>
-          </a:p>
-        </p:txBody>
-      </p:sp>
-      <p:sp>
-        <p:nvSpPr>
-          <p:cNvPr id="10" name="Rectangle 9">
+              <a:t>LINQ</a:t>
+            </a:r>
+          </a:p>
+        </p:txBody>
+      </p:sp>
+      <p:sp>
+        <p:nvSpPr>
+          <p:cNvPr id="13" name="Rectangle 12">
             <a:extLst>
               <a:ext uri="{FF2B5EF4-FFF2-40B4-BE49-F238E27FC236}">
                 <a16:creationId xmlns:a16="http://schemas.microsoft.com/office/drawing/2014/main" id="{FC14672B-27A5-4CDA-ABAF-5E4CF4B41C23}"/>
@@ -5639,17 +6165,10 @@
             <a:schemeClr val="lt1"/>
           </a:fontRef>
         </p:style>
-        <p:txBody>
-          <a:bodyPr/>
-          <a:lstStyle/>
-          <a:p>
-            <a:endParaRPr lang="cs-CZ"/>
-          </a:p>
-        </p:txBody>
       </p:sp>
       <p:cxnSp>
         <p:nvCxnSpPr>
-          <p:cNvPr id="12" name="Straight Connector 11">
+          <p:cNvPr id="15" name="Straight Connector 14">
             <a:extLst>
               <a:ext uri="{FF2B5EF4-FFF2-40B4-BE49-F238E27FC236}">
                 <a16:creationId xmlns:a16="http://schemas.microsoft.com/office/drawing/2014/main" id="{8D89589C-2C90-4407-A995-05EC3DD7AB14}"/>
@@ -5707,7 +6226,7 @@
           <p:cNvPr id="3" name="Zástupný obsah 2">
             <a:extLst>
               <a:ext uri="{FF2B5EF4-FFF2-40B4-BE49-F238E27FC236}">
-                <a16:creationId xmlns:a16="http://schemas.microsoft.com/office/drawing/2014/main" id="{1EE06E89-DF2E-AE7B-16BE-B8D52837C7CB}"/>
+                <a16:creationId xmlns:a16="http://schemas.microsoft.com/office/drawing/2014/main" id="{D6AC2EF1-E577-D177-2BAF-690EA95E27E0}"/>
               </a:ext>
             </a:extLst>
           </p:cNvPr>
@@ -5725,171 +6244,95 @@
           </a:xfrm>
         </p:spPr>
         <p:txBody>
-          <a:bodyPr>
+          <a:bodyPr vert="horz" lIns="91440" tIns="45720" rIns="91440" bIns="45720" rtlCol="0">
             <a:normAutofit/>
           </a:bodyPr>
           <a:lstStyle/>
           <a:p>
             <a:r>
+              <a:rPr lang="cs-CZ" b="1" err="1"/>
+              <a:t>Language-Integrated</a:t>
+            </a:r>
+            <a:r>
+              <a:rPr lang="cs-CZ" b="1" dirty="0"/>
+              <a:t> </a:t>
+            </a:r>
+            <a:r>
+              <a:rPr lang="cs-CZ" b="1" err="1"/>
+              <a:t>Query</a:t>
+            </a:r>
+            <a:endParaRPr lang="cs-CZ" b="1" dirty="0"/>
+          </a:p>
+          <a:p>
+            <a:r>
               <a:rPr lang="cs-CZ" dirty="0"/>
-              <a:t>Mějme třídu </a:t>
-            </a:r>
-            <a:r>
-              <a:rPr lang="cs-CZ" b="1" dirty="0"/>
-              <a:t>Animal</a:t>
-            </a:r>
+              <a:t>Tvorba dotazovacích výrazů podobných SQL</a:t>
+            </a:r>
+          </a:p>
+          <a:p>
             <a:r>
               <a:rPr lang="cs-CZ" dirty="0"/>
-              <a:t>, která má atributy </a:t>
-            </a:r>
-            <a:r>
-              <a:rPr lang="cs-CZ" b="1" dirty="0" err="1"/>
-              <a:t>jmeno</a:t>
-            </a:r>
-            <a:r>
-              <a:rPr lang="cs-CZ" b="1" dirty="0"/>
-              <a:t>, vek</a:t>
-            </a:r>
-          </a:p>
-          <a:p>
+              <a:t>Vhodné pro práci s kolekcemi</a:t>
+            </a:r>
+          </a:p>
+          <a:p>
+            <a:pPr marL="493395" lvl="1">
+              <a:buFont typeface="Wingdings 2,Sans-Serif" panose="020B0604020202020204" pitchFamily="34" charset="0"/>
+              <a:buChar char=""/>
+            </a:pPr>
             <a:r>
               <a:rPr lang="cs-CZ" dirty="0"/>
-              <a:t>Mějme seznam zvířat </a:t>
-            </a:r>
-            <a:r>
-              <a:rPr lang="cs-CZ" b="1" dirty="0"/>
-              <a:t>Listr&lt;Animal&gt; </a:t>
-            </a:r>
-            <a:r>
-              <a:rPr lang="cs-CZ" b="1" dirty="0" err="1"/>
-              <a:t>zvirata</a:t>
-            </a:r>
-            <a:endParaRPr lang="cs-CZ" b="1" dirty="0"/>
+              <a:t>Vyhledávání</a:t>
+            </a:r>
+          </a:p>
+          <a:p>
+            <a:pPr marL="493395" lvl="1">
+              <a:buFont typeface="Wingdings 2,Sans-Serif" panose="020B0604020202020204" pitchFamily="34" charset="0"/>
+              <a:buChar char=""/>
+            </a:pPr>
+            <a:r>
+              <a:rPr lang="cs-CZ" dirty="0"/>
+              <a:t>Seřazení dle parametru</a:t>
+            </a:r>
+          </a:p>
+          <a:p>
+            <a:pPr marL="493395" lvl="1">
+              <a:buFont typeface="Wingdings 2,Sans-Serif" panose="020B0604020202020204" pitchFamily="34" charset="0"/>
+              <a:buChar char=""/>
+            </a:pPr>
+            <a:r>
+              <a:rPr lang="cs-CZ" dirty="0"/>
+              <a:t>Výběr počtu prvků</a:t>
+            </a:r>
+          </a:p>
+          <a:p>
+            <a:pPr marL="493395" lvl="1">
+              <a:buFont typeface="Wingdings 2,Sans-Serif" panose="020B0604020202020204" pitchFamily="34" charset="0"/>
+              <a:buChar char=""/>
+            </a:pPr>
+            <a:r>
+              <a:rPr lang="cs-CZ" dirty="0"/>
+              <a:t>Filtrování</a:t>
+            </a:r>
+          </a:p>
+          <a:p>
+            <a:pPr marL="493395" lvl="1">
+              <a:buFont typeface="Wingdings 2,Sans-Serif" panose="020B0604020202020204" pitchFamily="34" charset="0"/>
+              <a:buChar char=""/>
+            </a:pPr>
+            <a:r>
+              <a:rPr lang="cs-CZ" dirty="0"/>
+              <a:t>Hromadná úprava nad prvky</a:t>
+            </a:r>
           </a:p>
           <a:p>
             <a:endParaRPr lang="cs-CZ" dirty="0"/>
           </a:p>
-          <a:p>
-            <a:r>
-              <a:rPr lang="cs-CZ" b="1" dirty="0" err="1"/>
-              <a:t>Zvirata.OderBy</a:t>
-            </a:r>
-            <a:r>
-              <a:rPr lang="cs-CZ" b="1" dirty="0"/>
-              <a:t>(x =&gt; </a:t>
-            </a:r>
-            <a:r>
-              <a:rPr lang="cs-CZ" b="1" dirty="0" err="1"/>
-              <a:t>x.vek</a:t>
-            </a:r>
-            <a:r>
-              <a:rPr lang="cs-CZ" b="1" dirty="0"/>
-              <a:t>)</a:t>
-            </a:r>
-          </a:p>
-          <a:p>
-            <a:pPr lvl="1"/>
-            <a:r>
-              <a:rPr lang="cs-CZ" dirty="0"/>
-              <a:t>Seřazení podle parametru věk</a:t>
-            </a:r>
-          </a:p>
-          <a:p>
-            <a:r>
-              <a:rPr lang="cs-CZ" b="1" dirty="0" err="1"/>
-              <a:t>Zvirata.Where</a:t>
-            </a:r>
-            <a:r>
-              <a:rPr lang="cs-CZ" b="1" dirty="0"/>
-              <a:t>( x =&gt; </a:t>
-            </a:r>
-            <a:r>
-              <a:rPr lang="cs-CZ" b="1" dirty="0" err="1"/>
-              <a:t>x.vek</a:t>
-            </a:r>
-            <a:r>
-              <a:rPr lang="cs-CZ" b="1" dirty="0"/>
-              <a:t> &gt; 10)</a:t>
-            </a:r>
-          </a:p>
-          <a:p>
-            <a:pPr lvl="1"/>
-            <a:r>
-              <a:rPr lang="cs-CZ" dirty="0"/>
-              <a:t>Získání zvířat starších než 10 let</a:t>
-            </a:r>
-          </a:p>
-          <a:p>
-            <a:r>
-              <a:rPr lang="cs-CZ" b="1" dirty="0" err="1"/>
-              <a:t>Zvirata.Select</a:t>
-            </a:r>
-            <a:r>
-              <a:rPr lang="cs-CZ" b="1" dirty="0"/>
-              <a:t>(x =&gt; x.name == „</a:t>
-            </a:r>
-            <a:r>
-              <a:rPr lang="cs-CZ" b="1" dirty="0" err="1"/>
-              <a:t>Mo</a:t>
-            </a:r>
-            <a:r>
-              <a:rPr lang="cs-CZ" b="1" dirty="0"/>
-              <a:t>“ &amp;&amp; </a:t>
-            </a:r>
-            <a:r>
-              <a:rPr lang="cs-CZ" b="1" dirty="0" err="1"/>
-              <a:t>x.vek</a:t>
-            </a:r>
-            <a:r>
-              <a:rPr lang="cs-CZ" b="1" dirty="0"/>
-              <a:t> == 4)</a:t>
-            </a:r>
-          </a:p>
-          <a:p>
-            <a:pPr lvl="1"/>
-            <a:r>
-              <a:rPr lang="cs-CZ" dirty="0"/>
-              <a:t>Nelezení zvířat se jménem Kamil a s věkem 4 roky</a:t>
-            </a:r>
-          </a:p>
-          <a:p>
-            <a:r>
-              <a:rPr lang="cs-CZ" b="1" dirty="0" err="1"/>
-              <a:t>Zvirata.OderByDescending</a:t>
-            </a:r>
-            <a:r>
-              <a:rPr lang="cs-CZ" b="1" dirty="0"/>
-              <a:t>(x =&gt; </a:t>
-            </a:r>
-            <a:r>
-              <a:rPr lang="cs-CZ" b="1" dirty="0" err="1"/>
-              <a:t>x.vek</a:t>
-            </a:r>
-            <a:r>
-              <a:rPr lang="cs-CZ" b="1" dirty="0"/>
-              <a:t>).</a:t>
-            </a:r>
-            <a:r>
-              <a:rPr lang="cs-CZ" b="1" dirty="0" err="1"/>
-              <a:t>Take</a:t>
-            </a:r>
-            <a:r>
-              <a:rPr lang="cs-CZ" b="1" dirty="0"/>
-              <a:t>(5)</a:t>
-            </a:r>
-          </a:p>
-          <a:p>
-            <a:pPr lvl="1"/>
-            <a:r>
-              <a:rPr lang="cs-CZ" dirty="0"/>
-              <a:t>Seřaď podle věku a vezmi prvních pět výsledků</a:t>
-            </a:r>
-          </a:p>
-        </p:txBody>
-      </p:sp>
-      <p:sp>
-        <p:nvSpPr>
-          <p:cNvPr id="14" name="Rectangle 13">
+        </p:txBody>
+      </p:sp>
+      <p:sp>
+        <p:nvSpPr>
+          <p:cNvPr id="17" name="Rectangle 16">
             <a:extLst>
               <a:ext uri="{FF2B5EF4-FFF2-40B4-BE49-F238E27FC236}">
                 <a16:creationId xmlns:a16="http://schemas.microsoft.com/office/drawing/2014/main" id="{9A206779-5C74-4555-94BC-5845C92EC3A8}"/>
@@ -5952,10 +6395,794 @@
           </a:p>
         </p:txBody>
       </p:sp>
+      <p:sp>
+        <p:nvSpPr>
+          <p:cNvPr id="4" name="Zástupný symbol pro datum 3">
+            <a:extLst>
+              <a:ext uri="{FF2B5EF4-FFF2-40B4-BE49-F238E27FC236}">
+                <a16:creationId xmlns:a16="http://schemas.microsoft.com/office/drawing/2014/main" id="{E731E4FA-8CCA-1B76-AE25-EFB60C6089FD}"/>
+              </a:ext>
+            </a:extLst>
+          </p:cNvPr>
+          <p:cNvSpPr>
+            <a:spLocks noGrp="1"/>
+          </p:cNvSpPr>
+          <p:nvPr>
+            <p:ph type="dt" sz="half" idx="10"/>
+          </p:nvPr>
+        </p:nvSpPr>
+        <p:spPr>
+          <a:xfrm>
+            <a:off x="262465" y="6356350"/>
+            <a:ext cx="2743200" cy="365125"/>
+          </a:xfrm>
+        </p:spPr>
+        <p:txBody>
+          <a:bodyPr>
+            <a:normAutofit/>
+          </a:bodyPr>
+          <a:lstStyle/>
+          <a:p>
+            <a:pPr>
+              <a:spcAft>
+                <a:spcPts val="600"/>
+              </a:spcAft>
+            </a:pPr>
+            <a:fld id="{07DEE0F4-DEED-4209-98D6-059278500C92}" type="datetime1">
+              <a:pPr>
+                <a:spcAft>
+                  <a:spcPts val="600"/>
+                </a:spcAft>
+              </a:pPr>
+              <a:t>08.10.2025</a:t>
+            </a:fld>
+            <a:endParaRPr lang="en-US"/>
+          </a:p>
+        </p:txBody>
+      </p:sp>
+      <p:sp>
+        <p:nvSpPr>
+          <p:cNvPr id="5" name="Zástupný symbol pro zápatí 4">
+            <a:extLst>
+              <a:ext uri="{FF2B5EF4-FFF2-40B4-BE49-F238E27FC236}">
+                <a16:creationId xmlns:a16="http://schemas.microsoft.com/office/drawing/2014/main" id="{35D6B586-4D19-46CF-E877-55388D983153}"/>
+              </a:ext>
+            </a:extLst>
+          </p:cNvPr>
+          <p:cNvSpPr>
+            <a:spLocks noGrp="1"/>
+          </p:cNvSpPr>
+          <p:nvPr>
+            <p:ph type="ftr" sz="quarter" idx="11"/>
+          </p:nvPr>
+        </p:nvSpPr>
+        <p:spPr>
+          <a:xfrm>
+            <a:off x="3869268" y="6356350"/>
+            <a:ext cx="5911517" cy="365125"/>
+          </a:xfrm>
+        </p:spPr>
+        <p:txBody>
+          <a:bodyPr>
+            <a:normAutofit/>
+          </a:bodyPr>
+          <a:lstStyle/>
+          <a:p>
+            <a:pPr>
+              <a:lnSpc>
+                <a:spcPct val="90000"/>
+              </a:lnSpc>
+              <a:spcAft>
+                <a:spcPts val="600"/>
+              </a:spcAft>
+            </a:pPr>
+            <a:r>
+              <a:rPr lang="en-US" sz="700"/>
+              <a:t>
+              </a:t>
+            </a:r>
+          </a:p>
+        </p:txBody>
+      </p:sp>
+      <p:sp>
+        <p:nvSpPr>
+          <p:cNvPr id="6" name="Zástupný symbol pro číslo snímku 5">
+            <a:extLst>
+              <a:ext uri="{FF2B5EF4-FFF2-40B4-BE49-F238E27FC236}">
+                <a16:creationId xmlns:a16="http://schemas.microsoft.com/office/drawing/2014/main" id="{95AA926F-7990-FDFC-A34B-D0F5961E00DF}"/>
+              </a:ext>
+            </a:extLst>
+          </p:cNvPr>
+          <p:cNvSpPr>
+            <a:spLocks noGrp="1"/>
+          </p:cNvSpPr>
+          <p:nvPr>
+            <p:ph type="sldNum" sz="quarter" idx="12"/>
+          </p:nvPr>
+        </p:nvSpPr>
+        <p:spPr>
+          <a:xfrm>
+            <a:off x="10634135" y="6356350"/>
+            <a:ext cx="1530927" cy="365125"/>
+          </a:xfrm>
+        </p:spPr>
+        <p:txBody>
+          <a:bodyPr>
+            <a:normAutofit/>
+          </a:bodyPr>
+          <a:lstStyle/>
+          <a:p>
+            <a:pPr>
+              <a:spcAft>
+                <a:spcPts val="600"/>
+              </a:spcAft>
+            </a:pPr>
+            <a:fld id="{70C12960-6E85-460F-B6E3-5B82CB31AF3D}" type="slidenum">
+              <a:rPr lang="en-US" dirty="0"/>
+              <a:pPr>
+                <a:spcAft>
+                  <a:spcPts val="600"/>
+                </a:spcAft>
+              </a:pPr>
+              <a:t>6</a:t>
+            </a:fld>
+            <a:endParaRPr lang="en-US"/>
+          </a:p>
+        </p:txBody>
+      </p:sp>
     </p:spTree>
     <p:extLst>
       <p:ext uri="{BB962C8B-B14F-4D97-AF65-F5344CB8AC3E}">
-        <p14:creationId xmlns:p14="http://schemas.microsoft.com/office/powerpoint/2010/main" val="3347205438"/>
+        <p14:creationId xmlns:p14="http://schemas.microsoft.com/office/powerpoint/2010/main" val="2488633858"/>
+      </p:ext>
+    </p:extLst>
+  </p:cSld>
+  <p:clrMapOvr>
+    <a:masterClrMapping/>
+  </p:clrMapOvr>
+</p:sld>
+</file>
+
+<file path=ppt/slides/slide7.xml><?xml version="1.0" encoding="utf-8"?>
+<p:sld xmlns:a="http://schemas.openxmlformats.org/drawingml/2006/main" xmlns:r="http://schemas.openxmlformats.org/officeDocument/2006/relationships" xmlns:p="http://schemas.openxmlformats.org/presentationml/2006/main">
+  <p:cSld>
+    <p:bg>
+      <p:bgPr>
+        <a:solidFill>
+          <a:schemeClr val="bg1"/>
+        </a:solidFill>
+        <a:effectLst/>
+      </p:bgPr>
+    </p:bg>
+    <p:spTree>
+      <p:nvGrpSpPr>
+        <p:cNvPr id="1" name=""/>
+        <p:cNvGrpSpPr/>
+        <p:nvPr/>
+      </p:nvGrpSpPr>
+      <p:grpSpPr>
+        <a:xfrm>
+          <a:off x="0" y="0"/>
+          <a:ext cx="0" cy="0"/>
+          <a:chOff x="0" y="0"/>
+          <a:chExt cx="0" cy="0"/>
+        </a:xfrm>
+      </p:grpSpPr>
+      <p:sp useBgFill="1">
+        <p:nvSpPr>
+          <p:cNvPr id="11" name="Rectangle 10">
+            <a:extLst>
+              <a:ext uri="{FF2B5EF4-FFF2-40B4-BE49-F238E27FC236}">
+                <a16:creationId xmlns:a16="http://schemas.microsoft.com/office/drawing/2014/main" id="{80516254-1D9F-4F3A-9870-3A3280BE2BFE}"/>
+              </a:ext>
+              <a:ext uri="{C183D7F6-B498-43B3-948B-1728B52AA6E4}">
+                <adec:decorative xmlns:adec="http://schemas.microsoft.com/office/drawing/2017/decorative" val="1"/>
+              </a:ext>
+            </a:extLst>
+          </p:cNvPr>
+          <p:cNvSpPr>
+            <a:spLocks noGrp="1" noRot="1" noChangeAspect="1" noMove="1" noResize="1" noEditPoints="1" noAdjustHandles="1" noChangeArrowheads="1" noChangeShapeType="1" noTextEdit="1"/>
+          </p:cNvSpPr>
+          <p:nvPr>
+            <p:extLst>
+              <p:ext uri="{386F3935-93C4-4BCD-93E2-E3B085C9AB24}">
+                <p16:designElem xmlns:p16="http://schemas.microsoft.com/office/powerpoint/2015/main" val="1"/>
+              </p:ext>
+            </p:extLst>
+          </p:nvPr>
+        </p:nvSpPr>
+        <p:spPr>
+          <a:xfrm>
+            <a:off x="0" y="0"/>
+            <a:ext cx="12192000" cy="6858000"/>
+          </a:xfrm>
+          <a:prstGeom prst="rect">
+            <a:avLst/>
+          </a:prstGeom>
+          <a:ln>
+            <a:noFill/>
+          </a:ln>
+        </p:spPr>
+        <p:style>
+          <a:lnRef idx="2">
+            <a:schemeClr val="accent1">
+              <a:shade val="50000"/>
+            </a:schemeClr>
+          </a:lnRef>
+          <a:fillRef idx="1">
+            <a:schemeClr val="accent1"/>
+          </a:fillRef>
+          <a:effectRef idx="0">
+            <a:schemeClr val="accent1"/>
+          </a:effectRef>
+          <a:fontRef idx="minor">
+            <a:schemeClr val="lt1"/>
+          </a:fontRef>
+        </p:style>
+      </p:sp>
+      <p:sp>
+        <p:nvSpPr>
+          <p:cNvPr id="2" name="Nadpis 1">
+            <a:extLst>
+              <a:ext uri="{FF2B5EF4-FFF2-40B4-BE49-F238E27FC236}">
+                <a16:creationId xmlns:a16="http://schemas.microsoft.com/office/drawing/2014/main" id="{0A2E4916-71C1-A566-7DCB-808237EA76D1}"/>
+              </a:ext>
+            </a:extLst>
+          </p:cNvPr>
+          <p:cNvSpPr>
+            <a:spLocks noGrp="1"/>
+          </p:cNvSpPr>
+          <p:nvPr>
+            <p:ph type="title"/>
+          </p:nvPr>
+        </p:nvSpPr>
+        <p:spPr>
+          <a:xfrm>
+            <a:off x="1539116" y="864108"/>
+            <a:ext cx="3073914" cy="5120639"/>
+          </a:xfrm>
+        </p:spPr>
+        <p:txBody>
+          <a:bodyPr>
+            <a:normAutofit/>
+          </a:bodyPr>
+          <a:lstStyle/>
+          <a:p>
+            <a:pPr algn="r"/>
+            <a:r>
+              <a:rPr lang="cs-CZ" dirty="0">
+                <a:solidFill>
+                  <a:schemeClr val="tx1">
+                    <a:lumMod val="85000"/>
+                    <a:lumOff val="15000"/>
+                  </a:schemeClr>
+                </a:solidFill>
+              </a:rPr>
+              <a:t>Lambda funkce s LINQ</a:t>
+            </a:r>
+          </a:p>
+        </p:txBody>
+      </p:sp>
+      <p:sp>
+        <p:nvSpPr>
+          <p:cNvPr id="13" name="Rectangle 12">
+            <a:extLst>
+              <a:ext uri="{FF2B5EF4-FFF2-40B4-BE49-F238E27FC236}">
+                <a16:creationId xmlns:a16="http://schemas.microsoft.com/office/drawing/2014/main" id="{FC14672B-27A5-4CDA-ABAF-5E4CF4B41C23}"/>
+              </a:ext>
+              <a:ext uri="{C183D7F6-B498-43B3-948B-1728B52AA6E4}">
+                <adec:decorative xmlns:adec="http://schemas.microsoft.com/office/drawing/2017/decorative" val="1"/>
+              </a:ext>
+            </a:extLst>
+          </p:cNvPr>
+          <p:cNvSpPr>
+            <a:spLocks noGrp="1" noRot="1" noChangeAspect="1" noMove="1" noResize="1" noEditPoints="1" noAdjustHandles="1" noChangeArrowheads="1" noChangeShapeType="1" noTextEdit="1"/>
+          </p:cNvSpPr>
+          <p:nvPr>
+            <p:extLst>
+              <p:ext uri="{386F3935-93C4-4BCD-93E2-E3B085C9AB24}">
+                <p16:designElem xmlns:p16="http://schemas.microsoft.com/office/powerpoint/2015/main" val="1"/>
+              </p:ext>
+            </p:extLst>
+          </p:nvPr>
+        </p:nvSpPr>
+        <p:spPr>
+          <a:xfrm>
+            <a:off x="0" y="761999"/>
+            <a:ext cx="1286934" cy="5334001"/>
+          </a:xfrm>
+          <a:prstGeom prst="rect">
+            <a:avLst/>
+          </a:prstGeom>
+          <a:solidFill>
+            <a:schemeClr val="accent1"/>
+          </a:solidFill>
+          <a:ln>
+            <a:noFill/>
+          </a:ln>
+        </p:spPr>
+        <p:style>
+          <a:lnRef idx="2">
+            <a:schemeClr val="accent1">
+              <a:shade val="50000"/>
+            </a:schemeClr>
+          </a:lnRef>
+          <a:fillRef idx="1">
+            <a:schemeClr val="accent1"/>
+          </a:fillRef>
+          <a:effectRef idx="0">
+            <a:schemeClr val="accent1"/>
+          </a:effectRef>
+          <a:fontRef idx="minor">
+            <a:schemeClr val="lt1"/>
+          </a:fontRef>
+        </p:style>
+      </p:sp>
+      <p:cxnSp>
+        <p:nvCxnSpPr>
+          <p:cNvPr id="15" name="Straight Connector 14">
+            <a:extLst>
+              <a:ext uri="{FF2B5EF4-FFF2-40B4-BE49-F238E27FC236}">
+                <a16:creationId xmlns:a16="http://schemas.microsoft.com/office/drawing/2014/main" id="{8D89589C-2C90-4407-A995-05EC3DD7AB14}"/>
+              </a:ext>
+              <a:ext uri="{C183D7F6-B498-43B3-948B-1728B52AA6E4}">
+                <adec:decorative xmlns:adec="http://schemas.microsoft.com/office/drawing/2017/decorative" val="1"/>
+              </a:ext>
+            </a:extLst>
+          </p:cNvPr>
+          <p:cNvCxnSpPr>
+            <a:cxnSpLocks noGrp="1" noRot="1" noChangeAspect="1" noMove="1" noResize="1" noEditPoints="1" noAdjustHandles="1" noChangeArrowheads="1" noChangeShapeType="1"/>
+          </p:cNvCxnSpPr>
+          <p:nvPr>
+            <p:extLst>
+              <p:ext uri="{386F3935-93C4-4BCD-93E2-E3B085C9AB24}">
+                <p16:designElem xmlns:p16="http://schemas.microsoft.com/office/powerpoint/2015/main" val="1"/>
+              </p:ext>
+            </p:extLst>
+          </p:nvPr>
+        </p:nvCxnSpPr>
+        <p:spPr>
+          <a:xfrm>
+            <a:off x="4951129" y="2085681"/>
+            <a:ext cx="0" cy="2686639"/>
+          </a:xfrm>
+          <a:prstGeom prst="line">
+            <a:avLst/>
+          </a:prstGeom>
+          <a:ln w="12700">
+            <a:solidFill>
+              <a:schemeClr val="tx1">
+                <a:lumMod val="50000"/>
+                <a:lumOff val="50000"/>
+              </a:schemeClr>
+            </a:solidFill>
+          </a:ln>
+        </p:spPr>
+        <p:style>
+          <a:lnRef idx="1">
+            <a:schemeClr val="accent1"/>
+          </a:lnRef>
+          <a:fillRef idx="0">
+            <a:schemeClr val="accent1"/>
+          </a:fillRef>
+          <a:effectRef idx="0">
+            <a:schemeClr val="accent1"/>
+          </a:effectRef>
+          <a:fontRef idx="minor">
+            <a:schemeClr val="tx1"/>
+          </a:fontRef>
+        </p:style>
+      </p:cxnSp>
+      <p:sp>
+        <p:nvSpPr>
+          <p:cNvPr id="3" name="Zástupný obsah 2">
+            <a:extLst>
+              <a:ext uri="{FF2B5EF4-FFF2-40B4-BE49-F238E27FC236}">
+                <a16:creationId xmlns:a16="http://schemas.microsoft.com/office/drawing/2014/main" id="{C34FD56A-A2CE-02C3-56E4-B943F60F703E}"/>
+              </a:ext>
+            </a:extLst>
+          </p:cNvPr>
+          <p:cNvSpPr>
+            <a:spLocks noGrp="1"/>
+          </p:cNvSpPr>
+          <p:nvPr>
+            <p:ph idx="1"/>
+          </p:nvPr>
+        </p:nvSpPr>
+        <p:spPr>
+          <a:xfrm>
+            <a:off x="5289229" y="864108"/>
+            <a:ext cx="5910677" cy="5120640"/>
+          </a:xfrm>
+        </p:spPr>
+        <p:txBody>
+          <a:bodyPr vert="horz" lIns="91440" tIns="45720" rIns="91440" bIns="45720" rtlCol="0">
+            <a:normAutofit/>
+          </a:bodyPr>
+          <a:lstStyle/>
+          <a:p>
+            <a:r>
+              <a:rPr lang="cs-CZ" dirty="0"/>
+              <a:t>Mějme třídu Animal, která má atributy </a:t>
+            </a:r>
+            <a:r>
+              <a:rPr lang="cs-CZ" dirty="0" err="1"/>
+              <a:t>jmeno</a:t>
+            </a:r>
+            <a:r>
+              <a:rPr lang="cs-CZ" dirty="0"/>
+              <a:t>, vek</a:t>
+            </a:r>
+            <a:endParaRPr lang="cs-CZ"/>
+          </a:p>
+          <a:p>
+            <a:r>
+              <a:rPr lang="cs-CZ" dirty="0"/>
+              <a:t>Mějme seznam zvířat Listr&lt;Animal&gt; </a:t>
+            </a:r>
+            <a:r>
+              <a:rPr lang="cs-CZ" dirty="0" err="1"/>
+              <a:t>zvirata</a:t>
+            </a:r>
+            <a:endParaRPr lang="cs-CZ" err="1"/>
+          </a:p>
+          <a:p>
+            <a:endParaRPr lang="cs-CZ"/>
+          </a:p>
+          <a:p>
+            <a:r>
+              <a:rPr lang="cs-CZ" i="1" err="1"/>
+              <a:t>Zvirata.OderBy</a:t>
+            </a:r>
+            <a:r>
+              <a:rPr lang="cs-CZ" i="1" dirty="0"/>
+              <a:t>(x =&gt; </a:t>
+            </a:r>
+            <a:r>
+              <a:rPr lang="cs-CZ" i="1" err="1"/>
+              <a:t>x.vek</a:t>
+            </a:r>
+            <a:r>
+              <a:rPr lang="cs-CZ" i="1" dirty="0"/>
+              <a:t>)</a:t>
+            </a:r>
+            <a:endParaRPr lang="cs-CZ" i="1"/>
+          </a:p>
+          <a:p>
+            <a:pPr marL="493395" lvl="1">
+              <a:buFont typeface="Wingdings 2,Sans-Serif" panose="020B0604020202020204" pitchFamily="34" charset="0"/>
+              <a:buChar char=""/>
+            </a:pPr>
+            <a:r>
+              <a:rPr lang="cs-CZ" dirty="0"/>
+              <a:t>Seřazení podle parametru věk</a:t>
+            </a:r>
+            <a:endParaRPr lang="cs-CZ"/>
+          </a:p>
+          <a:p>
+            <a:r>
+              <a:rPr lang="cs-CZ" i="1" err="1"/>
+              <a:t>Zvirata.Where</a:t>
+            </a:r>
+            <a:r>
+              <a:rPr lang="cs-CZ" i="1" dirty="0"/>
+              <a:t>( x =&gt; </a:t>
+            </a:r>
+            <a:r>
+              <a:rPr lang="cs-CZ" i="1" err="1"/>
+              <a:t>x.vek</a:t>
+            </a:r>
+            <a:r>
+              <a:rPr lang="cs-CZ" i="1" dirty="0"/>
+              <a:t> &gt; 10)</a:t>
+            </a:r>
+            <a:endParaRPr lang="cs-CZ" i="1"/>
+          </a:p>
+          <a:p>
+            <a:pPr marL="493395" lvl="1">
+              <a:buFont typeface="Wingdings 2,Sans-Serif" panose="020B0604020202020204" pitchFamily="34" charset="0"/>
+              <a:buChar char=""/>
+            </a:pPr>
+            <a:r>
+              <a:rPr lang="cs-CZ" dirty="0"/>
+              <a:t>Získání zvířat starších než 10 let</a:t>
+            </a:r>
+            <a:endParaRPr lang="cs-CZ"/>
+          </a:p>
+          <a:p>
+            <a:r>
+              <a:rPr lang="cs-CZ" i="1" err="1"/>
+              <a:t>Zvirata.Select</a:t>
+            </a:r>
+            <a:r>
+              <a:rPr lang="cs-CZ" i="1" dirty="0"/>
+              <a:t>(x =&gt; x.name == „</a:t>
+            </a:r>
+            <a:r>
+              <a:rPr lang="cs-CZ" i="1" err="1"/>
+              <a:t>Mo</a:t>
+            </a:r>
+            <a:r>
+              <a:rPr lang="cs-CZ" i="1" dirty="0"/>
+              <a:t>“ &amp;&amp; </a:t>
+            </a:r>
+            <a:r>
+              <a:rPr lang="cs-CZ" i="1" err="1"/>
+              <a:t>x.vek</a:t>
+            </a:r>
+            <a:r>
+              <a:rPr lang="cs-CZ" i="1" dirty="0"/>
+              <a:t> == 4)</a:t>
+            </a:r>
+            <a:endParaRPr lang="cs-CZ" i="1"/>
+          </a:p>
+          <a:p>
+            <a:pPr marL="493395" lvl="1">
+              <a:buFont typeface="Wingdings 2,Sans-Serif" panose="020B0604020202020204" pitchFamily="34" charset="0"/>
+              <a:buChar char=""/>
+            </a:pPr>
+            <a:r>
+              <a:rPr lang="cs-CZ" dirty="0"/>
+              <a:t>Nelezení zvířat se jménem </a:t>
+            </a:r>
+            <a:r>
+              <a:rPr lang="cs-CZ" err="1"/>
+              <a:t>Mo</a:t>
+            </a:r>
+            <a:r>
+              <a:rPr lang="cs-CZ" dirty="0"/>
+              <a:t> a s věkem 4 roky</a:t>
+            </a:r>
+            <a:endParaRPr lang="cs-CZ"/>
+          </a:p>
+          <a:p>
+            <a:r>
+              <a:rPr lang="cs-CZ" i="1" err="1"/>
+              <a:t>Zvirata.OderByDescending</a:t>
+            </a:r>
+            <a:r>
+              <a:rPr lang="cs-CZ" i="1" dirty="0"/>
+              <a:t>(x =&gt; </a:t>
+            </a:r>
+            <a:r>
+              <a:rPr lang="cs-CZ" i="1" err="1"/>
+              <a:t>x.vek</a:t>
+            </a:r>
+            <a:r>
+              <a:rPr lang="cs-CZ" i="1" dirty="0"/>
+              <a:t>).</a:t>
+            </a:r>
+            <a:r>
+              <a:rPr lang="cs-CZ" i="1" err="1"/>
+              <a:t>Take</a:t>
+            </a:r>
+            <a:r>
+              <a:rPr lang="cs-CZ" i="1" dirty="0"/>
+              <a:t>(5)</a:t>
+            </a:r>
+            <a:endParaRPr lang="cs-CZ" i="1"/>
+          </a:p>
+          <a:p>
+            <a:pPr marL="493395" lvl="1">
+              <a:buFont typeface="Wingdings 2,Sans-Serif" panose="020B0604020202020204" pitchFamily="34" charset="0"/>
+              <a:buChar char=""/>
+            </a:pPr>
+            <a:r>
+              <a:rPr lang="cs-CZ" dirty="0"/>
+              <a:t>Seřaď podle věku od nejstaršího a vezmi prvních pět výsledků</a:t>
+            </a:r>
+            <a:endParaRPr lang="cs-CZ"/>
+          </a:p>
+          <a:p>
+            <a:endParaRPr lang="cs-CZ" dirty="0"/>
+          </a:p>
+        </p:txBody>
+      </p:sp>
+      <p:sp>
+        <p:nvSpPr>
+          <p:cNvPr id="17" name="Rectangle 16">
+            <a:extLst>
+              <a:ext uri="{FF2B5EF4-FFF2-40B4-BE49-F238E27FC236}">
+                <a16:creationId xmlns:a16="http://schemas.microsoft.com/office/drawing/2014/main" id="{9A206779-5C74-4555-94BC-5845C92EC3A8}"/>
+              </a:ext>
+              <a:ext uri="{C183D7F6-B498-43B3-948B-1728B52AA6E4}">
+                <adec:decorative xmlns:adec="http://schemas.microsoft.com/office/drawing/2017/decorative" val="1"/>
+              </a:ext>
+            </a:extLst>
+          </p:cNvPr>
+          <p:cNvSpPr>
+            <a:spLocks noGrp="1" noRot="1" noChangeAspect="1" noMove="1" noResize="1" noEditPoints="1" noAdjustHandles="1" noChangeArrowheads="1" noChangeShapeType="1" noTextEdit="1"/>
+          </p:cNvSpPr>
+          <p:nvPr>
+            <p:extLst>
+              <p:ext uri="{386F3935-93C4-4BCD-93E2-E3B085C9AB24}">
+                <p16:designElem xmlns:p16="http://schemas.microsoft.com/office/powerpoint/2015/main" val="1"/>
+              </p:ext>
+            </p:extLst>
+          </p:nvPr>
+        </p:nvSpPr>
+        <p:spPr>
+          <a:xfrm>
+            <a:off x="11683988" y="767825"/>
+            <a:ext cx="508012" cy="5328173"/>
+          </a:xfrm>
+          <a:prstGeom prst="rect">
+            <a:avLst/>
+          </a:prstGeom>
+          <a:solidFill>
+            <a:srgbClr val="C8C8C8">
+              <a:alpha val="50000"/>
+            </a:srgbClr>
+          </a:solidFill>
+          <a:ln>
+            <a:noFill/>
+          </a:ln>
+        </p:spPr>
+        <p:style>
+          <a:lnRef idx="2">
+            <a:schemeClr val="accent1">
+              <a:shade val="50000"/>
+            </a:schemeClr>
+          </a:lnRef>
+          <a:fillRef idx="1">
+            <a:schemeClr val="accent1"/>
+          </a:fillRef>
+          <a:effectRef idx="0">
+            <a:schemeClr val="accent1"/>
+          </a:effectRef>
+          <a:fontRef idx="minor">
+            <a:schemeClr val="lt1"/>
+          </a:fontRef>
+        </p:style>
+        <p:txBody>
+          <a:bodyPr rtlCol="0" anchor="ctr"/>
+          <a:lstStyle/>
+          <a:p>
+            <a:pPr algn="ctr"/>
+            <a:endParaRPr lang="en-US"/>
+          </a:p>
+        </p:txBody>
+      </p:sp>
+      <p:sp>
+        <p:nvSpPr>
+          <p:cNvPr id="4" name="Zástupný symbol pro datum 3">
+            <a:extLst>
+              <a:ext uri="{FF2B5EF4-FFF2-40B4-BE49-F238E27FC236}">
+                <a16:creationId xmlns:a16="http://schemas.microsoft.com/office/drawing/2014/main" id="{E4FDFB5D-272C-6ED7-645D-7A60DDD8DB1D}"/>
+              </a:ext>
+            </a:extLst>
+          </p:cNvPr>
+          <p:cNvSpPr>
+            <a:spLocks noGrp="1"/>
+          </p:cNvSpPr>
+          <p:nvPr>
+            <p:ph type="dt" sz="half" idx="10"/>
+          </p:nvPr>
+        </p:nvSpPr>
+        <p:spPr>
+          <a:xfrm>
+            <a:off x="262465" y="6356350"/>
+            <a:ext cx="2743200" cy="365125"/>
+          </a:xfrm>
+        </p:spPr>
+        <p:txBody>
+          <a:bodyPr>
+            <a:normAutofit/>
+          </a:bodyPr>
+          <a:lstStyle/>
+          <a:p>
+            <a:pPr>
+              <a:spcAft>
+                <a:spcPts val="600"/>
+              </a:spcAft>
+            </a:pPr>
+            <a:fld id="{108D1A5A-80D8-4AFD-A562-C2C26F08C9D2}" type="datetime1">
+              <a:rPr lang="cs-CZ"/>
+              <a:pPr>
+                <a:spcAft>
+                  <a:spcPts val="600"/>
+                </a:spcAft>
+              </a:pPr>
+              <a:t>08.10.2025</a:t>
+            </a:fld>
+            <a:endParaRPr lang="en-US"/>
+          </a:p>
+        </p:txBody>
+      </p:sp>
+      <p:sp>
+        <p:nvSpPr>
+          <p:cNvPr id="5" name="Zástupný symbol pro zápatí 4">
+            <a:extLst>
+              <a:ext uri="{FF2B5EF4-FFF2-40B4-BE49-F238E27FC236}">
+                <a16:creationId xmlns:a16="http://schemas.microsoft.com/office/drawing/2014/main" id="{B9BC253A-16AD-4153-957F-7BEDBA30E4F9}"/>
+              </a:ext>
+            </a:extLst>
+          </p:cNvPr>
+          <p:cNvSpPr>
+            <a:spLocks noGrp="1"/>
+          </p:cNvSpPr>
+          <p:nvPr>
+            <p:ph type="ftr" sz="quarter" idx="11"/>
+          </p:nvPr>
+        </p:nvSpPr>
+        <p:spPr>
+          <a:xfrm>
+            <a:off x="3869268" y="6356350"/>
+            <a:ext cx="5911517" cy="365125"/>
+          </a:xfrm>
+        </p:spPr>
+        <p:txBody>
+          <a:bodyPr>
+            <a:normAutofit/>
+          </a:bodyPr>
+          <a:lstStyle/>
+          <a:p>
+            <a:pPr>
+              <a:lnSpc>
+                <a:spcPct val="90000"/>
+              </a:lnSpc>
+              <a:spcAft>
+                <a:spcPts val="600"/>
+              </a:spcAft>
+            </a:pPr>
+            <a:r>
+              <a:rPr lang="en-US" sz="700"/>
+              <a:t>
+              </a:t>
+            </a:r>
+          </a:p>
+        </p:txBody>
+      </p:sp>
+      <p:sp>
+        <p:nvSpPr>
+          <p:cNvPr id="6" name="Zástupný symbol pro číslo snímku 5">
+            <a:extLst>
+              <a:ext uri="{FF2B5EF4-FFF2-40B4-BE49-F238E27FC236}">
+                <a16:creationId xmlns:a16="http://schemas.microsoft.com/office/drawing/2014/main" id="{BA0385A6-47E6-2A51-390B-EC15C08BEEBA}"/>
+              </a:ext>
+            </a:extLst>
+          </p:cNvPr>
+          <p:cNvSpPr>
+            <a:spLocks noGrp="1"/>
+          </p:cNvSpPr>
+          <p:nvPr>
+            <p:ph type="sldNum" sz="quarter" idx="12"/>
+          </p:nvPr>
+        </p:nvSpPr>
+        <p:spPr>
+          <a:xfrm>
+            <a:off x="10634135" y="6356350"/>
+            <a:ext cx="1530927" cy="365125"/>
+          </a:xfrm>
+        </p:spPr>
+        <p:txBody>
+          <a:bodyPr>
+            <a:normAutofit/>
+          </a:bodyPr>
+          <a:lstStyle/>
+          <a:p>
+            <a:pPr>
+              <a:spcAft>
+                <a:spcPts val="600"/>
+              </a:spcAft>
+            </a:pPr>
+            <a:fld id="{70C12960-6E85-460F-B6E3-5B82CB31AF3D}" type="slidenum">
+              <a:rPr lang="en-US" dirty="0"/>
+              <a:pPr>
+                <a:spcAft>
+                  <a:spcPts val="600"/>
+                </a:spcAft>
+              </a:pPr>
+              <a:t>7</a:t>
+            </a:fld>
+            <a:endParaRPr lang="en-US"/>
+          </a:p>
+        </p:txBody>
+      </p:sp>
+    </p:spTree>
+    <p:extLst>
+      <p:ext uri="{BB962C8B-B14F-4D97-AF65-F5344CB8AC3E}">
+        <p14:creationId xmlns:p14="http://schemas.microsoft.com/office/powerpoint/2010/main" val="2969055992"/>
       </p:ext>
     </p:extLst>
   </p:cSld>
@@ -5966,9 +7193,9 @@
 </file>
 
 <file path=ppt/theme/theme1.xml><?xml version="1.0" encoding="utf-8"?>
-<a:theme xmlns:a="http://schemas.openxmlformats.org/drawingml/2006/main" name="Rámeček">
+<a:theme xmlns:a="http://schemas.openxmlformats.org/drawingml/2006/main" name="Frame">
   <a:themeElements>
-    <a:clrScheme name="Rámeček">
+    <a:clrScheme name="Frame">
       <a:dk1>
         <a:srgbClr val="000000"/>
       </a:dk1>
@@ -6006,7 +7233,7 @@
         <a:srgbClr val="EE7008"/>
       </a:folHlink>
     </a:clrScheme>
-    <a:fontScheme name="Rámeček">
+    <a:fontScheme name="Frame">
       <a:majorFont>
         <a:latin typeface="Corbel" panose="020B0503020204020204"/>
         <a:ea typeface=""/>
@@ -6078,7 +7305,7 @@
         <a:font script="Geor" typeface="Sylfaen"/>
       </a:minorFont>
     </a:fontScheme>
-    <a:fmtScheme name="Rámeček">
+    <a:fmtScheme name="Frame">
       <a:fillStyleLst>
         <a:solidFill>
           <a:schemeClr val="phClr"/>
@@ -6194,4 +7421,192 @@
     </a:ext>
   </a:extLst>
 </a:theme>
+</file>
+
+<file path=customXml/item1.xml><?xml version="1.0" encoding="utf-8"?>
+<ct:contentTypeSchema xmlns:ct="http://schemas.microsoft.com/office/2006/metadata/contentType" xmlns:ma="http://schemas.microsoft.com/office/2006/metadata/properties/metaAttributes" ct:_="" ma:_="" ma:contentTypeName="Dokument" ma:contentTypeID="0x0101008CE2A45C9465344C82E13FF5CD6CAB18" ma:contentTypeVersion="3" ma:contentTypeDescription="Vytvoří nový dokument" ma:contentTypeScope="" ma:versionID="0b660b16efff6f7d33e0f3f91cc750db">
+  <xsd:schema xmlns:xsd="http://www.w3.org/2001/XMLSchema" xmlns:xs="http://www.w3.org/2001/XMLSchema" xmlns:p="http://schemas.microsoft.com/office/2006/metadata/properties" xmlns:ns2="9f06fd36-3974-42fc-9473-a33c4fd7fa23" targetNamespace="http://schemas.microsoft.com/office/2006/metadata/properties" ma:root="true" ma:fieldsID="56697927089977016a4d38cd467d94e5" ns2:_="">
+    <xsd:import namespace="9f06fd36-3974-42fc-9473-a33c4fd7fa23"/>
+    <xsd:element name="properties">
+      <xsd:complexType>
+        <xsd:sequence>
+          <xsd:element name="documentManagement">
+            <xsd:complexType>
+              <xsd:all>
+                <xsd:element ref="ns2:MediaServiceMetadata" minOccurs="0"/>
+                <xsd:element ref="ns2:MediaServiceFastMetadata" minOccurs="0"/>
+                <xsd:element ref="ns2:MediaServiceSearchProperties" minOccurs="0"/>
+              </xsd:all>
+            </xsd:complexType>
+          </xsd:element>
+        </xsd:sequence>
+      </xsd:complexType>
+    </xsd:element>
+  </xsd:schema>
+  <xsd:schema xmlns:xsd="http://www.w3.org/2001/XMLSchema" xmlns:xs="http://www.w3.org/2001/XMLSchema" xmlns:dms="http://schemas.microsoft.com/office/2006/documentManagement/types" xmlns:pc="http://schemas.microsoft.com/office/infopath/2007/PartnerControls" targetNamespace="9f06fd36-3974-42fc-9473-a33c4fd7fa23" elementFormDefault="qualified">
+    <xsd:import namespace="http://schemas.microsoft.com/office/2006/documentManagement/types"/>
+    <xsd:import namespace="http://schemas.microsoft.com/office/infopath/2007/PartnerControls"/>
+    <xsd:element name="MediaServiceMetadata" ma:index="8" nillable="true" ma:displayName="MediaServiceMetadata" ma:hidden="true" ma:internalName="MediaServiceMetadata" ma:readOnly="true">
+      <xsd:simpleType>
+        <xsd:restriction base="dms:Note"/>
+      </xsd:simpleType>
+    </xsd:element>
+    <xsd:element name="MediaServiceFastMetadata" ma:index="9" nillable="true" ma:displayName="MediaServiceFastMetadata" ma:hidden="true" ma:internalName="MediaServiceFastMetadata" ma:readOnly="true">
+      <xsd:simpleType>
+        <xsd:restriction base="dms:Note"/>
+      </xsd:simpleType>
+    </xsd:element>
+    <xsd:element name="MediaServiceSearchProperties" ma:index="10" nillable="true" ma:displayName="MediaServiceSearchProperties" ma:hidden="true" ma:internalName="MediaServiceSearchProperties" ma:readOnly="true">
+      <xsd:simpleType>
+        <xsd:restriction base="dms:Note"/>
+      </xsd:simpleType>
+    </xsd:element>
+  </xsd:schema>
+  <xsd:schema xmlns="http://schemas.openxmlformats.org/package/2006/metadata/core-properties" xmlns:xsd="http://www.w3.org/2001/XMLSchema" xmlns:xsi="http://www.w3.org/2001/XMLSchema-instance" xmlns:dc="http://purl.org/dc/elements/1.1/" xmlns:dcterms="http://purl.org/dc/terms/" xmlns:odoc="http://schemas.microsoft.com/internal/obd" targetNamespace="http://schemas.openxmlformats.org/package/2006/metadata/core-properties" elementFormDefault="qualified" attributeFormDefault="unqualified" blockDefault="#all">
+    <xsd:import namespace="http://purl.org/dc/elements/1.1/" schemaLocation="http://dublincore.org/schemas/xmls/qdc/2003/04/02/dc.xsd"/>
+    <xsd:import namespace="http://purl.org/dc/terms/" schemaLocation="http://dublincore.org/schemas/xmls/qdc/2003/04/02/dcterms.xsd"/>
+    <xsd:element name="coreProperties" type="CT_coreProperties"/>
+    <xsd:complexType name="CT_coreProperties">
+      <xsd:all>
+        <xsd:element ref="dc:creator" minOccurs="0" maxOccurs="1"/>
+        <xsd:element ref="dcterms:created" minOccurs="0" maxOccurs="1"/>
+        <xsd:element ref="dc:identifier" minOccurs="0" maxOccurs="1"/>
+        <xsd:element name="contentType" minOccurs="0" maxOccurs="1" type="xsd:string" ma:index="0" ma:displayName="Typ obsahu"/>
+        <xsd:element ref="dc:title" minOccurs="0" maxOccurs="1" ma:index="4" ma:displayName="Nadpis"/>
+        <xsd:element ref="dc:subject" minOccurs="0" maxOccurs="1"/>
+        <xsd:element ref="dc:description" minOccurs="0" maxOccurs="1"/>
+        <xsd:element name="keywords" minOccurs="0" maxOccurs="1" type="xsd:string"/>
+        <xsd:element ref="dc:language" minOccurs="0" maxOccurs="1"/>
+        <xsd:element name="category" minOccurs="0" maxOccurs="1" type="xsd:string"/>
+        <xsd:element name="version" minOccurs="0" maxOccurs="1" type="xsd:string"/>
+        <xsd:element name="revision" minOccurs="0" maxOccurs="1" type="xsd:string">
+          <xsd:annotation>
+            <xsd:documentation>
+                        This value indicates the number of saves or revisions. The application is responsible for updating this value after each revision.
+                    </xsd:documentation>
+          </xsd:annotation>
+        </xsd:element>
+        <xsd:element name="lastModifiedBy" minOccurs="0" maxOccurs="1" type="xsd:string"/>
+        <xsd:element ref="dcterms:modified" minOccurs="0" maxOccurs="1"/>
+        <xsd:element name="contentStatus" minOccurs="0" maxOccurs="1" type="xsd:string"/>
+      </xsd:all>
+    </xsd:complexType>
+  </xsd:schema>
+  <xs:schema xmlns:pc="http://schemas.microsoft.com/office/infopath/2007/PartnerControls" xmlns:xs="http://www.w3.org/2001/XMLSchema" targetNamespace="http://schemas.microsoft.com/office/infopath/2007/PartnerControls" elementFormDefault="qualified" attributeFormDefault="unqualified">
+    <xs:element name="Person">
+      <xs:complexType>
+        <xs:sequence>
+          <xs:element ref="pc:DisplayName" minOccurs="0"/>
+          <xs:element ref="pc:AccountId" minOccurs="0"/>
+          <xs:element ref="pc:AccountType" minOccurs="0"/>
+        </xs:sequence>
+      </xs:complexType>
+    </xs:element>
+    <xs:element name="DisplayName" type="xs:string"/>
+    <xs:element name="AccountId" type="xs:string"/>
+    <xs:element name="AccountType" type="xs:string"/>
+    <xs:element name="BDCAssociatedEntity">
+      <xs:complexType>
+        <xs:sequence>
+          <xs:element ref="pc:BDCEntity" minOccurs="0" maxOccurs="unbounded"/>
+        </xs:sequence>
+        <xs:attribute ref="pc:EntityNamespace"/>
+        <xs:attribute ref="pc:EntityName"/>
+        <xs:attribute ref="pc:SystemInstanceName"/>
+        <xs:attribute ref="pc:AssociationName"/>
+      </xs:complexType>
+    </xs:element>
+    <xs:attribute name="EntityNamespace" type="xs:string"/>
+    <xs:attribute name="EntityName" type="xs:string"/>
+    <xs:attribute name="SystemInstanceName" type="xs:string"/>
+    <xs:attribute name="AssociationName" type="xs:string"/>
+    <xs:element name="BDCEntity">
+      <xs:complexType>
+        <xs:sequence>
+          <xs:element ref="pc:EntityDisplayName" minOccurs="0"/>
+          <xs:element ref="pc:EntityInstanceReference" minOccurs="0"/>
+          <xs:element ref="pc:EntityId1" minOccurs="0"/>
+          <xs:element ref="pc:EntityId2" minOccurs="0"/>
+          <xs:element ref="pc:EntityId3" minOccurs="0"/>
+          <xs:element ref="pc:EntityId4" minOccurs="0"/>
+          <xs:element ref="pc:EntityId5" minOccurs="0"/>
+        </xs:sequence>
+      </xs:complexType>
+    </xs:element>
+    <xs:element name="EntityDisplayName" type="xs:string"/>
+    <xs:element name="EntityInstanceReference" type="xs:string"/>
+    <xs:element name="EntityId1" type="xs:string"/>
+    <xs:element name="EntityId2" type="xs:string"/>
+    <xs:element name="EntityId3" type="xs:string"/>
+    <xs:element name="EntityId4" type="xs:string"/>
+    <xs:element name="EntityId5" type="xs:string"/>
+    <xs:element name="Terms">
+      <xs:complexType>
+        <xs:sequence>
+          <xs:element ref="pc:TermInfo" minOccurs="0" maxOccurs="unbounded"/>
+        </xs:sequence>
+      </xs:complexType>
+    </xs:element>
+    <xs:element name="TermInfo">
+      <xs:complexType>
+        <xs:sequence>
+          <xs:element ref="pc:TermName" minOccurs="0"/>
+          <xs:element ref="pc:TermId" minOccurs="0"/>
+        </xs:sequence>
+      </xs:complexType>
+    </xs:element>
+    <xs:element name="TermName" type="xs:string"/>
+    <xs:element name="TermId" type="xs:string"/>
+  </xs:schema>
+</ct:contentTypeSchema>
+</file>
+
+<file path=customXml/item2.xml><?xml version="1.0" encoding="utf-8"?>
+<?mso-contentType ?>
+<FormTemplates xmlns="http://schemas.microsoft.com/sharepoint/v3/contenttype/forms">
+  <Display>DocumentLibraryForm</Display>
+  <Edit>DocumentLibraryForm</Edit>
+  <New>DocumentLibraryForm</New>
+</FormTemplates>
+</file>
+
+<file path=customXml/item3.xml><?xml version="1.0" encoding="utf-8"?>
+<p:properties xmlns:p="http://schemas.microsoft.com/office/2006/metadata/properties" xmlns:xsi="http://www.w3.org/2001/XMLSchema-instance" xmlns:pc="http://schemas.microsoft.com/office/infopath/2007/PartnerControls">
+  <documentManagement/>
+</p:properties>
+</file>
+
+<file path=customXml/itemProps1.xml><?xml version="1.0" encoding="utf-8"?>
+<ds:datastoreItem xmlns:ds="http://schemas.openxmlformats.org/officeDocument/2006/customXml" ds:itemID="{EEB07952-96BC-4F21-A4B0-407265679E1E}">
+  <ds:schemaRefs>
+    <ds:schemaRef ds:uri="http://schemas.microsoft.com/office/2006/metadata/contentType"/>
+    <ds:schemaRef ds:uri="http://schemas.microsoft.com/office/2006/metadata/properties/metaAttributes"/>
+    <ds:schemaRef ds:uri="http://www.w3.org/2001/XMLSchema"/>
+    <ds:schemaRef ds:uri="http://schemas.microsoft.com/office/2006/metadata/properties"/>
+    <ds:schemaRef ds:uri="9f06fd36-3974-42fc-9473-a33c4fd7fa23"/>
+    <ds:schemaRef ds:uri="http://schemas.microsoft.com/office/2006/documentManagement/types"/>
+    <ds:schemaRef ds:uri="http://schemas.microsoft.com/office/infopath/2007/PartnerControls"/>
+    <ds:schemaRef ds:uri="http://schemas.openxmlformats.org/package/2006/metadata/core-properties"/>
+    <ds:schemaRef ds:uri="http://purl.org/dc/elements/1.1/"/>
+    <ds:schemaRef ds:uri="http://purl.org/dc/terms/"/>
+    <ds:schemaRef ds:uri="http://schemas.microsoft.com/internal/obd"/>
+  </ds:schemaRefs>
+</ds:datastoreItem>
+</file>
+
+<file path=customXml/itemProps2.xml><?xml version="1.0" encoding="utf-8"?>
+<ds:datastoreItem xmlns:ds="http://schemas.openxmlformats.org/officeDocument/2006/customXml" ds:itemID="{DDBBD418-77F0-4964-9CF1-DD7D7062F9A3}">
+  <ds:schemaRefs>
+    <ds:schemaRef ds:uri="http://schemas.microsoft.com/sharepoint/v3/contenttype/forms"/>
+  </ds:schemaRefs>
+</ds:datastoreItem>
+</file>
+
+<file path=customXml/itemProps3.xml><?xml version="1.0" encoding="utf-8"?>
+<ds:datastoreItem xmlns:ds="http://schemas.openxmlformats.org/officeDocument/2006/customXml" ds:itemID="{47F462B3-982F-441F-BB08-F3D47180F086}">
+  <ds:schemaRefs>
+    <ds:schemaRef ds:uri="http://schemas.microsoft.com/office/2006/metadata/properties"/>
+    <ds:schemaRef ds:uri="http://schemas.microsoft.com/office/infopath/2007/PartnerControls"/>
+  </ds:schemaRefs>
+</ds:datastoreItem>
 </file>